--- a/slides/apresentacao.pptx
+++ b/slides/apresentacao.pptx
@@ -152,7 +152,7 @@
             <c:idx val="1"/>
             <c:spPr>
               <a:solidFill>
-                <a:srgbClr val="7FB5A8"/>
+                <a:srgbClr val="4E9C8A"/>
               </a:solidFill>
             </c:spPr>
           </c:dPt>
@@ -160,7 +160,7 @@
             <c:idx val="2"/>
             <c:spPr>
               <a:solidFill>
-                <a:srgbClr val="7FB5A8"/>
+                <a:srgbClr val="4E9C8A"/>
               </a:solidFill>
             </c:spPr>
           </c:dPt>
@@ -168,7 +168,7 @@
             <c:idx val="3"/>
             <c:spPr>
               <a:solidFill>
-                <a:srgbClr val="7FB5A8"/>
+                <a:srgbClr val="4E9C8A"/>
               </a:solidFill>
             </c:spPr>
           </c:dPt>
@@ -176,7 +176,7 @@
             <c:idx val="4"/>
             <c:spPr>
               <a:solidFill>
-                <a:srgbClr val="7FB5A8"/>
+                <a:srgbClr val="4E9C8A"/>
               </a:solidFill>
             </c:spPr>
           </c:dPt>
@@ -189,7 +189,7 @@
                   <a:lstStyle/>
                   <a:p>
                     <a:r>
-                      <a:rPr sz="1400" b="1">
+                      <a:rPr sz="2000" b="1">
                         <a:solidFill>
                           <a:srgbClr val="1F2A2E"/>
                         </a:solidFill>
@@ -215,7 +215,7 @@
                   <a:lstStyle/>
                   <a:p>
                     <a:r>
-                      <a:rPr sz="1400" b="1">
+                      <a:rPr sz="2000" b="1">
                         <a:solidFill>
                           <a:srgbClr val="1F2A2E"/>
                         </a:solidFill>
@@ -241,7 +241,7 @@
                   <a:lstStyle/>
                   <a:p>
                     <a:r>
-                      <a:rPr sz="1400" b="1">
+                      <a:rPr sz="2000" b="1">
                         <a:solidFill>
                           <a:srgbClr val="1F2A2E"/>
                         </a:solidFill>
@@ -267,7 +267,7 @@
                   <a:lstStyle/>
                   <a:p>
                     <a:r>
-                      <a:rPr sz="1400" b="1">
+                      <a:rPr sz="2000" b="1">
                         <a:solidFill>
                           <a:srgbClr val="1F2A2E"/>
                         </a:solidFill>
@@ -293,7 +293,7 @@
                   <a:lstStyle/>
                   <a:p>
                     <a:r>
-                      <a:rPr sz="1400" b="1">
+                      <a:rPr sz="2000" b="1">
                         <a:solidFill>
                           <a:srgbClr val="1F2A2E"/>
                         </a:solidFill>
@@ -374,7 +374,7 @@
             <a:lstStyle/>
             <a:p>
               <a:pPr>
-                <a:defRPr sz="1400" b="1"/>
+                <a:defRPr sz="2000" b="1"/>
               </a:pPr>
             </a:p>
           </c:txPr>
@@ -404,7 +404,7 @@
         <c:spPr>
           <a:ln>
             <a:solidFill>
-              <a:srgbClr val="B7C4C1"/>
+              <a:srgbClr val="8A9795"/>
             </a:solidFill>
           </a:ln>
         </c:spPr>
@@ -413,7 +413,7 @@
           <a:lstStyle/>
           <a:p>
             <a:pPr>
-              <a:defRPr sz="1400"/>
+              <a:defRPr sz="1800"/>
             </a:pPr>
           </a:p>
         </c:txPr>
@@ -427,7 +427,7 @@
       <c:valAx>
         <c:axId val="-2113994440"/>
         <c:scaling>
-          <c:max val="60.0"/>
+          <c:max val="62.0"/>
           <c:min val="0.0"/>
         </c:scaling>
         <c:delete/>
@@ -446,7 +446,7 @@
     <a:lstStyle/>
     <a:p>
       <a:pPr>
-        <a:defRPr sz="1400">
+        <a:defRPr sz="1800">
           <a:solidFill>
             <a:srgbClr val="1F2A2E"/>
           </a:solidFill>
@@ -486,7 +486,7 @@
           </c:tx>
           <c:spPr>
             <a:solidFill>
-              <a:srgbClr val="B7C4C1"/>
+              <a:srgbClr val="8A9795"/>
             </a:solidFill>
           </c:spPr>
           <c:dLbls>
@@ -498,7 +498,7 @@
                   <a:lstStyle/>
                   <a:p>
                     <a:r>
-                      <a:rPr sz="1400" b="1">
+                      <a:rPr sz="1800" b="1">
                         <a:solidFill>
                           <a:srgbClr val="1F2A2E"/>
                         </a:solidFill>
@@ -524,7 +524,7 @@
                   <a:lstStyle/>
                   <a:p>
                     <a:r>
-                      <a:rPr sz="1400" b="1">
+                      <a:rPr sz="1800" b="1">
                         <a:solidFill>
                           <a:srgbClr val="1F2A2E"/>
                         </a:solidFill>
@@ -550,7 +550,7 @@
                   <a:lstStyle/>
                   <a:p>
                     <a:r>
-                      <a:rPr sz="1400" b="1">
+                      <a:rPr sz="1800" b="1">
                         <a:solidFill>
                           <a:srgbClr val="1F2A2E"/>
                         </a:solidFill>
@@ -640,7 +640,7 @@
                   <a:lstStyle/>
                   <a:p>
                     <a:r>
-                      <a:rPr sz="1400" b="1">
+                      <a:rPr sz="1800" b="1">
                         <a:solidFill>
                           <a:srgbClr val="1F2A2E"/>
                         </a:solidFill>
@@ -666,7 +666,7 @@
                   <a:lstStyle/>
                   <a:p>
                     <a:r>
-                      <a:rPr sz="1400" b="1">
+                      <a:rPr sz="1800" b="1">
                         <a:solidFill>
                           <a:srgbClr val="1F2A2E"/>
                         </a:solidFill>
@@ -692,7 +692,7 @@
                   <a:lstStyle/>
                   <a:p>
                     <a:r>
-                      <a:rPr sz="1400" b="1">
+                      <a:rPr sz="1800" b="1">
                         <a:solidFill>
                           <a:srgbClr val="1F2A2E"/>
                         </a:solidFill>
@@ -761,7 +761,7 @@
             <a:lstStyle/>
             <a:p>
               <a:pPr>
-                <a:defRPr sz="1400" b="1"/>
+                <a:defRPr sz="2000" b="1"/>
               </a:pPr>
             </a:p>
           </c:txPr>
@@ -774,7 +774,7 @@
           <c:showBubbleSize val="0"/>
           <c:showLeaderLines val="1"/>
         </c:dLbls>
-        <c:gapWidth val="70"/>
+        <c:gapWidth val="25"/>
         <c:overlap val="-5"/>
         <c:axId val="-2068027336"/>
         <c:axId val="-2113994440"/>
@@ -792,7 +792,7 @@
         <c:spPr>
           <a:ln>
             <a:solidFill>
-              <a:srgbClr val="B7C4C1"/>
+              <a:srgbClr val="8A9795"/>
             </a:solidFill>
           </a:ln>
         </c:spPr>
@@ -801,7 +801,7 @@
           <a:lstStyle/>
           <a:p>
             <a:pPr>
-              <a:defRPr sz="1400"/>
+              <a:defRPr sz="1800"/>
             </a:pPr>
           </a:p>
         </c:txPr>
@@ -843,9 +843,9 @@
           <a:lstStyle/>
           <a:p>
             <a:pPr>
-              <a:defRPr sz="1200">
-                <a:solidFill>
-                  <a:srgbClr val="5F6B6D"/>
+              <a:defRPr sz="1800">
+                <a:solidFill>
+                  <a:srgbClr val="3C4649"/>
                 </a:solidFill>
               </a:defRPr>
             </a:pPr>
@@ -867,7 +867,7 @@
     <a:lstStyle/>
     <a:p>
       <a:pPr>
-        <a:defRPr sz="1400">
+        <a:defRPr sz="1800">
           <a:solidFill>
             <a:srgbClr val="1F2A2E"/>
           </a:solidFill>
@@ -910,7 +910,7 @@
             <c:idx val="0"/>
             <c:spPr>
               <a:solidFill>
-                <a:srgbClr val="B7C4C1"/>
+                <a:srgbClr val="8A9795"/>
               </a:solidFill>
             </c:spPr>
           </c:dPt>
@@ -926,7 +926,7 @@
             <c:idx val="2"/>
             <c:spPr>
               <a:solidFill>
-                <a:srgbClr val="7FB5A8"/>
+                <a:srgbClr val="4E9C8A"/>
               </a:solidFill>
             </c:spPr>
           </c:dPt>
@@ -934,7 +934,7 @@
             <c:idx val="3"/>
             <c:spPr>
               <a:solidFill>
-                <a:srgbClr val="7FB5A8"/>
+                <a:srgbClr val="4E9C8A"/>
               </a:solidFill>
             </c:spPr>
           </c:dPt>
@@ -947,7 +947,7 @@
                   <a:lstStyle/>
                   <a:p>
                     <a:r>
-                      <a:rPr sz="1400" b="1">
+                      <a:rPr sz="2000" b="1">
                         <a:solidFill>
                           <a:srgbClr val="1F2A2E"/>
                         </a:solidFill>
@@ -973,7 +973,7 @@
                   <a:lstStyle/>
                   <a:p>
                     <a:r>
-                      <a:rPr sz="1400" b="1">
+                      <a:rPr sz="2000" b="1">
                         <a:solidFill>
                           <a:srgbClr val="1F2A2E"/>
                         </a:solidFill>
@@ -999,7 +999,7 @@
                   <a:lstStyle/>
                   <a:p>
                     <a:r>
-                      <a:rPr sz="1400" b="1">
+                      <a:rPr sz="2000" b="1">
                         <a:solidFill>
                           <a:srgbClr val="1F2A2E"/>
                         </a:solidFill>
@@ -1025,7 +1025,7 @@
                   <a:lstStyle/>
                   <a:p>
                     <a:r>
-                      <a:rPr sz="1400" b="1">
+                      <a:rPr sz="2000" b="1">
                         <a:solidFill>
                           <a:srgbClr val="1F2A2E"/>
                         </a:solidFill>
@@ -1057,7 +1057,7 @@
               <c:strCache>
                 <c:ptCount val="4"/>
                 <c:pt idx="0">
-                  <c:v>Classe majoritária (EGFR)</c:v>
+                  <c:v>Sempre EGFR</c:v>
                 </c:pt>
                 <c:pt idx="1">
                   <c:v>Árvore de decisão</c:v>
@@ -1100,7 +1100,7 @@
             <a:lstStyle/>
             <a:p>
               <a:pPr>
-                <a:defRPr sz="1400" b="1"/>
+                <a:defRPr sz="2000" b="1"/>
               </a:pPr>
             </a:p>
           </c:txPr>
@@ -1130,7 +1130,7 @@
         <c:spPr>
           <a:ln>
             <a:solidFill>
-              <a:srgbClr val="B7C4C1"/>
+              <a:srgbClr val="8A9795"/>
             </a:solidFill>
           </a:ln>
         </c:spPr>
@@ -1139,7 +1139,7 @@
           <a:lstStyle/>
           <a:p>
             <a:pPr>
-              <a:defRPr sz="1400"/>
+              <a:defRPr sz="1800"/>
             </a:pPr>
           </a:p>
         </c:txPr>
@@ -1172,7 +1172,7 @@
     <a:lstStyle/>
     <a:p>
       <a:pPr>
-        <a:defRPr sz="1400">
+        <a:defRPr sz="1800">
           <a:solidFill>
             <a:srgbClr val="1F2A2E"/>
           </a:solidFill>
@@ -1725,7 +1725,7 @@
           </a:p>
           <a:p>
             <a:r>
-              <a:t>[Bernan · 1:00] Resumindo. Com avaliação honesta, a árvore chega a 89,4% de acurácia. Contar o SMILES dá um ganho relativo de 16% sobre só os descritores. E a divisão aleatória superestimaria o resultado entre 1,5% e 5,3%. Os limites: o agrupamento cobre só descritores idênticos, não famílias de moléculas parecidas; o modelo sempre escolhe uma entre quatro classes; e não há validação externa. Como próximos passos: representações estruturais da molécula, divisão por esqueleto molecular, mais dados e probabilidades calibradas. O código e os dados estão no repositório. Obrigado, e estamos abertos a perguntas.</a:t>
+              <a:t>[Bernan · 1:00] Resumindo. Com avaliação honesta, a árvore chega a 89,4% de acurácia. Contar o SMILES dá um ganho relativo de 16% sobre só os descritores. E a divisão aleatória superestimaria o resultado entre 1,5% e 5,3%. Os limites: o agrupamento cobre só descritores idênticos, não famílias de moléculas parecidas; o modelo sempre escolhe uma entre quatro classes; e não há validação externa. O código e os dados estão no repositório. Obrigado, e estamos abertos a perguntas.</a:t>
             </a:r>
           </a:p>
           <a:p/>
@@ -1757,7 +1757,7 @@
           </a:p>
           <a:p>
             <a:r>
-              <a:t>• Próximos passos: representações estruturais da molécula (calculadas com biblioteca de química) enxergariam subestruturas como o C(=O)NO; divisão por esqueleto molecular daria uma estimativa menos otimista; mais dados (outros alvos ou limiar de pChEMBL mais baixo), já que a curva de aprendizado ainda sobe; e poda ou conjunto de árvores para probabilidades calibradas.</a:t>
+              <a:t>• Próximos passos (estão no relatório, não no slide; use se perguntarem): representações estruturais da molécula (calculadas com biblioteca de química) enxergariam subestruturas como o C(=O)NO; divisão por esqueleto molecular daria uma estimativa menos otimista; mais dados (outros alvos ou limiar de pChEMBL mais baixo), já que a curva de aprendizado ainda sobe; e poda ou conjunto de árvores para probabilidades calibradas.</a:t>
             </a:r>
           </a:p>
           <a:p>
@@ -2989,7 +2989,7 @@
           </a:p>
           <a:p>
             <a:r>
-              <a:t>[Bernan · 1:00] Onde a árvore erra? A matriz de confusão, na seed 42, mostra que o maior erro é entre HDAC1 e EGFR: 28,7% de todos os erros. Olhamos exemplos desses erros e alguns têm um mesmo grupo de átomos, o C(=O)NO, que contagens de caracteres não conseguem distinguir. Outro ponto importante: sem poda, toda folha da árvore é pura, então ela diz ter 100% de confiança nas 5.496 previsões do teste, embora 10,3% estejam erradas. A confiança dela, portanto, não distingue acerto de erro. Isso aponta para os próximos passos.</a:t>
+              <a:t>[Bernan · 1:00] Onde a árvore erra? A matriz de confusão, na seed 42, mostra que o maior erro é entre HDAC1 e EGFR: 28,7% de todos os erros. Isso acontece porque os atributos tirados do SMILES são só contagens e podem não bastar para representar a molécula: duas moléculas diferentes podem ter contagens parecidas. Outro ponto importante: sem poda, toda folha da árvore é pura, então ela diz ter 100% de confiança nas 5.496 previsões do teste, embora 10,3% estejam erradas. A confiança dela, portanto, não distingue acerto de erro. Isso aponta para os próximos passos.</a:t>
             </a:r>
           </a:p>
           <a:p/>
@@ -5983,10 +5983,11 @@
           <a:lstStyle/>
           <a:p>
             <a:r>
-              <a:rPr sz="4000">
+              <a:rPr sz="4000" b="1" lang="pt-BR">
                 <a:solidFill>
                   <a:srgbClr val="0F4334"/>
                 </a:solidFill>
+                <a:latin typeface="Calibri"/>
               </a:rPr>
               <a:t>Classificação de alvos proteicos a partir de descritores moleculares do ChEMBL com árvores de decisão</a:t>
             </a:r>
@@ -6014,7 +6015,7 @@
               </a:spcAft>
             </a:pPr>
             <a:r>
-              <a:rPr sz="2000" b="0">
+              <a:rPr sz="2200" lang="pt-BR" b="1">
                 <a:solidFill>
                   <a:srgbClr val="1F2A2E"/>
                 </a:solidFill>
@@ -6025,23 +6026,23 @@
           <a:p>
             <a:pPr algn="ctr"/>
             <a:r>
-              <a:rPr sz="1600" b="0">
-                <a:solidFill>
-                  <a:srgbClr val="5F6B6D"/>
-                </a:solidFill>
-              </a:rPr>
-              <a:t>Universidade Federal do Piauí (UFPI) · PPGCC010 – Aprendizagem de Máquina (2026.2)</a:t>
+              <a:rPr sz="2000" lang="pt-BR" b="0">
+                <a:solidFill>
+                  <a:srgbClr val="1F2A2E"/>
+                </a:solidFill>
+              </a:rPr>
+              <a:t>Universidade Federal do Piauí (UFPI)</a:t>
             </a:r>
           </a:p>
           <a:p>
             <a:pPr algn="ctr"/>
             <a:r>
-              <a:rPr sz="1600" b="0">
-                <a:solidFill>
-                  <a:srgbClr val="5F6B6D"/>
-                </a:solidFill>
-              </a:rPr>
-              <a:t>Prof. Vinicius Ponte Machado</a:t>
+              <a:rPr sz="2000" lang="pt-BR" b="0">
+                <a:solidFill>
+                  <a:srgbClr val="1F2A2E"/>
+                </a:solidFill>
+              </a:rPr>
+              <a:t>PPGCC010 – Aprendizagem de Máquina (2026.2) · Prof. Vinicius Ponte Machado</a:t>
             </a:r>
           </a:p>
         </p:txBody>
@@ -6104,12 +6105,13 @@
           <a:lstStyle/>
           <a:p>
             <a:r>
-              <a:rPr sz="3600">
+              <a:rPr sz="4000" b="1" lang="pt-BR">
                 <a:solidFill>
                   <a:srgbClr val="0F4334"/>
                 </a:solidFill>
-              </a:rPr>
-              <a:t>Conclusões e próximos passos</a:t>
+                <a:latin typeface="Calibri"/>
+              </a:rPr>
+              <a:t>Conclusões e limites</a:t>
             </a:r>
           </a:p>
         </p:txBody>
@@ -6126,8 +6128,8 @@
         </p:nvSpPr>
         <p:spPr>
           <a:xfrm>
-            <a:off x="9966960" y="6217920"/>
-            <a:ext cx="1097280" cy="274320"/>
+            <a:off x="9966960" y="6172200"/>
+            <a:ext cx="1097280" cy="365760"/>
           </a:xfrm>
         </p:spPr>
         <p:txBody>
@@ -6136,14 +6138,14 @@
           <a:p>
             <a:pPr algn="r"/>
             <a:fld id="{B6F15528-21DE-4FAA-801E-634DDDAF4B2B}" type="slidenum">
-              <a:rPr lang="pt-BR" sz="1400">
-                <a:solidFill>
-                  <a:srgbClr val="5F6B6D"/>
+              <a:rPr lang="pt-BR" sz="1800" b="1">
+                <a:solidFill>
+                  <a:srgbClr val="3C4649"/>
                 </a:solidFill>
               </a:rPr>
               <a:t>‹#›</a:t>
             </a:fld>
-            <a:endParaRPr lang="pt-BR" sz="1400"/>
+            <a:endParaRPr lang="pt-BR" sz="1800"/>
           </a:p>
         </p:txBody>
       </p:sp>
@@ -6156,7 +6158,7 @@
         <p:spPr>
           <a:xfrm>
             <a:off x="841248" y="1828800"/>
-            <a:ext cx="3246120" cy="1783080"/>
+            <a:ext cx="3246120" cy="2011680"/>
           </a:xfrm>
           <a:prstGeom prst="roundRect">
             <a:avLst>
@@ -6195,7 +6197,7 @@
               </a:spcAft>
             </a:pPr>
             <a:r>
-              <a:rPr sz="4000" b="1">
+              <a:rPr sz="4000" lang="pt-BR" b="1">
                 <a:solidFill>
                   <a:srgbClr val="0F4334"/>
                 </a:solidFill>
@@ -6206,7 +6208,7 @@
           <a:p>
             <a:pPr algn="ctr"/>
             <a:r>
-              <a:rPr sz="1400" b="0">
+              <a:rPr sz="1800" lang="pt-BR" b="0">
                 <a:solidFill>
                   <a:srgbClr val="1F2A2E"/>
                 </a:solidFill>
@@ -6225,7 +6227,7 @@
         <p:spPr>
           <a:xfrm>
             <a:off x="4297680" y="1828800"/>
-            <a:ext cx="3246120" cy="1783080"/>
+            <a:ext cx="3246120" cy="2011680"/>
           </a:xfrm>
           <a:prstGeom prst="roundRect">
             <a:avLst>
@@ -6264,7 +6266,7 @@
               </a:spcAft>
             </a:pPr>
             <a:r>
-              <a:rPr sz="4000" b="1">
+              <a:rPr sz="4000" lang="pt-BR" b="1">
                 <a:solidFill>
                   <a:srgbClr val="0F4334"/>
                 </a:solidFill>
@@ -6275,7 +6277,7 @@
           <a:p>
             <a:pPr algn="ctr"/>
             <a:r>
-              <a:rPr sz="1400" b="0">
+              <a:rPr sz="1800" lang="pt-BR" b="0">
                 <a:solidFill>
                   <a:srgbClr val="1F2A2E"/>
                 </a:solidFill>
@@ -6294,7 +6296,7 @@
         <p:spPr>
           <a:xfrm>
             <a:off x="7754112" y="1828800"/>
-            <a:ext cx="3246120" cy="1783080"/>
+            <a:ext cx="3246120" cy="2011680"/>
           </a:xfrm>
           <a:prstGeom prst="roundRect">
             <a:avLst>
@@ -6333,7 +6335,7 @@
               </a:spcAft>
             </a:pPr>
             <a:r>
-              <a:rPr sz="4000" b="1">
+              <a:rPr sz="4000" lang="pt-BR" b="1">
                 <a:solidFill>
                   <a:srgbClr val="0F4334"/>
                 </a:solidFill>
@@ -6344,7 +6346,7 @@
           <a:p>
             <a:pPr algn="ctr"/>
             <a:r>
-              <a:rPr sz="1400" b="0">
+              <a:rPr sz="1800" lang="pt-BR" b="0">
                 <a:solidFill>
                   <a:srgbClr val="1F2A2E"/>
                 </a:solidFill>
@@ -6362,8 +6364,8 @@
         </p:nvSpPr>
         <p:spPr>
           <a:xfrm>
-            <a:off x="841248" y="3886200"/>
-            <a:ext cx="4937760" cy="1920240"/>
+            <a:off x="841248" y="4069080"/>
+            <a:ext cx="10058400" cy="1737360"/>
           </a:xfrm>
           <a:prstGeom prst="rect">
             <a:avLst/>
@@ -6382,7 +6384,7 @@
               </a:spcAft>
             </a:pPr>
             <a:r>
-              <a:rPr sz="1800" b="1">
+              <a:rPr sz="2400" lang="pt-BR" b="1">
                 <a:solidFill>
                   <a:srgbClr val="0F4334"/>
                 </a:solidFill>
@@ -6398,12 +6400,12 @@
               <a:buChar char="•"/>
             </a:pPr>
             <a:r>
-              <a:rPr sz="1400" b="0">
+              <a:rPr sz="2200" lang="pt-BR" b="0">
                 <a:solidFill>
                   <a:srgbClr val="1F2A2E"/>
                 </a:solidFill>
               </a:rPr>
-              <a:t>O agrupamento cobre só descritores idênticos, não famílias de moléculas parecidas</a:t>
+              <a:t>Agrupa só descritores idênticos, não famílias de moléculas parecidas</a:t>
             </a:r>
           </a:p>
           <a:p>
@@ -6414,12 +6416,12 @@
               <a:buChar char="•"/>
             </a:pPr>
             <a:r>
-              <a:rPr sz="1400" b="0">
+              <a:rPr sz="2200" lang="pt-BR" b="0">
                 <a:solidFill>
                   <a:srgbClr val="1F2A2E"/>
                 </a:solidFill>
               </a:rPr>
-              <a:t>O modelo sempre escolhe uma de 4 classes</a:t>
+              <a:t>Escolhe sempre uma de 4 classes</a:t>
             </a:r>
           </a:p>
           <a:p>
@@ -6427,26 +6429,26 @@
               <a:buChar char="•"/>
             </a:pPr>
             <a:r>
-              <a:rPr sz="1400" b="0">
+              <a:rPr sz="2200" lang="pt-BR" b="0">
                 <a:solidFill>
                   <a:srgbClr val="1F2A2E"/>
                 </a:solidFill>
               </a:rPr>
-              <a:t>Não há validação externa</a:t>
-            </a:r>
-          </a:p>
-        </p:txBody>
-      </p:sp>
-      <p:sp>
-        <p:nvSpPr>
-          <p:cNvPr id="9" name="Próximos passos"/>
+              <a:t>Sem validação externa</a:t>
+            </a:r>
+          </a:p>
+        </p:txBody>
+      </p:sp>
+      <p:sp>
+        <p:nvSpPr>
+          <p:cNvPr id="9" name="Repositório"/>
           <p:cNvSpPr txBox="1"/>
           <p:nvPr/>
         </p:nvSpPr>
         <p:spPr>
           <a:xfrm>
-            <a:off x="6309360" y="3886200"/>
-            <a:ext cx="4663440" cy="1920240"/>
+            <a:off x="841248" y="5897880"/>
+            <a:ext cx="8686800" cy="365760"/>
           </a:xfrm>
           <a:prstGeom prst="rect">
             <a:avLst/>
@@ -6459,108 +6461,25 @@
           </a:bodyPr>
           <a:lstStyle/>
           <a:p>
-            <a:pPr algn="l">
-              <a:spcAft>
-                <a:spcPts val="400"/>
-              </a:spcAft>
-            </a:pPr>
-            <a:r>
-              <a:rPr sz="1800" b="1">
-                <a:solidFill>
-                  <a:srgbClr val="0F4334"/>
-                </a:solidFill>
-              </a:rPr>
-              <a:t>Próximos passos</a:t>
-            </a:r>
-          </a:p>
-          <a:p>
-            <a:pPr algn="l" marL="228600" indent="-228600">
-              <a:spcAft>
-                <a:spcPts val="400"/>
-              </a:spcAft>
-              <a:buChar char="•"/>
-            </a:pPr>
-            <a:r>
-              <a:rPr sz="1400" b="0">
+            <a:pPr algn="l"/>
+            <a:r>
+              <a:rPr sz="2000" lang="pt-BR" b="1">
                 <a:solidFill>
                   <a:srgbClr val="1F2A2E"/>
                 </a:solidFill>
               </a:rPr>
-              <a:t>Representações estruturais da molécula</a:t>
-            </a:r>
-          </a:p>
-          <a:p>
-            <a:pPr algn="l" marL="228600" indent="-228600">
-              <a:spcAft>
-                <a:spcPts val="400"/>
-              </a:spcAft>
-              <a:buChar char="•"/>
-            </a:pPr>
-            <a:r>
-              <a:rPr sz="1400" b="0">
+              <a:t>Código e dados: </a:t>
+            </a:r>
+            <a:r>
+              <a:rPr sz="2000" lang="pt-BR" b="0">
                 <a:solidFill>
                   <a:srgbClr val="1F2A2E"/>
                 </a:solidFill>
               </a:rPr>
-              <a:t>Divisão por esqueleto molecular</a:t>
-            </a:r>
-          </a:p>
-          <a:p>
-            <a:pPr algn="l" marL="228600" indent="-228600">
-              <a:buChar char="•"/>
-            </a:pPr>
-            <a:r>
-              <a:rPr sz="1400" b="0">
-                <a:solidFill>
-                  <a:srgbClr val="1F2A2E"/>
-                </a:solidFill>
-              </a:rPr>
-              <a:t>Mais dados e probabilidades calibradas</a:t>
-            </a:r>
-          </a:p>
-        </p:txBody>
-      </p:sp>
-      <p:sp>
-        <p:nvSpPr>
-          <p:cNvPr id="10" name="Repositório"/>
-          <p:cNvSpPr txBox="1"/>
-          <p:nvPr/>
-        </p:nvSpPr>
-        <p:spPr>
-          <a:xfrm>
-            <a:off x="841248" y="5989320"/>
-            <a:ext cx="10149840" cy="320040"/>
-          </a:xfrm>
-          <a:prstGeom prst="rect">
-            <a:avLst/>
-          </a:prstGeom>
-          <a:noFill/>
-        </p:spPr>
-        <p:txBody>
-          <a:bodyPr wrap="square" anchor="t" lIns="0" rIns="0" tIns="0" bIns="0">
-            <a:spAutoFit/>
-          </a:bodyPr>
-          <a:lstStyle/>
-          <a:p>
-            <a:pPr algn="l"/>
-            <a:r>
-              <a:rPr sz="1400" b="1">
-                <a:solidFill>
-                  <a:srgbClr val="1F2A2E"/>
-                </a:solidFill>
-              </a:rPr>
-              <a:t>Código e dados: </a:t>
-            </a:r>
-            <a:r>
-              <a:rPr sz="1400" b="0">
-                <a:solidFill>
-                  <a:srgbClr val="1F2A2E"/>
-                </a:solidFill>
-              </a:rPr>
               <a:t>github.com/pumba-dev/machine-learning-practice</a:t>
             </a:r>
             <a:r>
-              <a:rPr sz="1400" b="1">
+              <a:rPr sz="2000" lang="pt-BR" b="1">
                 <a:solidFill>
                   <a:srgbClr val="09846C"/>
                 </a:solidFill>
@@ -6628,10 +6547,11 @@
           <a:lstStyle/>
           <a:p>
             <a:r>
-              <a:rPr sz="3600">
+              <a:rPr sz="4000" b="1" lang="pt-BR">
                 <a:solidFill>
                   <a:srgbClr val="0F4334"/>
                 </a:solidFill>
+                <a:latin typeface="Calibri"/>
               </a:rPr>
               <a:t>Prever o alvo de uma molécula é mais difícil do que parece</a:t>
             </a:r>
@@ -6650,8 +6570,8 @@
         </p:nvSpPr>
         <p:spPr>
           <a:xfrm>
-            <a:off x="9966960" y="6217920"/>
-            <a:ext cx="1097280" cy="274320"/>
+            <a:off x="9966960" y="6172200"/>
+            <a:ext cx="1097280" cy="365760"/>
           </a:xfrm>
         </p:spPr>
         <p:txBody>
@@ -6660,14 +6580,14 @@
           <a:p>
             <a:pPr algn="r"/>
             <a:fld id="{B6F15528-21DE-4FAA-801E-634DDDAF4B2B}" type="slidenum">
-              <a:rPr lang="pt-BR" sz="1400">
-                <a:solidFill>
-                  <a:srgbClr val="5F6B6D"/>
+              <a:rPr lang="pt-BR" sz="1800" b="1">
+                <a:solidFill>
+                  <a:srgbClr val="3C4649"/>
                 </a:solidFill>
               </a:rPr>
               <a:t>‹#›</a:t>
             </a:fld>
-            <a:endParaRPr lang="pt-BR" sz="1400"/>
+            <a:endParaRPr lang="pt-BR" sz="1800"/>
           </a:p>
         </p:txBody>
       </p:sp>
@@ -6680,7 +6600,7 @@
         <p:spPr>
           <a:xfrm>
             <a:off x="841248" y="1828800"/>
-            <a:ext cx="4846320" cy="365760"/>
+            <a:ext cx="4937760" cy="411480"/>
           </a:xfrm>
           <a:prstGeom prst="rect">
             <a:avLst/>
@@ -6695,7 +6615,7 @@
           <a:p>
             <a:pPr algn="l"/>
             <a:r>
-              <a:rPr sz="2000" b="1">
+              <a:rPr sz="2400" lang="pt-BR" b="1">
                 <a:solidFill>
                   <a:srgbClr val="0F4334"/>
                 </a:solidFill>
@@ -6713,8 +6633,8 @@
         </p:nvSpPr>
         <p:spPr>
           <a:xfrm>
-            <a:off x="841248" y="2286000"/>
-            <a:ext cx="2331720" cy="1234440"/>
+            <a:off x="841248" y="2331720"/>
+            <a:ext cx="2377440" cy="1325880"/>
           </a:xfrm>
           <a:prstGeom prst="roundRect">
             <a:avLst>
@@ -6749,11 +6669,11 @@
           <a:p>
             <a:pPr algn="l">
               <a:spcAft>
-                <a:spcPts val="200"/>
+                <a:spcPts val="0"/>
               </a:spcAft>
             </a:pPr>
             <a:r>
-              <a:rPr sz="2000" b="0">
+              <a:rPr sz="2400" lang="pt-BR" b="0">
                 <a:solidFill>
                   <a:srgbClr val="2A78D6"/>
                 </a:solidFill>
@@ -6761,7 +6681,7 @@
               <a:t>●  </a:t>
             </a:r>
             <a:r>
-              <a:rPr sz="2000" b="1">
+              <a:rPr sz="2400" lang="pt-BR" b="1">
                 <a:solidFill>
                   <a:srgbClr val="1F2A2E"/>
                 </a:solidFill>
@@ -6772,7 +6692,7 @@
           <a:p>
             <a:pPr algn="l"/>
             <a:r>
-              <a:rPr sz="1400" b="0">
+              <a:rPr sz="2000" lang="pt-BR" b="0">
                 <a:solidFill>
                   <a:srgbClr val="1F2A2E"/>
                 </a:solidFill>
@@ -6783,7 +6703,7 @@
           <a:p>
             <a:pPr algn="l"/>
             <a:r>
-              <a:rPr sz="1400" b="1">
+              <a:rPr sz="2000" lang="pt-BR" b="1">
                 <a:solidFill>
                   <a:srgbClr val="1F2A2E"/>
                 </a:solidFill>
@@ -6801,8 +6721,8 @@
         </p:nvSpPr>
         <p:spPr>
           <a:xfrm>
-            <a:off x="3355848" y="2286000"/>
-            <a:ext cx="2331720" cy="1234440"/>
+            <a:off x="3383280" y="2331720"/>
+            <a:ext cx="2377440" cy="1325880"/>
           </a:xfrm>
           <a:prstGeom prst="roundRect">
             <a:avLst>
@@ -6837,11 +6757,11 @@
           <a:p>
             <a:pPr algn="l">
               <a:spcAft>
-                <a:spcPts val="200"/>
+                <a:spcPts val="0"/>
               </a:spcAft>
             </a:pPr>
             <a:r>
-              <a:rPr sz="2000" b="0">
+              <a:rPr sz="2400" lang="pt-BR" b="0">
                 <a:solidFill>
                   <a:srgbClr val="EB6834"/>
                 </a:solidFill>
@@ -6849,7 +6769,7 @@
               <a:t>●  </a:t>
             </a:r>
             <a:r>
-              <a:rPr sz="2000" b="1">
+              <a:rPr sz="2400" lang="pt-BR" b="1">
                 <a:solidFill>
                   <a:srgbClr val="1F2A2E"/>
                 </a:solidFill>
@@ -6860,7 +6780,7 @@
           <a:p>
             <a:pPr algn="l"/>
             <a:r>
-              <a:rPr sz="1400" b="0">
+              <a:rPr sz="2000" lang="pt-BR" b="0">
                 <a:solidFill>
                   <a:srgbClr val="1F2A2E"/>
                 </a:solidFill>
@@ -6871,7 +6791,7 @@
           <a:p>
             <a:pPr algn="l"/>
             <a:r>
-              <a:rPr sz="1400" b="1">
+              <a:rPr sz="2000" lang="pt-BR" b="1">
                 <a:solidFill>
                   <a:srgbClr val="1F2A2E"/>
                 </a:solidFill>
@@ -6889,8 +6809,8 @@
         </p:nvSpPr>
         <p:spPr>
           <a:xfrm>
-            <a:off x="841248" y="3703320"/>
-            <a:ext cx="2331720" cy="1234440"/>
+            <a:off x="841248" y="3794760"/>
+            <a:ext cx="2377440" cy="1325880"/>
           </a:xfrm>
           <a:prstGeom prst="roundRect">
             <a:avLst>
@@ -6925,11 +6845,11 @@
           <a:p>
             <a:pPr algn="l">
               <a:spcAft>
-                <a:spcPts val="200"/>
+                <a:spcPts val="0"/>
               </a:spcAft>
             </a:pPr>
             <a:r>
-              <a:rPr sz="2000" b="0">
+              <a:rPr sz="2400" lang="pt-BR" b="0">
                 <a:solidFill>
                   <a:srgbClr val="1BAF7A"/>
                 </a:solidFill>
@@ -6937,7 +6857,7 @@
               <a:t>●  </a:t>
             </a:r>
             <a:r>
-              <a:rPr sz="2000" b="1">
+              <a:rPr sz="2400" lang="pt-BR" b="1">
                 <a:solidFill>
                   <a:srgbClr val="1F2A2E"/>
                 </a:solidFill>
@@ -6948,7 +6868,7 @@
           <a:p>
             <a:pPr algn="l"/>
             <a:r>
-              <a:rPr sz="1400" b="0">
+              <a:rPr sz="2000" lang="pt-BR" b="0">
                 <a:solidFill>
                   <a:srgbClr val="1F2A2E"/>
                 </a:solidFill>
@@ -6959,7 +6879,7 @@
           <a:p>
             <a:pPr algn="l"/>
             <a:r>
-              <a:rPr sz="1400" b="1">
+              <a:rPr sz="2000" lang="pt-BR" b="1">
                 <a:solidFill>
                   <a:srgbClr val="1F2A2E"/>
                 </a:solidFill>
@@ -6977,8 +6897,8 @@
         </p:nvSpPr>
         <p:spPr>
           <a:xfrm>
-            <a:off x="3355848" y="3703320"/>
-            <a:ext cx="2331720" cy="1234440"/>
+            <a:off x="3383280" y="3794760"/>
+            <a:ext cx="2377440" cy="1325880"/>
           </a:xfrm>
           <a:prstGeom prst="roundRect">
             <a:avLst>
@@ -7013,11 +6933,11 @@
           <a:p>
             <a:pPr algn="l">
               <a:spcAft>
-                <a:spcPts val="200"/>
+                <a:spcPts val="0"/>
               </a:spcAft>
             </a:pPr>
             <a:r>
-              <a:rPr sz="2000" b="0">
+              <a:rPr sz="2400" lang="pt-BR" b="0">
                 <a:solidFill>
                   <a:srgbClr val="EDA100"/>
                 </a:solidFill>
@@ -7025,7 +6945,7 @@
               <a:t>●  </a:t>
             </a:r>
             <a:r>
-              <a:rPr sz="2000" b="1">
+              <a:rPr sz="2400" lang="pt-BR" b="1">
                 <a:solidFill>
                   <a:srgbClr val="1F2A2E"/>
                 </a:solidFill>
@@ -7036,7 +6956,7 @@
           <a:p>
             <a:pPr algn="l"/>
             <a:r>
-              <a:rPr sz="1400" b="0">
+              <a:rPr sz="2000" lang="pt-BR" b="0">
                 <a:solidFill>
                   <a:srgbClr val="1F2A2E"/>
                 </a:solidFill>
@@ -7047,7 +6967,7 @@
           <a:p>
             <a:pPr algn="l"/>
             <a:r>
-              <a:rPr sz="1400" b="1">
+              <a:rPr sz="2000" lang="pt-BR" b="1">
                 <a:solidFill>
                   <a:srgbClr val="1F2A2E"/>
                 </a:solidFill>
@@ -7065,8 +6985,8 @@
         </p:nvSpPr>
         <p:spPr>
           <a:xfrm>
-            <a:off x="841248" y="5120640"/>
-            <a:ext cx="4846320" cy="822960"/>
+            <a:off x="841248" y="5257800"/>
+            <a:ext cx="4919472" cy="868680"/>
           </a:xfrm>
           <a:prstGeom prst="roundRect">
             <a:avLst>
@@ -7101,12 +7021,12 @@
           <a:p>
             <a:pPr algn="l"/>
             <a:r>
-              <a:rPr sz="1400" b="0">
+              <a:rPr sz="2000" lang="pt-BR" b="1">
                 <a:solidFill>
                   <a:srgbClr val="1F2A2E"/>
                 </a:solidFill>
               </a:rPr>
-              <a:t>Responder sempre EGFR, a classe mais frequente, acerta 29,3%: esse é o piso.</a:t>
+              <a:t>Responder sempre EGFR acerta 29,3%: esse é o piso.</a:t>
             </a:r>
           </a:p>
         </p:txBody>
@@ -7120,7 +7040,7 @@
         <p:spPr>
           <a:xfrm>
             <a:off x="6309360" y="1828800"/>
-            <a:ext cx="4663440" cy="365760"/>
+            <a:ext cx="4663440" cy="411480"/>
           </a:xfrm>
           <a:prstGeom prst="rect">
             <a:avLst/>
@@ -7135,7 +7055,7 @@
           <a:p>
             <a:pPr algn="l"/>
             <a:r>
-              <a:rPr sz="2000" b="1">
+              <a:rPr sz="2400" lang="pt-BR" b="1">
                 <a:solidFill>
                   <a:srgbClr val="0F4334"/>
                 </a:solidFill>
@@ -7154,7 +7074,7 @@
         <p:spPr>
           <a:xfrm>
             <a:off x="6309360" y="2377440"/>
-            <a:ext cx="566928" cy="566928"/>
+            <a:ext cx="640080" cy="640080"/>
           </a:xfrm>
           <a:prstGeom prst="ellipse">
             <a:avLst/>
@@ -7187,7 +7107,7 @@
           <a:p>
             <a:pPr algn="ctr"/>
             <a:r>
-              <a:rPr sz="2000" b="1">
+              <a:rPr sz="2600" lang="pt-BR" b="1">
                 <a:solidFill>
                   <a:srgbClr val="FFFFFF"/>
                 </a:solidFill>
@@ -7205,8 +7125,8 @@
         </p:nvSpPr>
         <p:spPr>
           <a:xfrm>
-            <a:off x="7086600" y="2359152"/>
-            <a:ext cx="3886200" cy="1051560"/>
+            <a:off x="7132320" y="2350008"/>
+            <a:ext cx="3840480" cy="1188720"/>
           </a:xfrm>
           <a:prstGeom prst="rect">
             <a:avLst/>
@@ -7225,7 +7145,7 @@
               </a:spcAft>
             </a:pPr>
             <a:r>
-              <a:rPr sz="2000" b="1">
+              <a:rPr sz="2400" lang="pt-BR" b="1">
                 <a:solidFill>
                   <a:srgbClr val="1F2A2E"/>
                 </a:solidFill>
@@ -7236,9 +7156,9 @@
           <a:p>
             <a:pPr algn="l"/>
             <a:r>
-              <a:rPr sz="1400" b="0">
-                <a:solidFill>
-                  <a:srgbClr val="5F6B6D"/>
+              <a:rPr sz="2000" lang="pt-BR" b="0">
+                <a:solidFill>
+                  <a:srgbClr val="1F2A2E"/>
                 </a:solidFill>
               </a:rPr>
               <a:t>o arquivo do Kaggle não bate com a própria descrição</a:t>
@@ -7255,7 +7175,7 @@
         <p:spPr>
           <a:xfrm>
             <a:off x="6309360" y="3657600"/>
-            <a:ext cx="566928" cy="566928"/>
+            <a:ext cx="640080" cy="640080"/>
           </a:xfrm>
           <a:prstGeom prst="ellipse">
             <a:avLst/>
@@ -7288,7 +7208,7 @@
           <a:p>
             <a:pPr algn="ctr"/>
             <a:r>
-              <a:rPr sz="2000" b="1">
+              <a:rPr sz="2600" lang="pt-BR" b="1">
                 <a:solidFill>
                   <a:srgbClr val="FFFFFF"/>
                 </a:solidFill>
@@ -7306,8 +7226,8 @@
         </p:nvSpPr>
         <p:spPr>
           <a:xfrm>
-            <a:off x="7086600" y="3639312"/>
-            <a:ext cx="3886200" cy="1051560"/>
+            <a:off x="7132320" y="3630168"/>
+            <a:ext cx="3840480" cy="1188720"/>
           </a:xfrm>
           <a:prstGeom prst="rect">
             <a:avLst/>
@@ -7326,7 +7246,7 @@
               </a:spcAft>
             </a:pPr>
             <a:r>
-              <a:rPr sz="2000" b="1">
+              <a:rPr sz="2400" lang="pt-BR" b="1">
                 <a:solidFill>
                   <a:srgbClr val="1F2A2E"/>
                 </a:solidFill>
@@ -7337,9 +7257,9 @@
           <a:p>
             <a:pPr algn="l"/>
             <a:r>
-              <a:rPr sz="1400" b="0">
-                <a:solidFill>
-                  <a:srgbClr val="5F6B6D"/>
+              <a:rPr sz="2000" lang="pt-BR" b="0">
+                <a:solidFill>
+                  <a:srgbClr val="1F2A2E"/>
                 </a:solidFill>
               </a:rPr>
               <a:t>um descritor sozinho acerta no máximo 45,1%</a:t>
@@ -7356,7 +7276,7 @@
         <p:spPr>
           <a:xfrm>
             <a:off x="6309360" y="4937760"/>
-            <a:ext cx="566928" cy="566928"/>
+            <a:ext cx="640080" cy="640080"/>
           </a:xfrm>
           <a:prstGeom prst="ellipse">
             <a:avLst/>
@@ -7389,7 +7309,7 @@
           <a:p>
             <a:pPr algn="ctr"/>
             <a:r>
-              <a:rPr sz="2000" b="1">
+              <a:rPr sz="2600" lang="pt-BR" b="1">
                 <a:solidFill>
                   <a:srgbClr val="FFFFFF"/>
                 </a:solidFill>
@@ -7407,8 +7327,8 @@
         </p:nvSpPr>
         <p:spPr>
           <a:xfrm>
-            <a:off x="7086600" y="4919472"/>
-            <a:ext cx="3886200" cy="1051560"/>
+            <a:off x="7132320" y="4910328"/>
+            <a:ext cx="3840480" cy="1188720"/>
           </a:xfrm>
           <a:prstGeom prst="rect">
             <a:avLst/>
@@ -7427,7 +7347,7 @@
               </a:spcAft>
             </a:pPr>
             <a:r>
-              <a:rPr sz="2000" b="1">
+              <a:rPr sz="2400" lang="pt-BR" b="1">
                 <a:solidFill>
                   <a:srgbClr val="1F2A2E"/>
                 </a:solidFill>
@@ -7438,9 +7358,9 @@
           <a:p>
             <a:pPr algn="l"/>
             <a:r>
-              <a:rPr sz="1400" b="0">
-                <a:solidFill>
-                  <a:srgbClr val="5F6B6D"/>
+              <a:rPr sz="2000" lang="pt-BR" b="0">
+                <a:solidFill>
+                  <a:srgbClr val="1F2A2E"/>
                 </a:solidFill>
               </a:rPr>
               <a:t>25,8% das moléculas de teste têm uma gêmea no treino</a:t>
@@ -7506,10 +7426,11 @@
           <a:lstStyle/>
           <a:p>
             <a:r>
-              <a:rPr sz="3600">
+              <a:rPr sz="4000" b="1" lang="pt-BR">
                 <a:solidFill>
                   <a:srgbClr val="0F4334"/>
                 </a:solidFill>
+                <a:latin typeface="Calibri"/>
               </a:rPr>
               <a:t>A base do Kaggle estava quebrada, então reconstruímos do ChEMBL</a:t>
             </a:r>
@@ -7528,8 +7449,8 @@
         </p:nvSpPr>
         <p:spPr>
           <a:xfrm>
-            <a:off x="9966960" y="6217920"/>
-            <a:ext cx="1097280" cy="274320"/>
+            <a:off x="9966960" y="6172200"/>
+            <a:ext cx="1097280" cy="365760"/>
           </a:xfrm>
         </p:spPr>
         <p:txBody>
@@ -7538,14 +7459,14 @@
           <a:p>
             <a:pPr algn="r"/>
             <a:fld id="{B6F15528-21DE-4FAA-801E-634DDDAF4B2B}" type="slidenum">
-              <a:rPr lang="pt-BR" sz="1400">
-                <a:solidFill>
-                  <a:srgbClr val="5F6B6D"/>
+              <a:rPr lang="pt-BR" sz="1800" b="1">
+                <a:solidFill>
+                  <a:srgbClr val="3C4649"/>
                 </a:solidFill>
               </a:rPr>
               <a:t>‹#›</a:t>
             </a:fld>
-            <a:endParaRPr lang="pt-BR" sz="1400"/>
+            <a:endParaRPr lang="pt-BR" sz="1800"/>
           </a:p>
         </p:txBody>
       </p:sp>
@@ -7558,7 +7479,7 @@
         <p:spPr>
           <a:xfrm>
             <a:off x="841248" y="1828800"/>
-            <a:ext cx="3474720" cy="4206240"/>
+            <a:ext cx="3566160" cy="4297680"/>
           </a:xfrm>
           <a:prstGeom prst="roundRect">
             <a:avLst>
@@ -7603,8 +7524,8 @@
         </p:nvSpPr>
         <p:spPr>
           <a:xfrm>
-            <a:off x="1051560" y="1965960"/>
-            <a:ext cx="3108960" cy="365760"/>
+            <a:off x="1051560" y="1938528"/>
+            <a:ext cx="3200400" cy="411480"/>
           </a:xfrm>
           <a:prstGeom prst="rect">
             <a:avLst/>
@@ -7619,7 +7540,7 @@
           <a:p>
             <a:pPr algn="l"/>
             <a:r>
-              <a:rPr sz="1800" b="1">
+              <a:rPr sz="2400" lang="pt-BR" b="1">
                 <a:solidFill>
                   <a:srgbClr val="B23A2E"/>
                 </a:solidFill>
@@ -7637,8 +7558,8 @@
         </p:nvSpPr>
         <p:spPr>
           <a:xfrm>
-            <a:off x="1051560" y="2468880"/>
-            <a:ext cx="3108960" cy="1051560"/>
+            <a:off x="1051560" y="2514600"/>
+            <a:ext cx="3200400" cy="1097280"/>
           </a:xfrm>
           <a:prstGeom prst="rect">
             <a:avLst/>
@@ -7657,7 +7578,7 @@
               </a:spcAft>
             </a:pPr>
             <a:r>
-              <a:rPr sz="4000" b="1">
+              <a:rPr sz="4400" lang="pt-BR" b="1">
                 <a:solidFill>
                   <a:srgbClr val="B23A2E"/>
                 </a:solidFill>
@@ -7668,12 +7589,12 @@
           <a:p>
             <a:pPr algn="l"/>
             <a:r>
-              <a:rPr sz="1400" b="0">
+              <a:rPr sz="2000" lang="pt-BR" b="0">
                 <a:solidFill>
                   <a:srgbClr val="1F2A2E"/>
                 </a:solidFill>
               </a:rPr>
-              <a:t>linhas (a página descreve 8.711)</a:t>
+              <a:t>linhas (descritas: 8.711)</a:t>
             </a:r>
           </a:p>
         </p:txBody>
@@ -7686,8 +7607,8 @@
         </p:nvSpPr>
         <p:spPr>
           <a:xfrm>
-            <a:off x="1051560" y="3639312"/>
-            <a:ext cx="3108960" cy="1051560"/>
+            <a:off x="1051560" y="3703320"/>
+            <a:ext cx="3200400" cy="1097280"/>
           </a:xfrm>
           <a:prstGeom prst="rect">
             <a:avLst/>
@@ -7706,7 +7627,7 @@
               </a:spcAft>
             </a:pPr>
             <a:r>
-              <a:rPr sz="4000" b="1">
+              <a:rPr sz="4400" lang="pt-BR" b="1">
                 <a:solidFill>
                   <a:srgbClr val="B23A2E"/>
                 </a:solidFill>
@@ -7717,7 +7638,7 @@
           <a:p>
             <a:pPr algn="l"/>
             <a:r>
-              <a:rPr sz="1400" b="0">
+              <a:rPr sz="2000" lang="pt-BR" b="0">
                 <a:solidFill>
                   <a:srgbClr val="1F2A2E"/>
                 </a:solidFill>
@@ -7735,8 +7656,8 @@
         </p:nvSpPr>
         <p:spPr>
           <a:xfrm>
-            <a:off x="1051560" y="4809744"/>
-            <a:ext cx="3108960" cy="1051560"/>
+            <a:off x="1051560" y="4892040"/>
+            <a:ext cx="3200400" cy="1097280"/>
           </a:xfrm>
           <a:prstGeom prst="rect">
             <a:avLst/>
@@ -7755,7 +7676,7 @@
               </a:spcAft>
             </a:pPr>
             <a:r>
-              <a:rPr sz="4000" b="1">
+              <a:rPr sz="4400" lang="pt-BR" b="1">
                 <a:solidFill>
                   <a:srgbClr val="B23A2E"/>
                 </a:solidFill>
@@ -7766,7 +7687,7 @@
           <a:p>
             <a:pPr algn="l"/>
             <a:r>
-              <a:rPr sz="1400" b="0">
+              <a:rPr sz="2000" lang="pt-BR" b="0">
                 <a:solidFill>
                   <a:srgbClr val="1F2A2E"/>
                 </a:solidFill>
@@ -7785,7 +7706,7 @@
         <p:spPr>
           <a:xfrm>
             <a:off x="4754880" y="1828800"/>
-            <a:ext cx="6217920" cy="365760"/>
+            <a:ext cx="6217920" cy="411480"/>
           </a:xfrm>
           <a:prstGeom prst="rect">
             <a:avLst/>
@@ -7800,12 +7721,12 @@
           <a:p>
             <a:pPr algn="l"/>
             <a:r>
-              <a:rPr sz="1800" b="1">
+              <a:rPr sz="2400" lang="pt-BR" b="1">
                 <a:solidFill>
                   <a:srgbClr val="0F4334"/>
                 </a:solidFill>
               </a:rPr>
-              <a:t>Reconstrução a partir do ChEMBL_37</a:t>
+              <a:t>Reconstrução do ChEMBL_37 (24/10/2026)</a:t>
             </a:r>
           </a:p>
         </p:txBody>
@@ -7818,8 +7739,8 @@
         </p:nvSpPr>
         <p:spPr>
           <a:xfrm>
-            <a:off x="4754880" y="2331720"/>
-            <a:ext cx="3108960" cy="475488"/>
+            <a:off x="4754880" y="2423160"/>
+            <a:ext cx="2651760" cy="512064"/>
           </a:xfrm>
           <a:prstGeom prst="roundRect">
             <a:avLst>
@@ -7854,7 +7775,7 @@
           <a:p>
             <a:pPr algn="ctr"/>
             <a:r>
-              <a:rPr sz="1600" b="1">
+              <a:rPr sz="2000" lang="pt-BR" b="1">
                 <a:solidFill>
                   <a:srgbClr val="FFFFFF"/>
                 </a:solidFill>
@@ -7872,8 +7793,8 @@
         </p:nvSpPr>
         <p:spPr>
           <a:xfrm>
-            <a:off x="8046720" y="2331720"/>
-            <a:ext cx="2926080" cy="502920"/>
+            <a:off x="7589520" y="2423160"/>
+            <a:ext cx="3383280" cy="512064"/>
           </a:xfrm>
           <a:prstGeom prst="rect">
             <a:avLst/>
@@ -7888,12 +7809,12 @@
           <a:p>
             <a:pPr algn="l"/>
             <a:r>
-              <a:rPr sz="1400" b="0">
+              <a:rPr sz="2000" lang="pt-BR" b="0">
                 <a:solidFill>
                   <a:srgbClr val="1F2A2E"/>
                 </a:solidFill>
               </a:rPr>
-              <a:t>medições de ensaios de ligação</a:t>
+              <a:t>medições de ligação</a:t>
             </a:r>
           </a:p>
         </p:txBody>
@@ -7906,8 +7827,8 @@
         </p:nvSpPr>
         <p:spPr>
           <a:xfrm>
-            <a:off x="4754880" y="2935224"/>
-            <a:ext cx="2718487" cy="475488"/>
+            <a:off x="4754880" y="3044952"/>
+            <a:ext cx="2318709" cy="512064"/>
           </a:xfrm>
           <a:prstGeom prst="roundRect">
             <a:avLst>
@@ -7942,7 +7863,7 @@
           <a:p>
             <a:pPr algn="ctr"/>
             <a:r>
-              <a:rPr sz="1600" b="1">
+              <a:rPr sz="2000" lang="pt-BR" b="1">
                 <a:solidFill>
                   <a:srgbClr val="FFFFFF"/>
                 </a:solidFill>
@@ -7960,8 +7881,8 @@
         </p:nvSpPr>
         <p:spPr>
           <a:xfrm>
-            <a:off x="8046720" y="2935224"/>
-            <a:ext cx="2926080" cy="502920"/>
+            <a:off x="7589520" y="3044952"/>
+            <a:ext cx="3383280" cy="512064"/>
           </a:xfrm>
           <a:prstGeom prst="rect">
             <a:avLst/>
@@ -7976,12 +7897,12 @@
           <a:p>
             <a:pPr algn="l"/>
             <a:r>
-              <a:rPr sz="1400" b="0">
+              <a:rPr sz="2000" lang="pt-BR" b="0">
                 <a:solidFill>
                   <a:srgbClr val="1F2A2E"/>
                 </a:solidFill>
               </a:rPr>
-              <a:t>sem duplicata potencial nem SMILES vazio</a:t>
+              <a:t>sem duplicata ou SMILES vazio</a:t>
             </a:r>
           </a:p>
         </p:txBody>
@@ -7994,8 +7915,8 @@
         </p:nvSpPr>
         <p:spPr>
           <a:xfrm>
-            <a:off x="4754880" y="3538728"/>
-            <a:ext cx="1980892" cy="475488"/>
+            <a:off x="4754880" y="3666744"/>
+            <a:ext cx="1689585" cy="512064"/>
           </a:xfrm>
           <a:prstGeom prst="roundRect">
             <a:avLst>
@@ -8030,7 +7951,7 @@
           <a:p>
             <a:pPr algn="ctr"/>
             <a:r>
-              <a:rPr sz="1600" b="1">
+              <a:rPr sz="2000" lang="pt-BR" b="1">
                 <a:solidFill>
                   <a:srgbClr val="FFFFFF"/>
                 </a:solidFill>
@@ -8048,8 +7969,8 @@
         </p:nvSpPr>
         <p:spPr>
           <a:xfrm>
-            <a:off x="8046720" y="3538728"/>
-            <a:ext cx="2926080" cy="502920"/>
+            <a:off x="7589520" y="3666744"/>
+            <a:ext cx="3383280" cy="512064"/>
           </a:xfrm>
           <a:prstGeom prst="rect">
             <a:avLst/>
@@ -8064,12 +7985,12 @@
           <a:p>
             <a:pPr algn="l"/>
             <a:r>
-              <a:rPr sz="1400" b="0">
+              <a:rPr sz="2000" lang="pt-BR" b="0">
                 <a:solidFill>
                   <a:srgbClr val="1F2A2E"/>
                 </a:solidFill>
               </a:rPr>
-              <a:t>pares molécula-alvo (mediana do pChEMBL)</a:t>
+              <a:t>pares molécula-alvo (mediana)</a:t>
             </a:r>
           </a:p>
         </p:txBody>
@@ -8082,8 +8003,8 @@
         </p:nvSpPr>
         <p:spPr>
           <a:xfrm>
-            <a:off x="4754880" y="4142231"/>
-            <a:ext cx="1471378" cy="475488"/>
+            <a:off x="4754880" y="4288536"/>
+            <a:ext cx="1463040" cy="512064"/>
           </a:xfrm>
           <a:prstGeom prst="roundRect">
             <a:avLst>
@@ -8118,7 +8039,7 @@
           <a:p>
             <a:pPr algn="ctr"/>
             <a:r>
-              <a:rPr sz="1600" b="1">
+              <a:rPr sz="2000" lang="pt-BR" b="1">
                 <a:solidFill>
                   <a:srgbClr val="FFFFFF"/>
                 </a:solidFill>
@@ -8136,8 +8057,8 @@
         </p:nvSpPr>
         <p:spPr>
           <a:xfrm>
-            <a:off x="8046720" y="4142231"/>
-            <a:ext cx="2926080" cy="502920"/>
+            <a:off x="7589520" y="4288536"/>
+            <a:ext cx="3383280" cy="512064"/>
           </a:xfrm>
           <a:prstGeom prst="rect">
             <a:avLst/>
@@ -8152,7 +8073,7 @@
           <a:p>
             <a:pPr algn="l"/>
             <a:r>
-              <a:rPr sz="1400" b="0">
+              <a:rPr sz="2000" lang="pt-BR" b="0">
                 <a:solidFill>
                   <a:srgbClr val="1F2A2E"/>
                 </a:solidFill>
@@ -8170,8 +8091,8 @@
         </p:nvSpPr>
         <p:spPr>
           <a:xfrm>
-            <a:off x="4754880" y="4745736"/>
-            <a:ext cx="1466931" cy="475488"/>
+            <a:off x="4754880" y="4910328"/>
+            <a:ext cx="1463040" cy="512064"/>
           </a:xfrm>
           <a:prstGeom prst="roundRect">
             <a:avLst>
@@ -8206,7 +8127,7 @@
           <a:p>
             <a:pPr algn="ctr"/>
             <a:r>
-              <a:rPr sz="1600" b="1">
+              <a:rPr sz="2000" lang="pt-BR" b="1">
                 <a:solidFill>
                   <a:srgbClr val="FFFFFF"/>
                 </a:solidFill>
@@ -8224,8 +8145,8 @@
         </p:nvSpPr>
         <p:spPr>
           <a:xfrm>
-            <a:off x="8046720" y="4745736"/>
-            <a:ext cx="2926080" cy="502920"/>
+            <a:off x="7589520" y="4910328"/>
+            <a:ext cx="3383280" cy="512064"/>
           </a:xfrm>
           <a:prstGeom prst="rect">
             <a:avLst/>
@@ -8240,7 +8161,7 @@
           <a:p>
             <a:pPr algn="l"/>
             <a:r>
-              <a:rPr sz="1400" b="0">
+              <a:rPr sz="2000" lang="pt-BR" b="0">
                 <a:solidFill>
                   <a:srgbClr val="1F2A2E"/>
                 </a:solidFill>
@@ -8258,8 +8179,8 @@
         </p:nvSpPr>
         <p:spPr>
           <a:xfrm>
-            <a:off x="4754880" y="5349240"/>
-            <a:ext cx="1454334" cy="475488"/>
+            <a:off x="4754880" y="5532120"/>
+            <a:ext cx="1463040" cy="512064"/>
           </a:xfrm>
           <a:prstGeom prst="roundRect">
             <a:avLst>
@@ -8294,7 +8215,7 @@
           <a:p>
             <a:pPr algn="ctr"/>
             <a:r>
-              <a:rPr sz="1600" b="1">
+              <a:rPr sz="2000" lang="pt-BR" b="1">
                 <a:solidFill>
                   <a:srgbClr val="FFFFFF"/>
                 </a:solidFill>
@@ -8312,8 +8233,8 @@
         </p:nvSpPr>
         <p:spPr>
           <a:xfrm>
-            <a:off x="8046720" y="5349240"/>
-            <a:ext cx="2926080" cy="502920"/>
+            <a:off x="7589520" y="5532120"/>
+            <a:ext cx="3383280" cy="512064"/>
           </a:xfrm>
           <a:prstGeom prst="rect">
             <a:avLst/>
@@ -8328,46 +8249,12 @@
           <a:p>
             <a:pPr algn="l"/>
             <a:r>
-              <a:rPr sz="1400" b="0">
+              <a:rPr sz="2000" lang="pt-BR" b="0">
                 <a:solidFill>
                   <a:srgbClr val="1F2A2E"/>
                 </a:solidFill>
               </a:rPr>
               <a:t>com os 5 descritores (−238)</a:t>
-            </a:r>
-          </a:p>
-        </p:txBody>
-      </p:sp>
-      <p:sp>
-        <p:nvSpPr>
-          <p:cNvPr id="23" name="TextBox 22"/>
-          <p:cNvSpPr txBox="1"/>
-          <p:nvPr/>
-        </p:nvSpPr>
-        <p:spPr>
-          <a:xfrm>
-            <a:off x="4754880" y="5989320"/>
-            <a:ext cx="6217920" cy="274320"/>
-          </a:xfrm>
-          <a:prstGeom prst="rect">
-            <a:avLst/>
-          </a:prstGeom>
-          <a:noFill/>
-        </p:spPr>
-        <p:txBody>
-          <a:bodyPr wrap="square" anchor="t" lIns="0" rIns="0" tIns="0" bIns="0">
-            <a:spAutoFit/>
-          </a:bodyPr>
-          <a:lstStyle/>
-          <a:p>
-            <a:pPr algn="l"/>
-            <a:r>
-              <a:rPr sz="1200" b="0">
-                <a:solidFill>
-                  <a:srgbClr val="5F6B6D"/>
-                </a:solidFill>
-              </a:rPr>
-              <a:t>ChEMBL_37, extraído em 24/10/2026</a:t>
             </a:r>
           </a:p>
         </p:txBody>
@@ -8430,10 +8317,11 @@
           <a:lstStyle/>
           <a:p>
             <a:r>
-              <a:rPr sz="3600">
+              <a:rPr sz="4000" b="1" lang="pt-BR">
                 <a:solidFill>
                   <a:srgbClr val="0F4334"/>
                 </a:solidFill>
+                <a:latin typeface="Calibri"/>
               </a:rPr>
               <a:t>A base traz 5 descritores por molécula, calculados da estrutura</a:t>
             </a:r>
@@ -8452,8 +8340,8 @@
         </p:nvSpPr>
         <p:spPr>
           <a:xfrm>
-            <a:off x="9966960" y="6217920"/>
-            <a:ext cx="1097280" cy="274320"/>
+            <a:off x="9966960" y="6172200"/>
+            <a:ext cx="1097280" cy="365760"/>
           </a:xfrm>
         </p:spPr>
         <p:txBody>
@@ -8462,14 +8350,14 @@
           <a:p>
             <a:pPr algn="r"/>
             <a:fld id="{B6F15528-21DE-4FAA-801E-634DDDAF4B2B}" type="slidenum">
-              <a:rPr lang="pt-BR" sz="1400">
-                <a:solidFill>
-                  <a:srgbClr val="5F6B6D"/>
+              <a:rPr lang="pt-BR" sz="1800" b="1">
+                <a:solidFill>
+                  <a:srgbClr val="3C4649"/>
                 </a:solidFill>
               </a:rPr>
               <a:t>‹#›</a:t>
             </a:fld>
-            <a:endParaRPr lang="pt-BR" sz="1400"/>
+            <a:endParaRPr lang="pt-BR" sz="1800"/>
           </a:p>
         </p:txBody>
       </p:sp>
@@ -8482,7 +8370,7 @@
         <p:spPr>
           <a:xfrm>
             <a:off x="841248" y="1828800"/>
-            <a:ext cx="10058400" cy="365760"/>
+            <a:ext cx="10058400" cy="411480"/>
           </a:xfrm>
           <a:prstGeom prst="rect">
             <a:avLst/>
@@ -8497,7 +8385,7 @@
           <a:p>
             <a:pPr algn="l"/>
             <a:r>
-              <a:rPr sz="1800" b="1">
+              <a:rPr sz="2400" lang="pt-BR" b="1">
                 <a:solidFill>
                   <a:srgbClr val="0F4334"/>
                 </a:solidFill>
@@ -8515,8 +8403,8 @@
         </p:nvSpPr>
         <p:spPr>
           <a:xfrm>
-            <a:off x="841248" y="2240280"/>
-            <a:ext cx="10058400" cy="320040"/>
+            <a:off x="841248" y="2286000"/>
+            <a:ext cx="10058400" cy="365760"/>
           </a:xfrm>
           <a:prstGeom prst="rect">
             <a:avLst/>
@@ -8531,26 +8419,26 @@
           <a:p>
             <a:pPr algn="l"/>
             <a:r>
-              <a:rPr sz="1400" b="0">
-                <a:solidFill>
-                  <a:srgbClr val="5F6B6D"/>
-                </a:solidFill>
-              </a:rPr>
-              <a:t>Os cinco valores vêm prontos no ChEMBL e são tudo que o modelo vê de cada molécula</a:t>
-            </a:r>
-          </a:p>
-        </p:txBody>
-      </p:sp>
-      <p:sp>
-        <p:nvSpPr>
-          <p:cNvPr id="7" name="Descritor Massa molecular"/>
+              <a:rPr sz="2000" lang="pt-BR" b="0">
+                <a:solidFill>
+                  <a:srgbClr val="1F2A2E"/>
+                </a:solidFill>
+              </a:rPr>
+              <a:t>Valores do ChEMBL; no próximo slide, a mesma molécula como texto</a:t>
+            </a:r>
+          </a:p>
+        </p:txBody>
+      </p:sp>
+      <p:sp>
+        <p:nvSpPr>
+          <p:cNvPr id="7" name="Linha Massa molecular"/>
           <p:cNvSpPr/>
           <p:nvPr/>
         </p:nvSpPr>
         <p:spPr>
           <a:xfrm>
-            <a:off x="841248" y="2743200"/>
-            <a:ext cx="1874519" cy="2468880"/>
+            <a:off x="841248" y="2834640"/>
+            <a:ext cx="10058400" cy="585216"/>
           </a:xfrm>
           <a:prstGeom prst="roundRect">
             <a:avLst>
@@ -8580,16 +8468,38 @@
           </a:fontRef>
         </p:style>
         <p:txBody>
-          <a:bodyPr rtlCol="0" anchor="t" wrap="square" lIns="137160" rIns="137160" tIns="54864" bIns="54864"/>
-          <a:lstStyle/>
-          <a:p>
-            <a:pPr algn="l">
-              <a:spcAft>
-                <a:spcPts val="200"/>
-              </a:spcAft>
-            </a:pPr>
-            <a:r>
-              <a:rPr sz="1600" b="1">
+          <a:bodyPr rtlCol="0" anchor="ctr"/>
+          <a:lstStyle/>
+          <a:p>
+            <a:pPr algn="ctr"/>
+          </a:p>
+        </p:txBody>
+      </p:sp>
+      <p:sp>
+        <p:nvSpPr>
+          <p:cNvPr id="8" name="Nome Massa molecular"/>
+          <p:cNvSpPr txBox="1"/>
+          <p:nvPr/>
+        </p:nvSpPr>
+        <p:spPr>
+          <a:xfrm>
+            <a:off x="1051560" y="2834640"/>
+            <a:ext cx="2377440" cy="585216"/>
+          </a:xfrm>
+          <a:prstGeom prst="rect">
+            <a:avLst/>
+          </a:prstGeom>
+          <a:noFill/>
+        </p:spPr>
+        <p:txBody>
+          <a:bodyPr wrap="square" anchor="ctr" lIns="0" rIns="0" tIns="0" bIns="0">
+            <a:spAutoFit/>
+          </a:bodyPr>
+          <a:lstStyle/>
+          <a:p>
+            <a:pPr algn="l"/>
+            <a:r>
+              <a:rPr sz="2200" lang="pt-BR" b="1">
                 <a:solidFill>
                   <a:srgbClr val="0F4334"/>
                 </a:solidFill>
@@ -8597,59 +8507,120 @@
               <a:t>Massa molecular</a:t>
             </a:r>
           </a:p>
-          <a:p>
-            <a:pPr algn="l">
-              <a:spcAft>
-                <a:spcPts val="0"/>
-              </a:spcAft>
-            </a:pPr>
-            <a:r>
-              <a:rPr sz="3200" b="1">
-                <a:solidFill>
-                  <a:srgbClr val="09846C"/>
+        </p:txBody>
+      </p:sp>
+      <p:sp>
+        <p:nvSpPr>
+          <p:cNvPr id="9" name="Valor Massa molecular"/>
+          <p:cNvSpPr txBox="1"/>
+          <p:nvPr/>
+        </p:nvSpPr>
+        <p:spPr>
+          <a:xfrm>
+            <a:off x="3474720" y="2834640"/>
+            <a:ext cx="1737360" cy="585216"/>
+          </a:xfrm>
+          <a:prstGeom prst="rect">
+            <a:avLst/>
+          </a:prstGeom>
+          <a:noFill/>
+        </p:spPr>
+        <p:txBody>
+          <a:bodyPr wrap="square" anchor="ctr" lIns="0" rIns="0" tIns="0" bIns="0">
+            <a:spAutoFit/>
+          </a:bodyPr>
+          <a:lstStyle/>
+          <a:p>
+            <a:pPr algn="l"/>
+            <a:r>
+              <a:rPr sz="2800" lang="pt-BR" b="1">
+                <a:solidFill>
+                  <a:srgbClr val="0F4334"/>
                 </a:solidFill>
               </a:rPr>
               <a:t>432,53</a:t>
             </a:r>
           </a:p>
-          <a:p>
-            <a:pPr algn="l">
-              <a:spcAft>
-                <a:spcPts val="600"/>
-              </a:spcAft>
-            </a:pPr>
-            <a:r>
-              <a:rPr sz="1200" b="0">
-                <a:solidFill>
-                  <a:srgbClr val="5F6B6D"/>
+        </p:txBody>
+      </p:sp>
+      <p:sp>
+        <p:nvSpPr>
+          <p:cNvPr id="10" name="Unidade Massa molecular"/>
+          <p:cNvSpPr txBox="1"/>
+          <p:nvPr/>
+        </p:nvSpPr>
+        <p:spPr>
+          <a:xfrm>
+            <a:off x="5212080" y="2834640"/>
+            <a:ext cx="1554480" cy="585216"/>
+          </a:xfrm>
+          <a:prstGeom prst="rect">
+            <a:avLst/>
+          </a:prstGeom>
+          <a:noFill/>
+        </p:spPr>
+        <p:txBody>
+          <a:bodyPr wrap="square" anchor="ctr" lIns="0" rIns="0" tIns="0" bIns="0">
+            <a:spAutoFit/>
+          </a:bodyPr>
+          <a:lstStyle/>
+          <a:p>
+            <a:pPr algn="l"/>
+            <a:r>
+              <a:rPr sz="2000" lang="pt-BR" b="0">
+                <a:solidFill>
+                  <a:srgbClr val="1F2A2E"/>
                 </a:solidFill>
               </a:rPr>
               <a:t>dáltons</a:t>
             </a:r>
           </a:p>
+        </p:txBody>
+      </p:sp>
+      <p:sp>
+        <p:nvSpPr>
+          <p:cNvPr id="11" name="Significado Massa molecular"/>
+          <p:cNvSpPr txBox="1"/>
+          <p:nvPr/>
+        </p:nvSpPr>
+        <p:spPr>
+          <a:xfrm>
+            <a:off x="6858000" y="2834640"/>
+            <a:ext cx="3931920" cy="585216"/>
+          </a:xfrm>
+          <a:prstGeom prst="rect">
+            <a:avLst/>
+          </a:prstGeom>
+          <a:noFill/>
+        </p:spPr>
+        <p:txBody>
+          <a:bodyPr wrap="square" anchor="ctr" lIns="0" rIns="0" tIns="0" bIns="0">
+            <a:spAutoFit/>
+          </a:bodyPr>
+          <a:lstStyle/>
           <a:p>
             <a:pPr algn="l"/>
             <a:r>
-              <a:rPr sz="1400" b="0">
+              <a:rPr sz="2000" lang="pt-BR" b="0">
                 <a:solidFill>
                   <a:srgbClr val="1F2A2E"/>
                 </a:solidFill>
               </a:rPr>
-              <a:t>Soma das massas dos átomos: mede o tamanho da molécula</a:t>
-            </a:r>
-          </a:p>
-        </p:txBody>
-      </p:sp>
-      <p:sp>
-        <p:nvSpPr>
-          <p:cNvPr id="8" name="Descritor LogP"/>
+              <a:t>Soma das massas dos átomos</a:t>
+            </a:r>
+          </a:p>
+        </p:txBody>
+      </p:sp>
+      <p:sp>
+        <p:nvSpPr>
+          <p:cNvPr id="12" name="Linha LogP"/>
           <p:cNvSpPr/>
           <p:nvPr/>
         </p:nvSpPr>
         <p:spPr>
           <a:xfrm>
-            <a:off x="2898648" y="2743200"/>
-            <a:ext cx="1874519" cy="2468880"/>
+            <a:off x="841248" y="3493008"/>
+            <a:ext cx="10058400" cy="585216"/>
           </a:xfrm>
           <a:prstGeom prst="roundRect">
             <a:avLst>
@@ -8679,16 +8650,38 @@
           </a:fontRef>
         </p:style>
         <p:txBody>
-          <a:bodyPr rtlCol="0" anchor="t" wrap="square" lIns="137160" rIns="137160" tIns="54864" bIns="54864"/>
-          <a:lstStyle/>
-          <a:p>
-            <a:pPr algn="l">
-              <a:spcAft>
-                <a:spcPts val="200"/>
-              </a:spcAft>
-            </a:pPr>
-            <a:r>
-              <a:rPr sz="1600" b="1">
+          <a:bodyPr rtlCol="0" anchor="ctr"/>
+          <a:lstStyle/>
+          <a:p>
+            <a:pPr algn="ctr"/>
+          </a:p>
+        </p:txBody>
+      </p:sp>
+      <p:sp>
+        <p:nvSpPr>
+          <p:cNvPr id="13" name="Nome LogP"/>
+          <p:cNvSpPr txBox="1"/>
+          <p:nvPr/>
+        </p:nvSpPr>
+        <p:spPr>
+          <a:xfrm>
+            <a:off x="1051560" y="3493008"/>
+            <a:ext cx="2377440" cy="585216"/>
+          </a:xfrm>
+          <a:prstGeom prst="rect">
+            <a:avLst/>
+          </a:prstGeom>
+          <a:noFill/>
+        </p:spPr>
+        <p:txBody>
+          <a:bodyPr wrap="square" anchor="ctr" lIns="0" rIns="0" tIns="0" bIns="0">
+            <a:spAutoFit/>
+          </a:bodyPr>
+          <a:lstStyle/>
+          <a:p>
+            <a:pPr algn="l"/>
+            <a:r>
+              <a:rPr sz="2200" lang="pt-BR" b="1">
                 <a:solidFill>
                   <a:srgbClr val="0F4334"/>
                 </a:solidFill>
@@ -8696,59 +8689,120 @@
               <a:t>LogP</a:t>
             </a:r>
           </a:p>
-          <a:p>
-            <a:pPr algn="l">
-              <a:spcAft>
-                <a:spcPts val="0"/>
-              </a:spcAft>
-            </a:pPr>
-            <a:r>
-              <a:rPr sz="3200" b="1">
-                <a:solidFill>
-                  <a:srgbClr val="09846C"/>
+        </p:txBody>
+      </p:sp>
+      <p:sp>
+        <p:nvSpPr>
+          <p:cNvPr id="14" name="Valor LogP"/>
+          <p:cNvSpPr txBox="1"/>
+          <p:nvPr/>
+        </p:nvSpPr>
+        <p:spPr>
+          <a:xfrm>
+            <a:off x="3474720" y="3493008"/>
+            <a:ext cx="1737360" cy="585216"/>
+          </a:xfrm>
+          <a:prstGeom prst="rect">
+            <a:avLst/>
+          </a:prstGeom>
+          <a:noFill/>
+        </p:spPr>
+        <p:txBody>
+          <a:bodyPr wrap="square" anchor="ctr" lIns="0" rIns="0" tIns="0" bIns="0">
+            <a:spAutoFit/>
+          </a:bodyPr>
+          <a:lstStyle/>
+          <a:p>
+            <a:pPr algn="l"/>
+            <a:r>
+              <a:rPr sz="2800" lang="pt-BR" b="1">
+                <a:solidFill>
+                  <a:srgbClr val="0F4334"/>
                 </a:solidFill>
               </a:rPr>
               <a:t>1,88</a:t>
             </a:r>
           </a:p>
-          <a:p>
-            <a:pPr algn="l">
-              <a:spcAft>
-                <a:spcPts val="600"/>
-              </a:spcAft>
-            </a:pPr>
-            <a:r>
-              <a:rPr sz="1200" b="0">
-                <a:solidFill>
-                  <a:srgbClr val="5F6B6D"/>
+        </p:txBody>
+      </p:sp>
+      <p:sp>
+        <p:nvSpPr>
+          <p:cNvPr id="15" name="Unidade LogP"/>
+          <p:cNvSpPr txBox="1"/>
+          <p:nvPr/>
+        </p:nvSpPr>
+        <p:spPr>
+          <a:xfrm>
+            <a:off x="5212080" y="3493008"/>
+            <a:ext cx="1554480" cy="585216"/>
+          </a:xfrm>
+          <a:prstGeom prst="rect">
+            <a:avLst/>
+          </a:prstGeom>
+          <a:noFill/>
+        </p:spPr>
+        <p:txBody>
+          <a:bodyPr wrap="square" anchor="ctr" lIns="0" rIns="0" tIns="0" bIns="0">
+            <a:spAutoFit/>
+          </a:bodyPr>
+          <a:lstStyle/>
+          <a:p>
+            <a:pPr algn="l"/>
+            <a:r>
+              <a:rPr sz="2000" lang="pt-BR" b="0">
+                <a:solidFill>
+                  <a:srgbClr val="1F2A2E"/>
                 </a:solidFill>
               </a:rPr>
               <a:t>sem unidade</a:t>
             </a:r>
           </a:p>
+        </p:txBody>
+      </p:sp>
+      <p:sp>
+        <p:nvSpPr>
+          <p:cNvPr id="16" name="Significado LogP"/>
+          <p:cNvSpPr txBox="1"/>
+          <p:nvPr/>
+        </p:nvSpPr>
+        <p:spPr>
+          <a:xfrm>
+            <a:off x="6858000" y="3493008"/>
+            <a:ext cx="3931920" cy="585216"/>
+          </a:xfrm>
+          <a:prstGeom prst="rect">
+            <a:avLst/>
+          </a:prstGeom>
+          <a:noFill/>
+        </p:spPr>
+        <p:txBody>
+          <a:bodyPr wrap="square" anchor="ctr" lIns="0" rIns="0" tIns="0" bIns="0">
+            <a:spAutoFit/>
+          </a:bodyPr>
+          <a:lstStyle/>
           <a:p>
             <a:pPr algn="l"/>
             <a:r>
-              <a:rPr sz="1400" b="0">
+              <a:rPr sz="2000" lang="pt-BR" b="0">
                 <a:solidFill>
                   <a:srgbClr val="1F2A2E"/>
                 </a:solidFill>
               </a:rPr>
-              <a:t>Quanto a molécula prefere gordura a água</a:t>
-            </a:r>
-          </a:p>
-        </p:txBody>
-      </p:sp>
-      <p:sp>
-        <p:nvSpPr>
-          <p:cNvPr id="9" name="Descritor HBA"/>
+              <a:t>Quanto prefere gordura a água</a:t>
+            </a:r>
+          </a:p>
+        </p:txBody>
+      </p:sp>
+      <p:sp>
+        <p:nvSpPr>
+          <p:cNvPr id="17" name="Linha HBA"/>
           <p:cNvSpPr/>
           <p:nvPr/>
         </p:nvSpPr>
         <p:spPr>
           <a:xfrm>
-            <a:off x="4956048" y="2743200"/>
-            <a:ext cx="1874519" cy="2468880"/>
+            <a:off x="841248" y="4151376"/>
+            <a:ext cx="10058400" cy="585216"/>
           </a:xfrm>
           <a:prstGeom prst="roundRect">
             <a:avLst>
@@ -8778,16 +8832,38 @@
           </a:fontRef>
         </p:style>
         <p:txBody>
-          <a:bodyPr rtlCol="0" anchor="t" wrap="square" lIns="137160" rIns="137160" tIns="54864" bIns="54864"/>
-          <a:lstStyle/>
-          <a:p>
-            <a:pPr algn="l">
-              <a:spcAft>
-                <a:spcPts val="200"/>
-              </a:spcAft>
-            </a:pPr>
-            <a:r>
-              <a:rPr sz="1600" b="1">
+          <a:bodyPr rtlCol="0" anchor="ctr"/>
+          <a:lstStyle/>
+          <a:p>
+            <a:pPr algn="ctr"/>
+          </a:p>
+        </p:txBody>
+      </p:sp>
+      <p:sp>
+        <p:nvSpPr>
+          <p:cNvPr id="18" name="Nome HBA"/>
+          <p:cNvSpPr txBox="1"/>
+          <p:nvPr/>
+        </p:nvSpPr>
+        <p:spPr>
+          <a:xfrm>
+            <a:off x="1051560" y="4151376"/>
+            <a:ext cx="2377440" cy="585216"/>
+          </a:xfrm>
+          <a:prstGeom prst="rect">
+            <a:avLst/>
+          </a:prstGeom>
+          <a:noFill/>
+        </p:spPr>
+        <p:txBody>
+          <a:bodyPr wrap="square" anchor="ctr" lIns="0" rIns="0" tIns="0" bIns="0">
+            <a:spAutoFit/>
+          </a:bodyPr>
+          <a:lstStyle/>
+          <a:p>
+            <a:pPr algn="l"/>
+            <a:r>
+              <a:rPr sz="2200" lang="pt-BR" b="1">
                 <a:solidFill>
                   <a:srgbClr val="0F4334"/>
                 </a:solidFill>
@@ -8795,59 +8871,120 @@
               <a:t>HBA</a:t>
             </a:r>
           </a:p>
-          <a:p>
-            <a:pPr algn="l">
-              <a:spcAft>
-                <a:spcPts val="0"/>
-              </a:spcAft>
-            </a:pPr>
-            <a:r>
-              <a:rPr sz="3200" b="1">
-                <a:solidFill>
-                  <a:srgbClr val="09846C"/>
+        </p:txBody>
+      </p:sp>
+      <p:sp>
+        <p:nvSpPr>
+          <p:cNvPr id="19" name="Valor HBA"/>
+          <p:cNvSpPr txBox="1"/>
+          <p:nvPr/>
+        </p:nvSpPr>
+        <p:spPr>
+          <a:xfrm>
+            <a:off x="3474720" y="4151376"/>
+            <a:ext cx="1737360" cy="585216"/>
+          </a:xfrm>
+          <a:prstGeom prst="rect">
+            <a:avLst/>
+          </a:prstGeom>
+          <a:noFill/>
+        </p:spPr>
+        <p:txBody>
+          <a:bodyPr wrap="square" anchor="ctr" lIns="0" rIns="0" tIns="0" bIns="0">
+            <a:spAutoFit/>
+          </a:bodyPr>
+          <a:lstStyle/>
+          <a:p>
+            <a:pPr algn="l"/>
+            <a:r>
+              <a:rPr sz="2800" lang="pt-BR" b="1">
+                <a:solidFill>
+                  <a:srgbClr val="0F4334"/>
                 </a:solidFill>
               </a:rPr>
               <a:t>7</a:t>
             </a:r>
           </a:p>
-          <a:p>
-            <a:pPr algn="l">
-              <a:spcAft>
-                <a:spcPts val="600"/>
-              </a:spcAft>
-            </a:pPr>
-            <a:r>
-              <a:rPr sz="1200" b="0">
-                <a:solidFill>
-                  <a:srgbClr val="5F6B6D"/>
-                </a:solidFill>
-              </a:rPr>
-              <a:t>átomos aceptores</a:t>
-            </a:r>
-          </a:p>
+        </p:txBody>
+      </p:sp>
+      <p:sp>
+        <p:nvSpPr>
+          <p:cNvPr id="20" name="Unidade HBA"/>
+          <p:cNvSpPr txBox="1"/>
+          <p:nvPr/>
+        </p:nvSpPr>
+        <p:spPr>
+          <a:xfrm>
+            <a:off x="5212080" y="4151376"/>
+            <a:ext cx="1554480" cy="585216"/>
+          </a:xfrm>
+          <a:prstGeom prst="rect">
+            <a:avLst/>
+          </a:prstGeom>
+          <a:noFill/>
+        </p:spPr>
+        <p:txBody>
+          <a:bodyPr wrap="square" anchor="ctr" lIns="0" rIns="0" tIns="0" bIns="0">
+            <a:spAutoFit/>
+          </a:bodyPr>
+          <a:lstStyle/>
           <a:p>
             <a:pPr algn="l"/>
             <a:r>
-              <a:rPr sz="1400" b="0">
+              <a:rPr sz="2000" lang="pt-BR" b="0">
                 <a:solidFill>
                   <a:srgbClr val="1F2A2E"/>
                 </a:solidFill>
               </a:rPr>
-              <a:t>Átomos (em geral N e O) que podem receber uma ligação de hidrogênio</a:t>
-            </a:r>
-          </a:p>
-        </p:txBody>
-      </p:sp>
-      <p:sp>
-        <p:nvSpPr>
-          <p:cNvPr id="10" name="Descritor HBD"/>
+              <a:t>átomos</a:t>
+            </a:r>
+          </a:p>
+        </p:txBody>
+      </p:sp>
+      <p:sp>
+        <p:nvSpPr>
+          <p:cNvPr id="21" name="Significado HBA"/>
+          <p:cNvSpPr txBox="1"/>
+          <p:nvPr/>
+        </p:nvSpPr>
+        <p:spPr>
+          <a:xfrm>
+            <a:off x="6858000" y="4151376"/>
+            <a:ext cx="3931920" cy="585216"/>
+          </a:xfrm>
+          <a:prstGeom prst="rect">
+            <a:avLst/>
+          </a:prstGeom>
+          <a:noFill/>
+        </p:spPr>
+        <p:txBody>
+          <a:bodyPr wrap="square" anchor="ctr" lIns="0" rIns="0" tIns="0" bIns="0">
+            <a:spAutoFit/>
+          </a:bodyPr>
+          <a:lstStyle/>
+          <a:p>
+            <a:pPr algn="l"/>
+            <a:r>
+              <a:rPr sz="2000" lang="pt-BR" b="0">
+                <a:solidFill>
+                  <a:srgbClr val="1F2A2E"/>
+                </a:solidFill>
+              </a:rPr>
+              <a:t>Aceitam ligação de hidrogênio</a:t>
+            </a:r>
+          </a:p>
+        </p:txBody>
+      </p:sp>
+      <p:sp>
+        <p:nvSpPr>
+          <p:cNvPr id="22" name="Linha HBD"/>
           <p:cNvSpPr/>
           <p:nvPr/>
         </p:nvSpPr>
         <p:spPr>
           <a:xfrm>
-            <a:off x="7013448" y="2743200"/>
-            <a:ext cx="1874519" cy="2468880"/>
+            <a:off x="841248" y="4809744"/>
+            <a:ext cx="10058400" cy="585216"/>
           </a:xfrm>
           <a:prstGeom prst="roundRect">
             <a:avLst>
@@ -8877,16 +9014,38 @@
           </a:fontRef>
         </p:style>
         <p:txBody>
-          <a:bodyPr rtlCol="0" anchor="t" wrap="square" lIns="137160" rIns="137160" tIns="54864" bIns="54864"/>
-          <a:lstStyle/>
-          <a:p>
-            <a:pPr algn="l">
-              <a:spcAft>
-                <a:spcPts val="200"/>
-              </a:spcAft>
-            </a:pPr>
-            <a:r>
-              <a:rPr sz="1600" b="1">
+          <a:bodyPr rtlCol="0" anchor="ctr"/>
+          <a:lstStyle/>
+          <a:p>
+            <a:pPr algn="ctr"/>
+          </a:p>
+        </p:txBody>
+      </p:sp>
+      <p:sp>
+        <p:nvSpPr>
+          <p:cNvPr id="23" name="Nome HBD"/>
+          <p:cNvSpPr txBox="1"/>
+          <p:nvPr/>
+        </p:nvSpPr>
+        <p:spPr>
+          <a:xfrm>
+            <a:off x="1051560" y="4809744"/>
+            <a:ext cx="2377440" cy="585216"/>
+          </a:xfrm>
+          <a:prstGeom prst="rect">
+            <a:avLst/>
+          </a:prstGeom>
+          <a:noFill/>
+        </p:spPr>
+        <p:txBody>
+          <a:bodyPr wrap="square" anchor="ctr" lIns="0" rIns="0" tIns="0" bIns="0">
+            <a:spAutoFit/>
+          </a:bodyPr>
+          <a:lstStyle/>
+          <a:p>
+            <a:pPr algn="l"/>
+            <a:r>
+              <a:rPr sz="2200" lang="pt-BR" b="1">
                 <a:solidFill>
                   <a:srgbClr val="0F4334"/>
                 </a:solidFill>
@@ -8894,59 +9053,120 @@
               <a:t>HBD</a:t>
             </a:r>
           </a:p>
-          <a:p>
-            <a:pPr algn="l">
-              <a:spcAft>
-                <a:spcPts val="0"/>
-              </a:spcAft>
-            </a:pPr>
-            <a:r>
-              <a:rPr sz="3200" b="1">
-                <a:solidFill>
-                  <a:srgbClr val="09846C"/>
+        </p:txBody>
+      </p:sp>
+      <p:sp>
+        <p:nvSpPr>
+          <p:cNvPr id="24" name="Valor HBD"/>
+          <p:cNvSpPr txBox="1"/>
+          <p:nvPr/>
+        </p:nvSpPr>
+        <p:spPr>
+          <a:xfrm>
+            <a:off x="3474720" y="4809744"/>
+            <a:ext cx="1737360" cy="585216"/>
+          </a:xfrm>
+          <a:prstGeom prst="rect">
+            <a:avLst/>
+          </a:prstGeom>
+          <a:noFill/>
+        </p:spPr>
+        <p:txBody>
+          <a:bodyPr wrap="square" anchor="ctr" lIns="0" rIns="0" tIns="0" bIns="0">
+            <a:spAutoFit/>
+          </a:bodyPr>
+          <a:lstStyle/>
+          <a:p>
+            <a:pPr algn="l"/>
+            <a:r>
+              <a:rPr sz="2800" lang="pt-BR" b="1">
+                <a:solidFill>
+                  <a:srgbClr val="0F4334"/>
                 </a:solidFill>
               </a:rPr>
               <a:t>4</a:t>
             </a:r>
           </a:p>
-          <a:p>
-            <a:pPr algn="l">
-              <a:spcAft>
-                <a:spcPts val="600"/>
-              </a:spcAft>
-            </a:pPr>
-            <a:r>
-              <a:rPr sz="1200" b="0">
-                <a:solidFill>
-                  <a:srgbClr val="5F6B6D"/>
-                </a:solidFill>
-              </a:rPr>
-              <a:t>grupos doadores</a:t>
-            </a:r>
-          </a:p>
+        </p:txBody>
+      </p:sp>
+      <p:sp>
+        <p:nvSpPr>
+          <p:cNvPr id="25" name="Unidade HBD"/>
+          <p:cNvSpPr txBox="1"/>
+          <p:nvPr/>
+        </p:nvSpPr>
+        <p:spPr>
+          <a:xfrm>
+            <a:off x="5212080" y="4809744"/>
+            <a:ext cx="1554480" cy="585216"/>
+          </a:xfrm>
+          <a:prstGeom prst="rect">
+            <a:avLst/>
+          </a:prstGeom>
+          <a:noFill/>
+        </p:spPr>
+        <p:txBody>
+          <a:bodyPr wrap="square" anchor="ctr" lIns="0" rIns="0" tIns="0" bIns="0">
+            <a:spAutoFit/>
+          </a:bodyPr>
+          <a:lstStyle/>
           <a:p>
             <a:pPr algn="l"/>
             <a:r>
-              <a:rPr sz="1400" b="0">
+              <a:rPr sz="2000" lang="pt-BR" b="0">
                 <a:solidFill>
                   <a:srgbClr val="1F2A2E"/>
                 </a:solidFill>
               </a:rPr>
-              <a:t>Hidrogênios ligados a N ou O, que podem doar a ligação</a:t>
-            </a:r>
-          </a:p>
-        </p:txBody>
-      </p:sp>
-      <p:sp>
-        <p:nvSpPr>
-          <p:cNvPr id="11" name="Descritor TPSA"/>
+              <a:t>grupos</a:t>
+            </a:r>
+          </a:p>
+        </p:txBody>
+      </p:sp>
+      <p:sp>
+        <p:nvSpPr>
+          <p:cNvPr id="26" name="Significado HBD"/>
+          <p:cNvSpPr txBox="1"/>
+          <p:nvPr/>
+        </p:nvSpPr>
+        <p:spPr>
+          <a:xfrm>
+            <a:off x="6858000" y="4809744"/>
+            <a:ext cx="3931920" cy="585216"/>
+          </a:xfrm>
+          <a:prstGeom prst="rect">
+            <a:avLst/>
+          </a:prstGeom>
+          <a:noFill/>
+        </p:spPr>
+        <p:txBody>
+          <a:bodyPr wrap="square" anchor="ctr" lIns="0" rIns="0" tIns="0" bIns="0">
+            <a:spAutoFit/>
+          </a:bodyPr>
+          <a:lstStyle/>
+          <a:p>
+            <a:pPr algn="l"/>
+            <a:r>
+              <a:rPr sz="2000" lang="pt-BR" b="0">
+                <a:solidFill>
+                  <a:srgbClr val="1F2A2E"/>
+                </a:solidFill>
+              </a:rPr>
+              <a:t>Doam ligação de hidrogênio</a:t>
+            </a:r>
+          </a:p>
+        </p:txBody>
+      </p:sp>
+      <p:sp>
+        <p:nvSpPr>
+          <p:cNvPr id="27" name="Linha TPSA"/>
           <p:cNvSpPr/>
           <p:nvPr/>
         </p:nvSpPr>
         <p:spPr>
           <a:xfrm>
-            <a:off x="9070848" y="2743200"/>
-            <a:ext cx="1874519" cy="2468880"/>
+            <a:off x="841248" y="5468112"/>
+            <a:ext cx="10058400" cy="585216"/>
           </a:xfrm>
           <a:prstGeom prst="roundRect">
             <a:avLst>
@@ -8976,76 +9196,23 @@
           </a:fontRef>
         </p:style>
         <p:txBody>
-          <a:bodyPr rtlCol="0" anchor="t" wrap="square" lIns="137160" rIns="137160" tIns="54864" bIns="54864"/>
-          <a:lstStyle/>
-          <a:p>
-            <a:pPr algn="l">
-              <a:spcAft>
-                <a:spcPts val="200"/>
-              </a:spcAft>
-            </a:pPr>
-            <a:r>
-              <a:rPr sz="1600" b="1">
-                <a:solidFill>
-                  <a:srgbClr val="0F4334"/>
-                </a:solidFill>
-              </a:rPr>
-              <a:t>TPSA</a:t>
-            </a:r>
-          </a:p>
-          <a:p>
-            <a:pPr algn="l">
-              <a:spcAft>
-                <a:spcPts val="0"/>
-              </a:spcAft>
-            </a:pPr>
-            <a:r>
-              <a:rPr sz="3200" b="1">
-                <a:solidFill>
-                  <a:srgbClr val="09846C"/>
-                </a:solidFill>
-              </a:rPr>
-              <a:t>128,59</a:t>
-            </a:r>
-          </a:p>
-          <a:p>
-            <a:pPr algn="l">
-              <a:spcAft>
-                <a:spcPts val="600"/>
-              </a:spcAft>
-            </a:pPr>
-            <a:r>
-              <a:rPr sz="1200" b="0">
-                <a:solidFill>
-                  <a:srgbClr val="5F6B6D"/>
-                </a:solidFill>
-              </a:rPr>
-              <a:t>Å²</a:t>
-            </a:r>
-          </a:p>
-          <a:p>
-            <a:pPr algn="l"/>
-            <a:r>
-              <a:rPr sz="1400" b="0">
-                <a:solidFill>
-                  <a:srgbClr val="1F2A2E"/>
-                </a:solidFill>
-              </a:rPr>
-              <a:t>Área ocupada pelos átomos polares (N, O e seus hidrogênios)</a:t>
-            </a:r>
-          </a:p>
-        </p:txBody>
-      </p:sp>
-      <p:sp>
-        <p:nvSpPr>
-          <p:cNvPr id="12" name="TextBox 11"/>
+          <a:bodyPr rtlCol="0" anchor="ctr"/>
+          <a:lstStyle/>
+          <a:p>
+            <a:pPr algn="ctr"/>
+          </a:p>
+        </p:txBody>
+      </p:sp>
+      <p:sp>
+        <p:nvSpPr>
+          <p:cNvPr id="28" name="Nome TPSA"/>
           <p:cNvSpPr txBox="1"/>
           <p:nvPr/>
         </p:nvSpPr>
         <p:spPr>
           <a:xfrm>
-            <a:off x="841248" y="5440680"/>
-            <a:ext cx="9144000" cy="320040"/>
+            <a:off x="1051560" y="5468112"/>
+            <a:ext cx="2377440" cy="585216"/>
           </a:xfrm>
           <a:prstGeom prst="rect">
             <a:avLst/>
@@ -9053,19 +9220,121 @@
           <a:noFill/>
         </p:spPr>
         <p:txBody>
-          <a:bodyPr wrap="square" anchor="t" lIns="0" rIns="0" tIns="0" bIns="0">
+          <a:bodyPr wrap="square" anchor="ctr" lIns="0" rIns="0" tIns="0" bIns="0">
             <a:spAutoFit/>
           </a:bodyPr>
           <a:lstStyle/>
           <a:p>
             <a:pPr algn="l"/>
             <a:r>
-              <a:rPr sz="1400" b="0">
-                <a:solidFill>
-                  <a:srgbClr val="5F6B6D"/>
-                </a:solidFill>
-              </a:rPr>
-              <a:t>No próximo slide, a mesma molécula aparece como texto (SMILES)</a:t>
+              <a:rPr sz="2200" lang="pt-BR" b="1">
+                <a:solidFill>
+                  <a:srgbClr val="0F4334"/>
+                </a:solidFill>
+              </a:rPr>
+              <a:t>TPSA</a:t>
+            </a:r>
+          </a:p>
+        </p:txBody>
+      </p:sp>
+      <p:sp>
+        <p:nvSpPr>
+          <p:cNvPr id="29" name="Valor TPSA"/>
+          <p:cNvSpPr txBox="1"/>
+          <p:nvPr/>
+        </p:nvSpPr>
+        <p:spPr>
+          <a:xfrm>
+            <a:off x="3474720" y="5468112"/>
+            <a:ext cx="1737360" cy="585216"/>
+          </a:xfrm>
+          <a:prstGeom prst="rect">
+            <a:avLst/>
+          </a:prstGeom>
+          <a:noFill/>
+        </p:spPr>
+        <p:txBody>
+          <a:bodyPr wrap="square" anchor="ctr" lIns="0" rIns="0" tIns="0" bIns="0">
+            <a:spAutoFit/>
+          </a:bodyPr>
+          <a:lstStyle/>
+          <a:p>
+            <a:pPr algn="l"/>
+            <a:r>
+              <a:rPr sz="2800" lang="pt-BR" b="1">
+                <a:solidFill>
+                  <a:srgbClr val="0F4334"/>
+                </a:solidFill>
+              </a:rPr>
+              <a:t>128,59</a:t>
+            </a:r>
+          </a:p>
+        </p:txBody>
+      </p:sp>
+      <p:sp>
+        <p:nvSpPr>
+          <p:cNvPr id="30" name="Unidade TPSA"/>
+          <p:cNvSpPr txBox="1"/>
+          <p:nvPr/>
+        </p:nvSpPr>
+        <p:spPr>
+          <a:xfrm>
+            <a:off x="5212080" y="5468112"/>
+            <a:ext cx="1554480" cy="585216"/>
+          </a:xfrm>
+          <a:prstGeom prst="rect">
+            <a:avLst/>
+          </a:prstGeom>
+          <a:noFill/>
+        </p:spPr>
+        <p:txBody>
+          <a:bodyPr wrap="square" anchor="ctr" lIns="0" rIns="0" tIns="0" bIns="0">
+            <a:spAutoFit/>
+          </a:bodyPr>
+          <a:lstStyle/>
+          <a:p>
+            <a:pPr algn="l"/>
+            <a:r>
+              <a:rPr sz="2000" lang="pt-BR" b="0">
+                <a:solidFill>
+                  <a:srgbClr val="1F2A2E"/>
+                </a:solidFill>
+              </a:rPr>
+              <a:t>Å²</a:t>
+            </a:r>
+          </a:p>
+        </p:txBody>
+      </p:sp>
+      <p:sp>
+        <p:nvSpPr>
+          <p:cNvPr id="31" name="Significado TPSA"/>
+          <p:cNvSpPr txBox="1"/>
+          <p:nvPr/>
+        </p:nvSpPr>
+        <p:spPr>
+          <a:xfrm>
+            <a:off x="6858000" y="5468112"/>
+            <a:ext cx="3931920" cy="585216"/>
+          </a:xfrm>
+          <a:prstGeom prst="rect">
+            <a:avLst/>
+          </a:prstGeom>
+          <a:noFill/>
+        </p:spPr>
+        <p:txBody>
+          <a:bodyPr wrap="square" anchor="ctr" lIns="0" rIns="0" tIns="0" bIns="0">
+            <a:spAutoFit/>
+          </a:bodyPr>
+          <a:lstStyle/>
+          <a:p>
+            <a:pPr algn="l"/>
+            <a:r>
+              <a:rPr sz="2000" lang="pt-BR" b="0">
+                <a:solidFill>
+                  <a:srgbClr val="1F2A2E"/>
+                </a:solidFill>
+              </a:rPr>
+              <a:t>Área ocupada por átomos polares</a:t>
             </a:r>
           </a:p>
         </p:txBody>
@@ -9128,10 +9397,11 @@
           <a:lstStyle/>
           <a:p>
             <a:r>
-              <a:rPr sz="3600">
+              <a:rPr sz="4000" b="1" lang="pt-BR">
                 <a:solidFill>
                   <a:srgbClr val="0F4334"/>
                 </a:solidFill>
+                <a:latin typeface="Calibri"/>
               </a:rPr>
               <a:t>Cinco descritores não bastam; contar o SMILES ajuda</a:t>
             </a:r>
@@ -9150,8 +9420,8 @@
         </p:nvSpPr>
         <p:spPr>
           <a:xfrm>
-            <a:off x="9966960" y="6217920"/>
-            <a:ext cx="1097280" cy="274320"/>
+            <a:off x="9966960" y="6172200"/>
+            <a:ext cx="1097280" cy="365760"/>
           </a:xfrm>
         </p:spPr>
         <p:txBody>
@@ -9160,14 +9430,14 @@
           <a:p>
             <a:pPr algn="r"/>
             <a:fld id="{B6F15528-21DE-4FAA-801E-634DDDAF4B2B}" type="slidenum">
-              <a:rPr lang="pt-BR" sz="1400">
-                <a:solidFill>
-                  <a:srgbClr val="5F6B6D"/>
+              <a:rPr lang="pt-BR" sz="1800" b="1">
+                <a:solidFill>
+                  <a:srgbClr val="3C4649"/>
                 </a:solidFill>
               </a:rPr>
               <a:t>‹#›</a:t>
             </a:fld>
-            <a:endParaRPr lang="pt-BR" sz="1400"/>
+            <a:endParaRPr lang="pt-BR" sz="1800"/>
           </a:p>
         </p:txBody>
       </p:sp>
@@ -9180,7 +9450,7 @@
         <p:spPr>
           <a:xfrm>
             <a:off x="841248" y="1828800"/>
-            <a:ext cx="5120640" cy="365760"/>
+            <a:ext cx="4846320" cy="411480"/>
           </a:xfrm>
           <a:prstGeom prst="rect">
             <a:avLst/>
@@ -9195,27 +9465,27 @@
           <a:p>
             <a:pPr algn="l"/>
             <a:r>
-              <a:rPr sz="1800" b="1">
+              <a:rPr sz="2400" lang="pt-BR" b="1">
                 <a:solidFill>
                   <a:srgbClr val="0F4334"/>
                 </a:solidFill>
               </a:rPr>
-              <a:t>Acurácia de uma árvore com um só descritor</a:t>
+              <a:t>Acurácia com um só descritor</a:t>
             </a:r>
           </a:p>
         </p:txBody>
       </p:sp>
       <p:graphicFrame>
         <p:nvGraphicFramePr>
-          <p:cNvPr id="6" name="Chart 5"/>
+          <p:cNvPr id="6" name="Chart 5" descr="Gráfico de barras: acurácia de uma árvore com um só descritor. HBD 45,1%, TPSA 44,9%, HBA 43,3%, LogP 38,7% e massa molecular 37,8%."/>
           <p:cNvGraphicFramePr>
             <a:graphicFrameLocks noGrp="1"/>
           </p:cNvGraphicFramePr>
           <p:nvPr/>
         </p:nvGraphicFramePr>
         <p:xfrm>
-          <a:off x="841248" y="2240280"/>
-          <a:ext cx="5120640" cy="2834640"/>
+          <a:off x="841248" y="2286000"/>
+          <a:ext cx="4846320" cy="3108960"/>
         </p:xfrm>
         <a:graphic>
           <a:graphicData uri="http://schemas.openxmlformats.org/drawingml/2006/chart">
@@ -9231,8 +9501,8 @@
         </p:nvSpPr>
         <p:spPr>
           <a:xfrm>
-            <a:off x="841248" y="5212080"/>
-            <a:ext cx="5120640" cy="548640"/>
+            <a:off x="841248" y="5486400"/>
+            <a:ext cx="4846320" cy="411480"/>
           </a:xfrm>
           <a:prstGeom prst="rect">
             <a:avLst/>
@@ -9247,7 +9517,7 @@
           <a:p>
             <a:pPr algn="l"/>
             <a:r>
-              <a:rPr sz="1400" b="1">
+              <a:rPr sz="2000" lang="pt-BR" b="1">
                 <a:solidFill>
                   <a:srgbClr val="1F2A2E"/>
                 </a:solidFill>
@@ -9255,12 +9525,12 @@
               <a:t>Piso: </a:t>
             </a:r>
             <a:r>
-              <a:rPr sz="1400" b="0">
+              <a:rPr sz="2000" lang="pt-BR" b="0">
                 <a:solidFill>
                   <a:srgbClr val="1F2A2E"/>
                 </a:solidFill>
               </a:rPr>
-              <a:t>responder sempre EGFR acerta 29,3%</a:t>
+              <a:t>sempre EGFR = 29,3%</a:t>
             </a:r>
           </a:p>
         </p:txBody>
@@ -9273,8 +9543,8 @@
         </p:nvSpPr>
         <p:spPr>
           <a:xfrm>
-            <a:off x="6309360" y="1828800"/>
-            <a:ext cx="4663440" cy="365760"/>
+            <a:off x="6126480" y="1828800"/>
+            <a:ext cx="4846320" cy="411480"/>
           </a:xfrm>
           <a:prstGeom prst="rect">
             <a:avLst/>
@@ -9289,12 +9559,12 @@
           <a:p>
             <a:pPr algn="l"/>
             <a:r>
-              <a:rPr sz="1800" b="1">
+              <a:rPr sz="2400" lang="pt-BR" b="1">
                 <a:solidFill>
                   <a:srgbClr val="0F4334"/>
                 </a:solidFill>
               </a:rPr>
-              <a:t>12 atributos a partir do SMILES</a:t>
+              <a:t>12 atributos do SMILES</a:t>
             </a:r>
           </a:p>
         </p:txBody>
@@ -9307,8 +9577,8 @@
         </p:nvSpPr>
         <p:spPr>
           <a:xfrm>
-            <a:off x="6309360" y="2240280"/>
-            <a:ext cx="4663440" cy="320040"/>
+            <a:off x="6126480" y="2286000"/>
+            <a:ext cx="4846320" cy="365760"/>
           </a:xfrm>
           <a:prstGeom prst="rect">
             <a:avLst/>
@@ -9323,12 +9593,12 @@
           <a:p>
             <a:pPr algn="l"/>
             <a:r>
-              <a:rPr sz="1400" b="0">
-                <a:solidFill>
-                  <a:srgbClr val="5F6B6D"/>
-                </a:solidFill>
-              </a:rPr>
-              <a:t>SMILES: texto que descreve a estrutura da molécula</a:t>
+              <a:rPr sz="2000" lang="pt-BR" b="0">
+                <a:solidFill>
+                  <a:srgbClr val="1F2A2E"/>
+                </a:solidFill>
+              </a:rPr>
+              <a:t>Texto que descreve a molécula</a:t>
             </a:r>
           </a:p>
         </p:txBody>
@@ -9341,8 +9611,8 @@
         </p:nvSpPr>
         <p:spPr>
           <a:xfrm>
-            <a:off x="6309360" y="2697480"/>
-            <a:ext cx="4663440" cy="640080"/>
+            <a:off x="6126480" y="2743200"/>
+            <a:ext cx="4846320" cy="868680"/>
           </a:xfrm>
           <a:prstGeom prst="roundRect">
             <a:avLst>
@@ -9377,61 +9647,39 @@
           <a:p>
             <a:pPr algn="ctr"/>
             <a:r>
-              <a:rPr sz="1200" b="0">
+              <a:rPr sz="1800" lang="pt-BR" b="0">
                 <a:solidFill>
                   <a:srgbClr val="1F2A2E"/>
                 </a:solidFill>
                 <a:latin typeface="Courier New"/>
               </a:rPr>
-              <a:t>CCN(CC)CCn1cnc2cc(C(=O)NC(=O)NCCCCCC(=O)NO)ccc21</a:t>
-            </a:r>
-          </a:p>
-        </p:txBody>
-      </p:sp>
-      <p:sp>
-        <p:nvSpPr>
-          <p:cNvPr id="11" name="TextBox 10"/>
-          <p:cNvSpPr txBox="1"/>
-          <p:nvPr/>
-        </p:nvSpPr>
-        <p:spPr>
-          <a:xfrm>
-            <a:off x="6309360" y="3383280"/>
-            <a:ext cx="4663440" cy="274320"/>
-          </a:xfrm>
-          <a:prstGeom prst="rect">
-            <a:avLst/>
-          </a:prstGeom>
-          <a:noFill/>
-        </p:spPr>
-        <p:txBody>
-          <a:bodyPr wrap="square" anchor="t" lIns="0" rIns="0" tIns="0" bIns="0">
-            <a:spAutoFit/>
-          </a:bodyPr>
-          <a:lstStyle/>
-          <a:p>
-            <a:pPr algn="l"/>
-            <a:r>
-              <a:rPr sz="1200" b="0">
-                <a:solidFill>
-                  <a:srgbClr val="5F6B6D"/>
-                </a:solidFill>
-              </a:rPr>
-              <a:t>Uma molécula real da base (HDAC1)</a:t>
-            </a:r>
-          </a:p>
-        </p:txBody>
-      </p:sp>
-      <p:sp>
-        <p:nvSpPr>
-          <p:cNvPr id="12" name="Contagem comprimento"/>
+              <a:t>CCN(CC)CCn1cnc2cc(C(=O)N</a:t>
+            </a:r>
+          </a:p>
+          <a:p>
+            <a:pPr algn="ctr"/>
+            <a:r>
+              <a:rPr sz="1800" lang="pt-BR" b="0">
+                <a:solidFill>
+                  <a:srgbClr val="1F2A2E"/>
+                </a:solidFill>
+                <a:latin typeface="Courier New"/>
+              </a:rPr>
+              <a:t>C(=O)NCCCCCC(=O)NO)ccc21</a:t>
+            </a:r>
+          </a:p>
+        </p:txBody>
+      </p:sp>
+      <p:sp>
+        <p:nvSpPr>
+          <p:cNvPr id="11" name="Contagem comprimento"/>
           <p:cNvSpPr/>
           <p:nvPr/>
         </p:nvSpPr>
         <p:spPr>
           <a:xfrm>
-            <a:off x="6309360" y="3794760"/>
-            <a:ext cx="1481328" cy="896112"/>
+            <a:off x="6126480" y="3794760"/>
+            <a:ext cx="1554480" cy="1097280"/>
           </a:xfrm>
           <a:prstGeom prst="roundRect">
             <a:avLst>
@@ -9443,7 +9691,7 @@
           </a:solidFill>
           <a:ln>
             <a:solidFill>
-              <a:srgbClr val="B7C4C1"/>
+              <a:srgbClr val="8A9795"/>
             </a:solidFill>
           </a:ln>
           <a:effectLst/>
@@ -9463,7 +9711,7 @@
           </a:fontRef>
         </p:style>
         <p:txBody>
-          <a:bodyPr rtlCol="0" anchor="ctr" wrap="square" lIns="45720" rIns="45720" tIns="54864" bIns="54864"/>
+          <a:bodyPr rtlCol="0" anchor="ctr" wrap="square" lIns="27432" rIns="27432" tIns="54864" bIns="54864"/>
           <a:lstStyle/>
           <a:p>
             <a:pPr algn="ctr">
@@ -9472,7 +9720,7 @@
               </a:spcAft>
             </a:pPr>
             <a:r>
-              <a:rPr sz="2600" b="1">
+              <a:rPr sz="3200" lang="pt-BR" b="1">
                 <a:solidFill>
                   <a:srgbClr val="09846C"/>
                 </a:solidFill>
@@ -9483,7 +9731,7 @@
           <a:p>
             <a:pPr algn="ctr"/>
             <a:r>
-              <a:rPr sz="1200" b="0">
+              <a:rPr sz="1800" lang="pt-BR" b="0">
                 <a:solidFill>
                   <a:srgbClr val="1F2A2E"/>
                 </a:solidFill>
@@ -9495,14 +9743,14 @@
       </p:sp>
       <p:sp>
         <p:nvSpPr>
-          <p:cNvPr id="13" name="Contagem átomos de N"/>
+          <p:cNvPr id="12" name="Contagem átomos de N"/>
           <p:cNvSpPr/>
           <p:nvPr/>
         </p:nvSpPr>
         <p:spPr>
           <a:xfrm>
-            <a:off x="7900416" y="3794760"/>
-            <a:ext cx="1481328" cy="896112"/>
+            <a:off x="7772400" y="3794760"/>
+            <a:ext cx="1554480" cy="1097280"/>
           </a:xfrm>
           <a:prstGeom prst="roundRect">
             <a:avLst>
@@ -9514,7 +9762,7 @@
           </a:solidFill>
           <a:ln>
             <a:solidFill>
-              <a:srgbClr val="B7C4C1"/>
+              <a:srgbClr val="8A9795"/>
             </a:solidFill>
           </a:ln>
           <a:effectLst/>
@@ -9534,7 +9782,7 @@
           </a:fontRef>
         </p:style>
         <p:txBody>
-          <a:bodyPr rtlCol="0" anchor="ctr" wrap="square" lIns="45720" rIns="45720" tIns="54864" bIns="54864"/>
+          <a:bodyPr rtlCol="0" anchor="ctr" wrap="square" lIns="27432" rIns="27432" tIns="54864" bIns="54864"/>
           <a:lstStyle/>
           <a:p>
             <a:pPr algn="ctr">
@@ -9543,7 +9791,7 @@
               </a:spcAft>
             </a:pPr>
             <a:r>
-              <a:rPr sz="2600" b="1">
+              <a:rPr sz="3200" lang="pt-BR" b="1">
                 <a:solidFill>
                   <a:srgbClr val="09846C"/>
                 </a:solidFill>
@@ -9554,7 +9802,7 @@
           <a:p>
             <a:pPr algn="ctr"/>
             <a:r>
-              <a:rPr sz="1200" b="0">
+              <a:rPr sz="1800" lang="pt-BR" b="0">
                 <a:solidFill>
                   <a:srgbClr val="1F2A2E"/>
                 </a:solidFill>
@@ -9566,14 +9814,14 @@
       </p:sp>
       <p:sp>
         <p:nvSpPr>
-          <p:cNvPr id="14" name="Contagem átomos de O"/>
+          <p:cNvPr id="13" name="Contagem átomos de O"/>
           <p:cNvSpPr/>
           <p:nvPr/>
         </p:nvSpPr>
         <p:spPr>
           <a:xfrm>
-            <a:off x="9491472" y="3794760"/>
-            <a:ext cx="1481328" cy="896112"/>
+            <a:off x="9418320" y="3794760"/>
+            <a:ext cx="1554480" cy="1097280"/>
           </a:xfrm>
           <a:prstGeom prst="roundRect">
             <a:avLst>
@@ -9585,7 +9833,7 @@
           </a:solidFill>
           <a:ln>
             <a:solidFill>
-              <a:srgbClr val="B7C4C1"/>
+              <a:srgbClr val="8A9795"/>
             </a:solidFill>
           </a:ln>
           <a:effectLst/>
@@ -9605,7 +9853,7 @@
           </a:fontRef>
         </p:style>
         <p:txBody>
-          <a:bodyPr rtlCol="0" anchor="ctr" wrap="square" lIns="45720" rIns="45720" tIns="54864" bIns="54864"/>
+          <a:bodyPr rtlCol="0" anchor="ctr" wrap="square" lIns="27432" rIns="27432" tIns="54864" bIns="54864"/>
           <a:lstStyle/>
           <a:p>
             <a:pPr algn="ctr">
@@ -9614,7 +9862,7 @@
               </a:spcAft>
             </a:pPr>
             <a:r>
-              <a:rPr sz="2600" b="1">
+              <a:rPr sz="3200" lang="pt-BR" b="1">
                 <a:solidFill>
                   <a:srgbClr val="09846C"/>
                 </a:solidFill>
@@ -9625,7 +9873,7 @@
           <a:p>
             <a:pPr algn="ctr"/>
             <a:r>
-              <a:rPr sz="1200" b="0">
+              <a:rPr sz="1800" lang="pt-BR" b="0">
                 <a:solidFill>
                   <a:srgbClr val="1F2A2E"/>
                 </a:solidFill>
@@ -9637,14 +9885,14 @@
       </p:sp>
       <p:sp>
         <p:nvSpPr>
-          <p:cNvPr id="15" name="Contagem anéis"/>
+          <p:cNvPr id="14" name="Contagem anéis"/>
           <p:cNvSpPr/>
           <p:nvPr/>
         </p:nvSpPr>
         <p:spPr>
           <a:xfrm>
-            <a:off x="6309360" y="4800600"/>
-            <a:ext cx="1481328" cy="896112"/>
+            <a:off x="6126480" y="4983480"/>
+            <a:ext cx="1554480" cy="1097280"/>
           </a:xfrm>
           <a:prstGeom prst="roundRect">
             <a:avLst>
@@ -9656,7 +9904,7 @@
           </a:solidFill>
           <a:ln>
             <a:solidFill>
-              <a:srgbClr val="B7C4C1"/>
+              <a:srgbClr val="8A9795"/>
             </a:solidFill>
           </a:ln>
           <a:effectLst/>
@@ -9676,7 +9924,7 @@
           </a:fontRef>
         </p:style>
         <p:txBody>
-          <a:bodyPr rtlCol="0" anchor="ctr" wrap="square" lIns="45720" rIns="45720" tIns="54864" bIns="54864"/>
+          <a:bodyPr rtlCol="0" anchor="ctr" wrap="square" lIns="27432" rIns="27432" tIns="54864" bIns="54864"/>
           <a:lstStyle/>
           <a:p>
             <a:pPr algn="ctr">
@@ -9685,7 +9933,7 @@
               </a:spcAft>
             </a:pPr>
             <a:r>
-              <a:rPr sz="2600" b="1">
+              <a:rPr sz="3200" lang="pt-BR" b="1">
                 <a:solidFill>
                   <a:srgbClr val="09846C"/>
                 </a:solidFill>
@@ -9696,7 +9944,7 @@
           <a:p>
             <a:pPr algn="ctr"/>
             <a:r>
-              <a:rPr sz="1200" b="0">
+              <a:rPr sz="1800" lang="pt-BR" b="0">
                 <a:solidFill>
                   <a:srgbClr val="1F2A2E"/>
                 </a:solidFill>
@@ -9708,14 +9956,14 @@
       </p:sp>
       <p:sp>
         <p:nvSpPr>
-          <p:cNvPr id="16" name="Contagem átomos aromáticos"/>
+          <p:cNvPr id="15" name="Contagem aromáticos"/>
           <p:cNvSpPr/>
           <p:nvPr/>
         </p:nvSpPr>
         <p:spPr>
           <a:xfrm>
-            <a:off x="7900416" y="4800600"/>
-            <a:ext cx="1481328" cy="896112"/>
+            <a:off x="7772400" y="4983480"/>
+            <a:ext cx="1554480" cy="1097280"/>
           </a:xfrm>
           <a:prstGeom prst="roundRect">
             <a:avLst>
@@ -9727,7 +9975,7 @@
           </a:solidFill>
           <a:ln>
             <a:solidFill>
-              <a:srgbClr val="B7C4C1"/>
+              <a:srgbClr val="8A9795"/>
             </a:solidFill>
           </a:ln>
           <a:effectLst/>
@@ -9747,7 +9995,7 @@
           </a:fontRef>
         </p:style>
         <p:txBody>
-          <a:bodyPr rtlCol="0" anchor="ctr" wrap="square" lIns="45720" rIns="45720" tIns="54864" bIns="54864"/>
+          <a:bodyPr rtlCol="0" anchor="ctr" wrap="square" lIns="27432" rIns="27432" tIns="54864" bIns="54864"/>
           <a:lstStyle/>
           <a:p>
             <a:pPr algn="ctr">
@@ -9756,7 +10004,7 @@
               </a:spcAft>
             </a:pPr>
             <a:r>
-              <a:rPr sz="2600" b="1">
+              <a:rPr sz="3200" lang="pt-BR" b="1">
                 <a:solidFill>
                   <a:srgbClr val="09846C"/>
                 </a:solidFill>
@@ -9767,26 +10015,26 @@
           <a:p>
             <a:pPr algn="ctr"/>
             <a:r>
-              <a:rPr sz="1200" b="0">
+              <a:rPr sz="1800" lang="pt-BR" b="0">
                 <a:solidFill>
                   <a:srgbClr val="1F2A2E"/>
                 </a:solidFill>
               </a:rPr>
-              <a:t>átomos aromáticos</a:t>
-            </a:r>
-          </a:p>
-        </p:txBody>
-      </p:sp>
-      <p:sp>
-        <p:nvSpPr>
-          <p:cNvPr id="17" name="Contagem ligações duplas"/>
+              <a:t>aromáticos</a:t>
+            </a:r>
+          </a:p>
+        </p:txBody>
+      </p:sp>
+      <p:sp>
+        <p:nvSpPr>
+          <p:cNvPr id="16" name="Contagem ligações duplas"/>
           <p:cNvSpPr/>
           <p:nvPr/>
         </p:nvSpPr>
         <p:spPr>
           <a:xfrm>
-            <a:off x="9491472" y="4800600"/>
-            <a:ext cx="1481328" cy="896112"/>
+            <a:off x="9418320" y="4983480"/>
+            <a:ext cx="1554480" cy="1097280"/>
           </a:xfrm>
           <a:prstGeom prst="roundRect">
             <a:avLst>
@@ -9798,7 +10046,7 @@
           </a:solidFill>
           <a:ln>
             <a:solidFill>
-              <a:srgbClr val="B7C4C1"/>
+              <a:srgbClr val="8A9795"/>
             </a:solidFill>
           </a:ln>
           <a:effectLst/>
@@ -9818,7 +10066,7 @@
           </a:fontRef>
         </p:style>
         <p:txBody>
-          <a:bodyPr rtlCol="0" anchor="ctr" wrap="square" lIns="45720" rIns="45720" tIns="54864" bIns="54864"/>
+          <a:bodyPr rtlCol="0" anchor="ctr" wrap="square" lIns="27432" rIns="27432" tIns="54864" bIns="54864"/>
           <a:lstStyle/>
           <a:p>
             <a:pPr algn="ctr">
@@ -9827,7 +10075,7 @@
               </a:spcAft>
             </a:pPr>
             <a:r>
-              <a:rPr sz="2600" b="1">
+              <a:rPr sz="3200" lang="pt-BR" b="1">
                 <a:solidFill>
                   <a:srgbClr val="09846C"/>
                 </a:solidFill>
@@ -9838,46 +10086,12 @@
           <a:p>
             <a:pPr algn="ctr"/>
             <a:r>
-              <a:rPr sz="1200" b="0">
+              <a:rPr sz="1800" lang="pt-BR" b="0">
                 <a:solidFill>
                   <a:srgbClr val="1F2A2E"/>
                 </a:solidFill>
               </a:rPr>
               <a:t>ligações duplas</a:t>
-            </a:r>
-          </a:p>
-        </p:txBody>
-      </p:sp>
-      <p:sp>
-        <p:nvSpPr>
-          <p:cNvPr id="18" name="TextBox 17"/>
-          <p:cNvSpPr txBox="1"/>
-          <p:nvPr/>
-        </p:nvSpPr>
-        <p:spPr>
-          <a:xfrm>
-            <a:off x="6309360" y="5852160"/>
-            <a:ext cx="4663440" cy="274320"/>
-          </a:xfrm>
-          <a:prstGeom prst="rect">
-            <a:avLst/>
-          </a:prstGeom>
-          <a:noFill/>
-        </p:spPr>
-        <p:txBody>
-          <a:bodyPr wrap="square" anchor="t" lIns="0" rIns="0" tIns="0" bIns="0">
-            <a:spAutoFit/>
-          </a:bodyPr>
-          <a:lstStyle/>
-          <a:p>
-            <a:pPr algn="l"/>
-            <a:r>
-              <a:rPr sz="1200" b="0">
-                <a:solidFill>
-                  <a:srgbClr val="5F6B6D"/>
-                </a:solidFill>
-              </a:rPr>
-              <a:t>6 dos 12 atributos; contar caracteres não analisa a estrutura</a:t>
             </a:r>
           </a:p>
         </p:txBody>
@@ -9940,10 +10154,11 @@
           <a:lstStyle/>
           <a:p>
             <a:r>
-              <a:rPr sz="3600">
+              <a:rPr sz="4000" b="1" lang="pt-BR">
                 <a:solidFill>
                   <a:srgbClr val="0F4334"/>
                 </a:solidFill>
+                <a:latin typeface="Calibri"/>
               </a:rPr>
               <a:t>A divisão aleatória deixa o teste ver a resposta</a:t>
             </a:r>
@@ -9962,8 +10177,8 @@
         </p:nvSpPr>
         <p:spPr>
           <a:xfrm>
-            <a:off x="9966960" y="6217920"/>
-            <a:ext cx="1097280" cy="274320"/>
+            <a:off x="9966960" y="6172200"/>
+            <a:ext cx="1097280" cy="365760"/>
           </a:xfrm>
         </p:spPr>
         <p:txBody>
@@ -9972,27 +10187,27 @@
           <a:p>
             <a:pPr algn="r"/>
             <a:fld id="{B6F15528-21DE-4FAA-801E-634DDDAF4B2B}" type="slidenum">
-              <a:rPr lang="pt-BR" sz="1400">
-                <a:solidFill>
-                  <a:srgbClr val="5F6B6D"/>
+              <a:rPr lang="pt-BR" sz="1800" b="1">
+                <a:solidFill>
+                  <a:srgbClr val="3C4649"/>
                 </a:solidFill>
               </a:rPr>
               <a:t>‹#›</a:t>
             </a:fld>
-            <a:endParaRPr lang="pt-BR" sz="1400"/>
-          </a:p>
-        </p:txBody>
-      </p:sp>
-      <p:sp>
-        <p:nvSpPr>
-          <p:cNvPr id="5" name="Painel Divisão aleatória"/>
+            <a:endParaRPr lang="pt-BR" sz="1800"/>
+          </a:p>
+        </p:txBody>
+      </p:sp>
+      <p:sp>
+        <p:nvSpPr>
+          <p:cNvPr id="5" name="Painel Divisão aleatória" descr="Esquema da divisão aleatória: 12 moléculas, em 4 pares de gêmeas, divididas em treino e teste. Dois pares de gêmeas ficam divididos entre treino e teste, ligados por linhas tracejadas."/>
           <p:cNvSpPr/>
           <p:nvPr/>
         </p:nvSpPr>
         <p:spPr>
           <a:xfrm>
             <a:off x="841248" y="1828800"/>
-            <a:ext cx="4754880" cy="3063240"/>
+            <a:ext cx="4754880" cy="3017520"/>
           </a:xfrm>
           <a:prstGeom prst="roundRect">
             <a:avLst>
@@ -10004,7 +10219,7 @@
           </a:solidFill>
           <a:ln>
             <a:solidFill>
-              <a:srgbClr val="B7C4C1"/>
+              <a:srgbClr val="8A9795"/>
             </a:solidFill>
           </a:ln>
           <a:effectLst/>
@@ -10039,8 +10254,8 @@
         </p:nvSpPr>
         <p:spPr>
           <a:xfrm>
-            <a:off x="1024128" y="1920240"/>
-            <a:ext cx="4389120" cy="365760"/>
+            <a:off x="1024128" y="1901952"/>
+            <a:ext cx="4389120" cy="411480"/>
           </a:xfrm>
           <a:prstGeom prst="rect">
             <a:avLst/>
@@ -10055,7 +10270,7 @@
           <a:p>
             <a:pPr algn="l"/>
             <a:r>
-              <a:rPr sz="1800" b="1">
+              <a:rPr sz="2200" lang="pt-BR" b="1">
                 <a:solidFill>
                   <a:srgbClr val="0F4334"/>
                 </a:solidFill>
@@ -10073,8 +10288,8 @@
         </p:nvSpPr>
         <p:spPr>
           <a:xfrm>
-            <a:off x="1024128" y="2377440"/>
-            <a:ext cx="3200400" cy="1508760"/>
+            <a:off x="1024128" y="2331720"/>
+            <a:ext cx="3200400" cy="1371600"/>
           </a:xfrm>
           <a:prstGeom prst="roundRect">
             <a:avLst>
@@ -10119,8 +10334,8 @@
         </p:nvSpPr>
         <p:spPr>
           <a:xfrm>
-            <a:off x="4407408" y="2377440"/>
-            <a:ext cx="1005840" cy="1508760"/>
+            <a:off x="4407408" y="2331720"/>
+            <a:ext cx="1005840" cy="1371600"/>
           </a:xfrm>
           <a:prstGeom prst="roundRect">
             <a:avLst>
@@ -10165,8 +10380,8 @@
         </p:nvSpPr>
         <p:spPr>
           <a:xfrm>
-            <a:off x="1024128" y="3913632"/>
-            <a:ext cx="3200400" cy="274320"/>
+            <a:off x="1024128" y="3730752"/>
+            <a:ext cx="3200400" cy="320040"/>
           </a:xfrm>
           <a:prstGeom prst="rect">
             <a:avLst/>
@@ -10181,9 +10396,9 @@
           <a:p>
             <a:pPr algn="ctr"/>
             <a:r>
-              <a:rPr sz="1200" b="0">
-                <a:solidFill>
-                  <a:srgbClr val="5F6B6D"/>
+              <a:rPr sz="1800" lang="pt-BR" b="0">
+                <a:solidFill>
+                  <a:srgbClr val="1F2A2E"/>
                 </a:solidFill>
               </a:rPr>
               <a:t>treino</a:t>
@@ -10199,8 +10414,8 @@
         </p:nvSpPr>
         <p:spPr>
           <a:xfrm>
-            <a:off x="4407408" y="3913632"/>
-            <a:ext cx="1005840" cy="274320"/>
+            <a:off x="4407408" y="3730752"/>
+            <a:ext cx="1005840" cy="320040"/>
           </a:xfrm>
           <a:prstGeom prst="rect">
             <a:avLst/>
@@ -10215,9 +10430,9 @@
           <a:p>
             <a:pPr algn="ctr"/>
             <a:r>
-              <a:rPr sz="1200" b="0">
-                <a:solidFill>
-                  <a:srgbClr val="5F6B6D"/>
+              <a:rPr sz="1800" lang="pt-BR" b="0">
+                <a:solidFill>
+                  <a:srgbClr val="1F2A2E"/>
                 </a:solidFill>
               </a:rPr>
               <a:t>teste</a:t>
@@ -10233,15 +10448,15 @@
         </p:nvCxnSpPr>
         <p:spPr>
           <a:xfrm>
-            <a:off x="1362456" y="2761488"/>
+            <a:off x="1371600" y="2697480"/>
             <a:ext cx="777240" cy="0"/>
           </a:xfrm>
           <a:prstGeom prst="line">
             <a:avLst/>
           </a:prstGeom>
-          <a:ln w="15875">
+          <a:ln w="19050">
             <a:solidFill>
-              <a:srgbClr val="5F6B6D"/>
+              <a:srgbClr val="3C4649"/>
             </a:solidFill>
           </a:ln>
         </p:spPr>
@@ -10268,15 +10483,15 @@
         </p:nvCxnSpPr>
         <p:spPr>
           <a:xfrm>
-            <a:off x="1362456" y="3447288"/>
+            <a:off x="1371600" y="3383280"/>
             <a:ext cx="777240" cy="0"/>
           </a:xfrm>
           <a:prstGeom prst="line">
             <a:avLst/>
           </a:prstGeom>
-          <a:ln w="15875">
+          <a:ln w="19050">
             <a:solidFill>
-              <a:srgbClr val="5F6B6D"/>
+              <a:srgbClr val="3C4649"/>
             </a:solidFill>
           </a:ln>
         </p:spPr>
@@ -10303,13 +10518,13 @@
         </p:nvCxnSpPr>
         <p:spPr>
           <a:xfrm>
-            <a:off x="3694176" y="2761488"/>
-            <a:ext cx="978408" cy="0"/>
+            <a:off x="3703320" y="2697480"/>
+            <a:ext cx="978407" cy="0"/>
           </a:xfrm>
           <a:prstGeom prst="line">
             <a:avLst/>
           </a:prstGeom>
-          <a:ln w="28575">
+          <a:ln w="31750">
             <a:solidFill>
               <a:srgbClr val="B23A2E"/>
             </a:solidFill>
@@ -10339,13 +10554,13 @@
         </p:nvCxnSpPr>
         <p:spPr>
           <a:xfrm>
-            <a:off x="3694176" y="3447288"/>
-            <a:ext cx="978408" cy="0"/>
+            <a:off x="3703320" y="3383280"/>
+            <a:ext cx="978407" cy="0"/>
           </a:xfrm>
           <a:prstGeom prst="line">
             <a:avLst/>
           </a:prstGeom>
-          <a:ln w="28575">
+          <a:ln w="31750">
             <a:solidFill>
               <a:srgbClr val="B23A2E"/>
             </a:solidFill>
@@ -10375,8 +10590,8 @@
         </p:nvSpPr>
         <p:spPr>
           <a:xfrm>
-            <a:off x="1207008" y="2606040"/>
-            <a:ext cx="310896" cy="310896"/>
+            <a:off x="1207008" y="2532888"/>
+            <a:ext cx="329184" cy="329184"/>
           </a:xfrm>
           <a:prstGeom prst="ellipse">
             <a:avLst/>
@@ -10421,8 +10636,8 @@
         </p:nvSpPr>
         <p:spPr>
           <a:xfrm>
-            <a:off x="1984248" y="2606040"/>
-            <a:ext cx="310896" cy="310896"/>
+            <a:off x="1984248" y="2532888"/>
+            <a:ext cx="329184" cy="329184"/>
           </a:xfrm>
           <a:prstGeom prst="ellipse">
             <a:avLst/>
@@ -10467,8 +10682,8 @@
         </p:nvSpPr>
         <p:spPr>
           <a:xfrm>
-            <a:off x="1207008" y="3291840"/>
-            <a:ext cx="310896" cy="310896"/>
+            <a:off x="1207008" y="3218688"/>
+            <a:ext cx="329184" cy="329184"/>
           </a:xfrm>
           <a:prstGeom prst="ellipse">
             <a:avLst/>
@@ -10513,8 +10728,8 @@
         </p:nvSpPr>
         <p:spPr>
           <a:xfrm>
-            <a:off x="1984248" y="3291840"/>
-            <a:ext cx="310896" cy="310896"/>
+            <a:off x="1984248" y="3218688"/>
+            <a:ext cx="329184" cy="329184"/>
           </a:xfrm>
           <a:prstGeom prst="ellipse">
             <a:avLst/>
@@ -10559,8 +10774,8 @@
         </p:nvSpPr>
         <p:spPr>
           <a:xfrm>
-            <a:off x="3538728" y="2606040"/>
-            <a:ext cx="310896" cy="310896"/>
+            <a:off x="3538728" y="2532888"/>
+            <a:ext cx="329184" cy="329184"/>
           </a:xfrm>
           <a:prstGeom prst="ellipse">
             <a:avLst/>
@@ -10605,8 +10820,8 @@
         </p:nvSpPr>
         <p:spPr>
           <a:xfrm>
-            <a:off x="3538728" y="3291840"/>
-            <a:ext cx="310896" cy="310896"/>
+            <a:off x="3538728" y="3218688"/>
+            <a:ext cx="329184" cy="329184"/>
           </a:xfrm>
           <a:prstGeom prst="ellipse">
             <a:avLst/>
@@ -10651,14 +10866,14 @@
         </p:nvSpPr>
         <p:spPr>
           <a:xfrm>
-            <a:off x="2761488" y="2606040"/>
-            <a:ext cx="310896" cy="310896"/>
+            <a:off x="2761488" y="2532888"/>
+            <a:ext cx="329184" cy="329184"/>
           </a:xfrm>
           <a:prstGeom prst="ellipse">
             <a:avLst/>
           </a:prstGeom>
           <a:solidFill>
-            <a:srgbClr val="9AA5A3"/>
+            <a:srgbClr val="7A8785"/>
           </a:solidFill>
           <a:ln w="15875">
             <a:solidFill>
@@ -10697,14 +10912,14 @@
         </p:nvSpPr>
         <p:spPr>
           <a:xfrm>
-            <a:off x="2761488" y="3291840"/>
-            <a:ext cx="310896" cy="310896"/>
+            <a:off x="2761488" y="3218688"/>
+            <a:ext cx="329184" cy="329184"/>
           </a:xfrm>
           <a:prstGeom prst="ellipse">
             <a:avLst/>
           </a:prstGeom>
           <a:solidFill>
-            <a:srgbClr val="9AA5A3"/>
+            <a:srgbClr val="7A8785"/>
           </a:solidFill>
           <a:ln w="15875">
             <a:solidFill>
@@ -10743,8 +10958,8 @@
         </p:nvSpPr>
         <p:spPr>
           <a:xfrm>
-            <a:off x="4517136" y="2606040"/>
-            <a:ext cx="310896" cy="310896"/>
+            <a:off x="4517136" y="2532888"/>
+            <a:ext cx="329184" cy="329184"/>
           </a:xfrm>
           <a:prstGeom prst="ellipse">
             <a:avLst/>
@@ -10789,8 +11004,8 @@
         </p:nvSpPr>
         <p:spPr>
           <a:xfrm>
-            <a:off x="4517136" y="3291840"/>
-            <a:ext cx="310896" cy="310896"/>
+            <a:off x="4517136" y="3218688"/>
+            <a:ext cx="329184" cy="329184"/>
           </a:xfrm>
           <a:prstGeom prst="ellipse">
             <a:avLst/>
@@ -10835,14 +11050,14 @@
         </p:nvSpPr>
         <p:spPr>
           <a:xfrm>
-            <a:off x="4974336" y="2606040"/>
-            <a:ext cx="310896" cy="310896"/>
+            <a:off x="4974336" y="2532888"/>
+            <a:ext cx="329184" cy="329184"/>
           </a:xfrm>
           <a:prstGeom prst="ellipse">
             <a:avLst/>
           </a:prstGeom>
           <a:solidFill>
-            <a:srgbClr val="9AA5A3"/>
+            <a:srgbClr val="7A8785"/>
           </a:solidFill>
           <a:ln w="15875">
             <a:solidFill>
@@ -10881,14 +11096,14 @@
         </p:nvSpPr>
         <p:spPr>
           <a:xfrm>
-            <a:off x="4974336" y="3291840"/>
-            <a:ext cx="310896" cy="310896"/>
+            <a:off x="4974336" y="3218688"/>
+            <a:ext cx="329184" cy="329184"/>
           </a:xfrm>
           <a:prstGeom prst="ellipse">
             <a:avLst/>
           </a:prstGeom>
           <a:solidFill>
-            <a:srgbClr val="9AA5A3"/>
+            <a:srgbClr val="7A8785"/>
           </a:solidFill>
           <a:ln w="15875">
             <a:solidFill>
@@ -10927,8 +11142,8 @@
         </p:nvSpPr>
         <p:spPr>
           <a:xfrm>
-            <a:off x="1024128" y="4297680"/>
-            <a:ext cx="4389120" cy="548640"/>
+            <a:off x="1024128" y="4114800"/>
+            <a:ext cx="4389120" cy="685800"/>
           </a:xfrm>
           <a:prstGeom prst="rect">
             <a:avLst/>
@@ -10943,7 +11158,7 @@
           <a:p>
             <a:pPr algn="l"/>
             <a:r>
-              <a:rPr sz="1400" b="1">
+              <a:rPr sz="1800" lang="pt-BR" b="1">
                 <a:solidFill>
                   <a:srgbClr val="0F4334"/>
                 </a:solidFill>
@@ -10955,14 +11170,14 @@
       </p:sp>
       <p:sp>
         <p:nvSpPr>
-          <p:cNvPr id="28" name="Painel Divisão agrupada"/>
+          <p:cNvPr id="28" name="Painel Divisão agrupada" descr="Esquema da divisão agrupada: 12 moléculas, em 4 pares de gêmeas, divididas em treino e teste. Cada par de gêmeas fica do mesmo lado."/>
           <p:cNvSpPr/>
           <p:nvPr/>
         </p:nvSpPr>
         <p:spPr>
           <a:xfrm>
             <a:off x="6217920" y="1828800"/>
-            <a:ext cx="4754880" cy="3063240"/>
+            <a:ext cx="4754880" cy="3017520"/>
           </a:xfrm>
           <a:prstGeom prst="roundRect">
             <a:avLst>
@@ -10974,7 +11189,7 @@
           </a:solidFill>
           <a:ln>
             <a:solidFill>
-              <a:srgbClr val="B7C4C1"/>
+              <a:srgbClr val="8A9795"/>
             </a:solidFill>
           </a:ln>
           <a:effectLst/>
@@ -11009,8 +11224,8 @@
         </p:nvSpPr>
         <p:spPr>
           <a:xfrm>
-            <a:off x="6400800" y="1920240"/>
-            <a:ext cx="4389120" cy="365760"/>
+            <a:off x="6400800" y="1901952"/>
+            <a:ext cx="4389120" cy="411480"/>
           </a:xfrm>
           <a:prstGeom prst="rect">
             <a:avLst/>
@@ -11025,7 +11240,7 @@
           <a:p>
             <a:pPr algn="l"/>
             <a:r>
-              <a:rPr sz="1800" b="1">
+              <a:rPr sz="2200" lang="pt-BR" b="1">
                 <a:solidFill>
                   <a:srgbClr val="0F4334"/>
                 </a:solidFill>
@@ -11043,8 +11258,8 @@
         </p:nvSpPr>
         <p:spPr>
           <a:xfrm>
-            <a:off x="6400800" y="2377440"/>
-            <a:ext cx="3200400" cy="1508760"/>
+            <a:off x="6400800" y="2331720"/>
+            <a:ext cx="3200400" cy="1371600"/>
           </a:xfrm>
           <a:prstGeom prst="roundRect">
             <a:avLst>
@@ -11089,8 +11304,8 @@
         </p:nvSpPr>
         <p:spPr>
           <a:xfrm>
-            <a:off x="9784080" y="2377440"/>
-            <a:ext cx="1005840" cy="1508760"/>
+            <a:off x="9784080" y="2331720"/>
+            <a:ext cx="1005840" cy="1371600"/>
           </a:xfrm>
           <a:prstGeom prst="roundRect">
             <a:avLst>
@@ -11135,8 +11350,8 @@
         </p:nvSpPr>
         <p:spPr>
           <a:xfrm>
-            <a:off x="6400800" y="3913632"/>
-            <a:ext cx="3200400" cy="274320"/>
+            <a:off x="6400800" y="3730752"/>
+            <a:ext cx="3200400" cy="320040"/>
           </a:xfrm>
           <a:prstGeom prst="rect">
             <a:avLst/>
@@ -11151,9 +11366,9 @@
           <a:p>
             <a:pPr algn="ctr"/>
             <a:r>
-              <a:rPr sz="1200" b="0">
-                <a:solidFill>
-                  <a:srgbClr val="5F6B6D"/>
+              <a:rPr sz="1800" lang="pt-BR" b="0">
+                <a:solidFill>
+                  <a:srgbClr val="1F2A2E"/>
                 </a:solidFill>
               </a:rPr>
               <a:t>treino</a:t>
@@ -11169,8 +11384,8 @@
         </p:nvSpPr>
         <p:spPr>
           <a:xfrm>
-            <a:off x="9784080" y="3913632"/>
-            <a:ext cx="1005840" cy="274320"/>
+            <a:off x="9784080" y="3730752"/>
+            <a:ext cx="1005840" cy="320040"/>
           </a:xfrm>
           <a:prstGeom prst="rect">
             <a:avLst/>
@@ -11185,9 +11400,9 @@
           <a:p>
             <a:pPr algn="ctr"/>
             <a:r>
-              <a:rPr sz="1200" b="0">
-                <a:solidFill>
-                  <a:srgbClr val="5F6B6D"/>
+              <a:rPr sz="1800" lang="pt-BR" b="0">
+                <a:solidFill>
+                  <a:srgbClr val="1F2A2E"/>
                 </a:solidFill>
               </a:rPr>
               <a:t>teste</a:t>
@@ -11203,15 +11418,15 @@
         </p:nvCxnSpPr>
         <p:spPr>
           <a:xfrm>
-            <a:off x="6739128" y="2761488"/>
+            <a:off x="6748272" y="2697480"/>
             <a:ext cx="777240" cy="0"/>
           </a:xfrm>
           <a:prstGeom prst="line">
             <a:avLst/>
           </a:prstGeom>
-          <a:ln w="15875">
+          <a:ln w="19050">
             <a:solidFill>
-              <a:srgbClr val="5F6B6D"/>
+              <a:srgbClr val="3C4649"/>
             </a:solidFill>
           </a:ln>
         </p:spPr>
@@ -11238,15 +11453,15 @@
         </p:nvCxnSpPr>
         <p:spPr>
           <a:xfrm>
-            <a:off x="6739128" y="3447288"/>
+            <a:off x="6748272" y="3383280"/>
             <a:ext cx="777240" cy="0"/>
           </a:xfrm>
           <a:prstGeom prst="line">
             <a:avLst/>
           </a:prstGeom>
-          <a:ln w="15875">
+          <a:ln w="19050">
             <a:solidFill>
-              <a:srgbClr val="5F6B6D"/>
+              <a:srgbClr val="3C4649"/>
             </a:solidFill>
           </a:ln>
         </p:spPr>
@@ -11273,15 +11488,15 @@
         </p:nvCxnSpPr>
         <p:spPr>
           <a:xfrm>
-            <a:off x="8293608" y="2761488"/>
+            <a:off x="8302752" y="2697480"/>
             <a:ext cx="777240" cy="0"/>
           </a:xfrm>
           <a:prstGeom prst="line">
             <a:avLst/>
           </a:prstGeom>
-          <a:ln w="15875">
+          <a:ln w="19050">
             <a:solidFill>
-              <a:srgbClr val="5F6B6D"/>
+              <a:srgbClr val="3C4649"/>
             </a:solidFill>
           </a:ln>
         </p:spPr>
@@ -11308,15 +11523,15 @@
         </p:nvCxnSpPr>
         <p:spPr>
           <a:xfrm>
-            <a:off x="10049255" y="2761488"/>
+            <a:off x="10058400" y="2697480"/>
             <a:ext cx="0" cy="685800"/>
           </a:xfrm>
           <a:prstGeom prst="line">
             <a:avLst/>
           </a:prstGeom>
-          <a:ln w="15875">
+          <a:ln w="19050">
             <a:solidFill>
-              <a:srgbClr val="5F6B6D"/>
+              <a:srgbClr val="3C4649"/>
             </a:solidFill>
           </a:ln>
         </p:spPr>
@@ -11343,8 +11558,8 @@
         </p:nvSpPr>
         <p:spPr>
           <a:xfrm>
-            <a:off x="6583680" y="2606040"/>
-            <a:ext cx="310896" cy="310896"/>
+            <a:off x="6583680" y="2532888"/>
+            <a:ext cx="329184" cy="329184"/>
           </a:xfrm>
           <a:prstGeom prst="ellipse">
             <a:avLst/>
@@ -11389,8 +11604,8 @@
         </p:nvSpPr>
         <p:spPr>
           <a:xfrm>
-            <a:off x="7360920" y="2606040"/>
-            <a:ext cx="310896" cy="310896"/>
+            <a:off x="7360920" y="2532888"/>
+            <a:ext cx="329184" cy="329184"/>
           </a:xfrm>
           <a:prstGeom prst="ellipse">
             <a:avLst/>
@@ -11435,8 +11650,8 @@
         </p:nvSpPr>
         <p:spPr>
           <a:xfrm>
-            <a:off x="6583680" y="3291840"/>
-            <a:ext cx="310896" cy="310896"/>
+            <a:off x="6583680" y="3218688"/>
+            <a:ext cx="329184" cy="329184"/>
           </a:xfrm>
           <a:prstGeom prst="ellipse">
             <a:avLst/>
@@ -11481,8 +11696,8 @@
         </p:nvSpPr>
         <p:spPr>
           <a:xfrm>
-            <a:off x="7360920" y="3291840"/>
-            <a:ext cx="310896" cy="310896"/>
+            <a:off x="7360920" y="3218688"/>
+            <a:ext cx="329184" cy="329184"/>
           </a:xfrm>
           <a:prstGeom prst="ellipse">
             <a:avLst/>
@@ -11527,8 +11742,8 @@
         </p:nvSpPr>
         <p:spPr>
           <a:xfrm>
-            <a:off x="8138160" y="2606040"/>
-            <a:ext cx="310896" cy="310896"/>
+            <a:off x="8138160" y="2532888"/>
+            <a:ext cx="329184" cy="329184"/>
           </a:xfrm>
           <a:prstGeom prst="ellipse">
             <a:avLst/>
@@ -11573,8 +11788,8 @@
         </p:nvSpPr>
         <p:spPr>
           <a:xfrm>
-            <a:off x="8915400" y="2606040"/>
-            <a:ext cx="310896" cy="310896"/>
+            <a:off x="8915400" y="2532888"/>
+            <a:ext cx="329184" cy="329184"/>
           </a:xfrm>
           <a:prstGeom prst="ellipse">
             <a:avLst/>
@@ -11619,14 +11834,14 @@
         </p:nvSpPr>
         <p:spPr>
           <a:xfrm>
-            <a:off x="8138160" y="3291840"/>
-            <a:ext cx="310896" cy="310896"/>
+            <a:off x="8138160" y="3218688"/>
+            <a:ext cx="329184" cy="329184"/>
           </a:xfrm>
           <a:prstGeom prst="ellipse">
             <a:avLst/>
           </a:prstGeom>
           <a:solidFill>
-            <a:srgbClr val="9AA5A3"/>
+            <a:srgbClr val="7A8785"/>
           </a:solidFill>
           <a:ln w="15875">
             <a:solidFill>
@@ -11665,14 +11880,14 @@
         </p:nvSpPr>
         <p:spPr>
           <a:xfrm>
-            <a:off x="8915400" y="3291840"/>
-            <a:ext cx="310896" cy="310896"/>
+            <a:off x="8915400" y="3218688"/>
+            <a:ext cx="329184" cy="329184"/>
           </a:xfrm>
           <a:prstGeom prst="ellipse">
             <a:avLst/>
           </a:prstGeom>
           <a:solidFill>
-            <a:srgbClr val="9AA5A3"/>
+            <a:srgbClr val="7A8785"/>
           </a:solidFill>
           <a:ln w="15875">
             <a:solidFill>
@@ -11711,8 +11926,8 @@
         </p:nvSpPr>
         <p:spPr>
           <a:xfrm>
-            <a:off x="9893807" y="2606040"/>
-            <a:ext cx="310896" cy="310896"/>
+            <a:off x="9893808" y="2532888"/>
+            <a:ext cx="329184" cy="329184"/>
           </a:xfrm>
           <a:prstGeom prst="ellipse">
             <a:avLst/>
@@ -11757,8 +11972,8 @@
         </p:nvSpPr>
         <p:spPr>
           <a:xfrm>
-            <a:off x="9893807" y="3291840"/>
-            <a:ext cx="310896" cy="310896"/>
+            <a:off x="9893808" y="3218688"/>
+            <a:ext cx="329184" cy="329184"/>
           </a:xfrm>
           <a:prstGeom prst="ellipse">
             <a:avLst/>
@@ -11803,14 +12018,14 @@
         </p:nvSpPr>
         <p:spPr>
           <a:xfrm>
-            <a:off x="10351007" y="2606040"/>
-            <a:ext cx="310896" cy="310896"/>
+            <a:off x="10351008" y="2532888"/>
+            <a:ext cx="329184" cy="329184"/>
           </a:xfrm>
           <a:prstGeom prst="ellipse">
             <a:avLst/>
           </a:prstGeom>
           <a:solidFill>
-            <a:srgbClr val="9AA5A3"/>
+            <a:srgbClr val="7A8785"/>
           </a:solidFill>
           <a:ln w="15875">
             <a:solidFill>
@@ -11849,14 +12064,14 @@
         </p:nvSpPr>
         <p:spPr>
           <a:xfrm>
-            <a:off x="10351007" y="3291840"/>
-            <a:ext cx="310896" cy="310896"/>
+            <a:off x="10351008" y="3218688"/>
+            <a:ext cx="329184" cy="329184"/>
           </a:xfrm>
           <a:prstGeom prst="ellipse">
             <a:avLst/>
           </a:prstGeom>
           <a:solidFill>
-            <a:srgbClr val="9AA5A3"/>
+            <a:srgbClr val="7A8785"/>
           </a:solidFill>
           <a:ln w="15875">
             <a:solidFill>
@@ -11895,8 +12110,8 @@
         </p:nvSpPr>
         <p:spPr>
           <a:xfrm>
-            <a:off x="6400800" y="4297680"/>
-            <a:ext cx="4389120" cy="548640"/>
+            <a:off x="6400800" y="4114800"/>
+            <a:ext cx="4389120" cy="685800"/>
           </a:xfrm>
           <a:prstGeom prst="rect">
             <a:avLst/>
@@ -11911,7 +12126,7 @@
           <a:p>
             <a:pPr algn="l"/>
             <a:r>
-              <a:rPr sz="1400" b="1">
+              <a:rPr sz="1800" lang="pt-BR" b="1">
                 <a:solidFill>
                   <a:srgbClr val="0F4334"/>
                 </a:solidFill>
@@ -11930,7 +12145,7 @@
         <p:spPr>
           <a:xfrm>
             <a:off x="841248" y="4937760"/>
-            <a:ext cx="10149840" cy="274320"/>
+            <a:ext cx="10149840" cy="365760"/>
           </a:xfrm>
           <a:prstGeom prst="rect">
             <a:avLst/>
@@ -11945,12 +12160,12 @@
           <a:p>
             <a:pPr algn="l"/>
             <a:r>
-              <a:rPr sz="1200" b="0">
-                <a:solidFill>
-                  <a:srgbClr val="5F6B6D"/>
-                </a:solidFill>
-              </a:rPr>
-              <a:t>Mesma cor: moléculas com os mesmos 5 descritores (gêmeas) · esquema ilustrativo</a:t>
+              <a:rPr sz="1800" lang="pt-BR" b="0">
+                <a:solidFill>
+                  <a:srgbClr val="1F2A2E"/>
+                </a:solidFill>
+              </a:rPr>
+              <a:t>Mesma cor: gêmeas (mesmos 5 descritores) · esquema ilustrativo</a:t>
             </a:r>
           </a:p>
         </p:txBody>
@@ -11963,8 +12178,8 @@
         </p:nvSpPr>
         <p:spPr>
           <a:xfrm>
-            <a:off x="841248" y="5303520"/>
-            <a:ext cx="4754880" cy="914400"/>
+            <a:off x="841248" y="5394960"/>
+            <a:ext cx="2011680" cy="777240"/>
           </a:xfrm>
           <a:prstGeom prst="rect">
             <a:avLst/>
@@ -11972,18 +12187,14 @@
           <a:noFill/>
         </p:spPr>
         <p:txBody>
-          <a:bodyPr wrap="square" anchor="t" lIns="0" rIns="0" tIns="0" bIns="0">
+          <a:bodyPr wrap="square" anchor="ctr" lIns="0" rIns="0" tIns="0" bIns="0">
             <a:spAutoFit/>
           </a:bodyPr>
           <a:lstStyle/>
           <a:p>
-            <a:pPr algn="l">
-              <a:spcAft>
-                <a:spcPts val="0"/>
-              </a:spcAft>
-            </a:pPr>
-            <a:r>
-              <a:rPr sz="4000" b="1">
+            <a:pPr algn="l"/>
+            <a:r>
+              <a:rPr sz="4400" lang="pt-BR" b="1">
                 <a:solidFill>
                   <a:srgbClr val="09846C"/>
                 </a:solidFill>
@@ -11991,28 +12202,51 @@
               <a:t>25,8%</a:t>
             </a:r>
           </a:p>
+        </p:txBody>
+      </p:sp>
+      <p:sp>
+        <p:nvSpPr>
+          <p:cNvPr id="53" name="Legenda do destaque"/>
+          <p:cNvSpPr txBox="1"/>
+          <p:nvPr/>
+        </p:nvSpPr>
+        <p:spPr>
+          <a:xfrm>
+            <a:off x="2880360" y="5394960"/>
+            <a:ext cx="2743200" cy="777240"/>
+          </a:xfrm>
+          <a:prstGeom prst="rect">
+            <a:avLst/>
+          </a:prstGeom>
+          <a:noFill/>
+        </p:spPr>
+        <p:txBody>
+          <a:bodyPr wrap="square" anchor="ctr" lIns="0" rIns="0" tIns="0" bIns="0">
+            <a:spAutoFit/>
+          </a:bodyPr>
+          <a:lstStyle/>
           <a:p>
             <a:pPr algn="l"/>
             <a:r>
-              <a:rPr sz="1400" b="0">
+              <a:rPr sz="1800" lang="pt-BR" b="0">
                 <a:solidFill>
                   <a:srgbClr val="1F2A2E"/>
                 </a:solidFill>
               </a:rPr>
-              <a:t>das moléculas de teste têm gêmea no treino (divisão aleatória)</a:t>
-            </a:r>
-          </a:p>
-        </p:txBody>
-      </p:sp>
-      <p:sp>
-        <p:nvSpPr>
-          <p:cNvPr id="53" name="Cenários"/>
+              <a:t>do teste tem gêmea no treino (aleatória)</a:t>
+            </a:r>
+          </a:p>
+        </p:txBody>
+      </p:sp>
+      <p:sp>
+        <p:nvSpPr>
+          <p:cNvPr id="54" name="Cenários"/>
           <p:cNvSpPr/>
           <p:nvPr/>
         </p:nvSpPr>
         <p:spPr>
           <a:xfrm>
-            <a:off x="6217920" y="5440680"/>
+            <a:off x="6217920" y="5394960"/>
             <a:ext cx="4754880" cy="777240"/>
           </a:xfrm>
           <a:prstGeom prst="roundRect">
@@ -12048,12 +12282,23 @@
           <a:p>
             <a:pPr algn="ctr"/>
             <a:r>
-              <a:rPr sz="1600" b="1">
+              <a:rPr sz="2000" lang="pt-BR" b="1">
                 <a:solidFill>
                   <a:srgbClr val="0F4334"/>
                 </a:solidFill>
               </a:rPr>
-              <a:t>3 conjuntos de atributos × 2 divisões = 6 cenários, repetidos com 10 seeds</a:t>
+              <a:t>3 conjuntos × 2 divisões = 6 cenários</a:t>
+            </a:r>
+          </a:p>
+          <a:p>
+            <a:pPr algn="ctr"/>
+            <a:r>
+              <a:rPr sz="2000" lang="pt-BR" b="1">
+                <a:solidFill>
+                  <a:srgbClr val="0F4334"/>
+                </a:solidFill>
+              </a:rPr>
+              <a:t>repetidos com 10 seeds</a:t>
             </a:r>
           </a:p>
         </p:txBody>
@@ -12116,10 +12361,11 @@
           <a:lstStyle/>
           <a:p>
             <a:r>
-              <a:rPr sz="3600">
+              <a:rPr sz="4000" b="1" lang="pt-BR">
                 <a:solidFill>
                   <a:srgbClr val="0F4334"/>
                 </a:solidFill>
+                <a:latin typeface="Calibri"/>
               </a:rPr>
               <a:t>Contar o SMILES eleva a acurácia em 16%</a:t>
             </a:r>
@@ -12138,8 +12384,8 @@
         </p:nvSpPr>
         <p:spPr>
           <a:xfrm>
-            <a:off x="9966960" y="6217920"/>
-            <a:ext cx="1097280" cy="274320"/>
+            <a:off x="9966960" y="6172200"/>
+            <a:ext cx="1097280" cy="365760"/>
           </a:xfrm>
         </p:spPr>
         <p:txBody>
@@ -12148,14 +12394,14 @@
           <a:p>
             <a:pPr algn="r"/>
             <a:fld id="{B6F15528-21DE-4FAA-801E-634DDDAF4B2B}" type="slidenum">
-              <a:rPr lang="pt-BR" sz="1400">
-                <a:solidFill>
-                  <a:srgbClr val="5F6B6D"/>
+              <a:rPr lang="pt-BR" sz="1800" b="1">
+                <a:solidFill>
+                  <a:srgbClr val="3C4649"/>
                 </a:solidFill>
               </a:rPr>
               <a:t>‹#›</a:t>
             </a:fld>
-            <a:endParaRPr lang="pt-BR" sz="1400"/>
+            <a:endParaRPr lang="pt-BR" sz="1800"/>
           </a:p>
         </p:txBody>
       </p:sp>
@@ -12168,7 +12414,7 @@
         <p:spPr>
           <a:xfrm>
             <a:off x="841248" y="1828800"/>
-            <a:ext cx="6400800" cy="365760"/>
+            <a:ext cx="5577840" cy="411480"/>
           </a:xfrm>
           <a:prstGeom prst="rect">
             <a:avLst/>
@@ -12183,27 +12429,27 @@
           <a:p>
             <a:pPr algn="l"/>
             <a:r>
-              <a:rPr sz="1800" b="1">
+              <a:rPr sz="2400" lang="pt-BR" b="1">
                 <a:solidFill>
                   <a:srgbClr val="0F4334"/>
                 </a:solidFill>
               </a:rPr>
-              <a:t>Acurácia no teste por conjunto de atributos</a:t>
+              <a:t>Acurácia por conjunto de atributos</a:t>
             </a:r>
           </a:p>
         </p:txBody>
       </p:sp>
       <p:graphicFrame>
         <p:nvGraphicFramePr>
-          <p:cNvPr id="6" name="Chart 5"/>
+          <p:cNvPr id="6" name="Chart 5" descr="Gráfico de colunas: acurácia no teste, média de 10 seeds. Descritores: aleatória 81,2%, agrupada 77,1%. SMILES: 88,9% e 87,6%. Ambos: 90,8% e 89,4%."/>
           <p:cNvGraphicFramePr>
             <a:graphicFrameLocks noGrp="1"/>
           </p:cNvGraphicFramePr>
           <p:nvPr/>
         </p:nvGraphicFramePr>
         <p:xfrm>
-          <a:off x="841248" y="2240280"/>
-          <a:ext cx="6400800" cy="3931920"/>
+          <a:off x="841248" y="2286000"/>
+          <a:ext cx="5943600" cy="3840480"/>
         </p:xfrm>
         <a:graphic>
           <a:graphicData uri="http://schemas.openxmlformats.org/drawingml/2006/chart">
@@ -12219,8 +12465,8 @@
         </p:nvSpPr>
         <p:spPr>
           <a:xfrm>
-            <a:off x="7589520" y="1920240"/>
-            <a:ext cx="3383280" cy="914400"/>
+            <a:off x="6949440" y="1828800"/>
+            <a:ext cx="4023360" cy="1005840"/>
           </a:xfrm>
           <a:prstGeom prst="rect">
             <a:avLst/>
@@ -12235,7 +12481,7 @@
           <a:p>
             <a:pPr algn="l"/>
             <a:r>
-              <a:rPr sz="5400" b="1">
+              <a:rPr sz="6600" lang="pt-BR" b="1">
                 <a:solidFill>
                   <a:srgbClr val="09846C"/>
                 </a:solidFill>
@@ -12253,8 +12499,8 @@
         </p:nvSpPr>
         <p:spPr>
           <a:xfrm>
-            <a:off x="7589520" y="2926080"/>
-            <a:ext cx="3383280" cy="914400"/>
+            <a:off x="6949440" y="2880360"/>
+            <a:ext cx="4023360" cy="731520"/>
           </a:xfrm>
           <a:prstGeom prst="rect">
             <a:avLst/>
@@ -12269,12 +12515,12 @@
           <a:p>
             <a:pPr algn="l"/>
             <a:r>
-              <a:rPr sz="1400" b="0">
+              <a:rPr sz="2000" lang="pt-BR" b="0">
                 <a:solidFill>
                   <a:srgbClr val="1F2A2E"/>
                 </a:solidFill>
               </a:rPr>
-              <a:t>ganho relativo ao juntar descritores e contagens de SMILES (divisão agrupada: 77,1% → 89,4%)</a:t>
+              <a:t>ganho relativo com as contagens de SMILES (77,1% → 89,4%)</a:t>
             </a:r>
           </a:p>
         </p:txBody>
@@ -12287,8 +12533,8 @@
         </p:nvSpPr>
         <p:spPr>
           <a:xfrm>
-            <a:off x="7589520" y="4023360"/>
-            <a:ext cx="3383280" cy="502920"/>
+            <a:off x="6949440" y="3749039"/>
+            <a:ext cx="4023360" cy="365760"/>
           </a:xfrm>
           <a:prstGeom prst="rect">
             <a:avLst/>
@@ -12303,12 +12549,12 @@
           <a:p>
             <a:pPr algn="l"/>
             <a:r>
-              <a:rPr sz="1400" b="1">
+              <a:rPr sz="2000" lang="pt-BR" b="1">
                 <a:solidFill>
                   <a:srgbClr val="0F4334"/>
                 </a:solidFill>
               </a:rPr>
-              <a:t>Quanto a divisão aleatória superestima a acurácia</a:t>
+              <a:t>Superestimativa da divisão aleatória</a:t>
             </a:r>
           </a:p>
         </p:txBody>
@@ -12316,70 +12562,41 @@
       <p:sp>
         <p:nvSpPr>
           <p:cNvPr id="10" name="Superestimativa descritores"/>
-          <p:cNvSpPr/>
-          <p:nvPr/>
-        </p:nvSpPr>
-        <p:spPr>
-          <a:xfrm>
-            <a:off x="7589520" y="4617720"/>
-            <a:ext cx="1078992" cy="914400"/>
-          </a:xfrm>
-          <a:prstGeom prst="roundRect">
-            <a:avLst>
-              <a:gd name="adj" fmla="val 8000"/>
-            </a:avLst>
-          </a:prstGeom>
-          <a:solidFill>
-            <a:srgbClr val="FFFFFF"/>
-          </a:solidFill>
-          <a:ln>
-            <a:solidFill>
-              <a:srgbClr val="B7C4C1"/>
-            </a:solidFill>
-          </a:ln>
-          <a:effectLst/>
-        </p:spPr>
-        <p:style>
-          <a:lnRef idx="1">
-            <a:schemeClr val="accent1"/>
-          </a:lnRef>
-          <a:fillRef idx="3">
-            <a:schemeClr val="accent1"/>
-          </a:fillRef>
-          <a:effectRef idx="2">
-            <a:schemeClr val="accent1"/>
-          </a:effectRef>
-          <a:fontRef idx="minor">
-            <a:schemeClr val="lt1"/>
-          </a:fontRef>
-        </p:style>
-        <p:txBody>
-          <a:bodyPr rtlCol="0" anchor="ctr" wrap="square" lIns="27432" rIns="27432" tIns="54864" bIns="54864"/>
-          <a:lstStyle/>
-          <a:p>
-            <a:pPr algn="ctr">
-              <a:spcAft>
-                <a:spcPts val="0"/>
-              </a:spcAft>
-            </a:pPr>
-            <a:r>
-              <a:rPr sz="2200" b="1">
+          <p:cNvSpPr txBox="1"/>
+          <p:nvPr/>
+        </p:nvSpPr>
+        <p:spPr>
+          <a:xfrm>
+            <a:off x="6949440" y="4206240"/>
+            <a:ext cx="4023360" cy="457200"/>
+          </a:xfrm>
+          <a:prstGeom prst="rect">
+            <a:avLst/>
+          </a:prstGeom>
+          <a:noFill/>
+        </p:spPr>
+        <p:txBody>
+          <a:bodyPr wrap="square" anchor="ctr" lIns="0" rIns="0" tIns="0" bIns="0">
+            <a:spAutoFit/>
+          </a:bodyPr>
+          <a:lstStyle/>
+          <a:p>
+            <a:pPr algn="l"/>
+            <a:r>
+              <a:rPr sz="2800" lang="pt-BR" b="1">
                 <a:solidFill>
                   <a:srgbClr val="09846C"/>
                 </a:solidFill>
               </a:rPr>
               <a:t>5,3%</a:t>
             </a:r>
-          </a:p>
-          <a:p>
-            <a:pPr algn="ctr"/>
-            <a:r>
-              <a:rPr sz="1200" b="0">
+            <a:r>
+              <a:rPr sz="2000" lang="pt-BR" b="0">
                 <a:solidFill>
                   <a:srgbClr val="1F2A2E"/>
                 </a:solidFill>
               </a:rPr>
-              <a:t>descritores</a:t>
+              <a:t>  descritores</a:t>
             </a:r>
           </a:p>
         </p:txBody>
@@ -12387,70 +12604,41 @@
       <p:sp>
         <p:nvSpPr>
           <p:cNvPr id="11" name="Superestimativa SMILES"/>
-          <p:cNvSpPr/>
-          <p:nvPr/>
-        </p:nvSpPr>
-        <p:spPr>
-          <a:xfrm>
-            <a:off x="8759952" y="4617720"/>
-            <a:ext cx="1078992" cy="914400"/>
-          </a:xfrm>
-          <a:prstGeom prst="roundRect">
-            <a:avLst>
-              <a:gd name="adj" fmla="val 8000"/>
-            </a:avLst>
-          </a:prstGeom>
-          <a:solidFill>
-            <a:srgbClr val="FFFFFF"/>
-          </a:solidFill>
-          <a:ln>
-            <a:solidFill>
-              <a:srgbClr val="B7C4C1"/>
-            </a:solidFill>
-          </a:ln>
-          <a:effectLst/>
-        </p:spPr>
-        <p:style>
-          <a:lnRef idx="1">
-            <a:schemeClr val="accent1"/>
-          </a:lnRef>
-          <a:fillRef idx="3">
-            <a:schemeClr val="accent1"/>
-          </a:fillRef>
-          <a:effectRef idx="2">
-            <a:schemeClr val="accent1"/>
-          </a:effectRef>
-          <a:fontRef idx="minor">
-            <a:schemeClr val="lt1"/>
-          </a:fontRef>
-        </p:style>
-        <p:txBody>
-          <a:bodyPr rtlCol="0" anchor="ctr" wrap="square" lIns="27432" rIns="27432" tIns="54864" bIns="54864"/>
-          <a:lstStyle/>
-          <a:p>
-            <a:pPr algn="ctr">
-              <a:spcAft>
-                <a:spcPts val="0"/>
-              </a:spcAft>
-            </a:pPr>
-            <a:r>
-              <a:rPr sz="2200" b="1">
+          <p:cNvSpPr txBox="1"/>
+          <p:nvPr/>
+        </p:nvSpPr>
+        <p:spPr>
+          <a:xfrm>
+            <a:off x="6949440" y="4709159"/>
+            <a:ext cx="4023360" cy="457200"/>
+          </a:xfrm>
+          <a:prstGeom prst="rect">
+            <a:avLst/>
+          </a:prstGeom>
+          <a:noFill/>
+        </p:spPr>
+        <p:txBody>
+          <a:bodyPr wrap="square" anchor="ctr" lIns="0" rIns="0" tIns="0" bIns="0">
+            <a:spAutoFit/>
+          </a:bodyPr>
+          <a:lstStyle/>
+          <a:p>
+            <a:pPr algn="l"/>
+            <a:r>
+              <a:rPr sz="2800" lang="pt-BR" b="1">
                 <a:solidFill>
                   <a:srgbClr val="09846C"/>
                 </a:solidFill>
               </a:rPr>
               <a:t>1,5%</a:t>
             </a:r>
-          </a:p>
-          <a:p>
-            <a:pPr algn="ctr"/>
-            <a:r>
-              <a:rPr sz="1200" b="0">
+            <a:r>
+              <a:rPr sz="2000" lang="pt-BR" b="0">
                 <a:solidFill>
                   <a:srgbClr val="1F2A2E"/>
                 </a:solidFill>
               </a:rPr>
-              <a:t>SMILES</a:t>
+              <a:t>  SMILES</a:t>
             </a:r>
           </a:p>
         </p:txBody>
@@ -12458,84 +12646,55 @@
       <p:sp>
         <p:nvSpPr>
           <p:cNvPr id="12" name="Superestimativa ambos"/>
-          <p:cNvSpPr/>
-          <p:nvPr/>
-        </p:nvSpPr>
-        <p:spPr>
-          <a:xfrm>
-            <a:off x="9930384" y="4617720"/>
-            <a:ext cx="1078992" cy="914400"/>
-          </a:xfrm>
-          <a:prstGeom prst="roundRect">
-            <a:avLst>
-              <a:gd name="adj" fmla="val 8000"/>
-            </a:avLst>
-          </a:prstGeom>
-          <a:solidFill>
-            <a:srgbClr val="FFFFFF"/>
-          </a:solidFill>
-          <a:ln>
-            <a:solidFill>
-              <a:srgbClr val="B7C4C1"/>
-            </a:solidFill>
-          </a:ln>
-          <a:effectLst/>
-        </p:spPr>
-        <p:style>
-          <a:lnRef idx="1">
-            <a:schemeClr val="accent1"/>
-          </a:lnRef>
-          <a:fillRef idx="3">
-            <a:schemeClr val="accent1"/>
-          </a:fillRef>
-          <a:effectRef idx="2">
-            <a:schemeClr val="accent1"/>
-          </a:effectRef>
-          <a:fontRef idx="minor">
-            <a:schemeClr val="lt1"/>
-          </a:fontRef>
-        </p:style>
-        <p:txBody>
-          <a:bodyPr rtlCol="0" anchor="ctr" wrap="square" lIns="27432" rIns="27432" tIns="54864" bIns="54864"/>
-          <a:lstStyle/>
-          <a:p>
-            <a:pPr algn="ctr">
-              <a:spcAft>
-                <a:spcPts val="0"/>
-              </a:spcAft>
-            </a:pPr>
-            <a:r>
-              <a:rPr sz="2200" b="1">
+          <p:cNvSpPr txBox="1"/>
+          <p:nvPr/>
+        </p:nvSpPr>
+        <p:spPr>
+          <a:xfrm>
+            <a:off x="6949440" y="5212079"/>
+            <a:ext cx="4023360" cy="457200"/>
+          </a:xfrm>
+          <a:prstGeom prst="rect">
+            <a:avLst/>
+          </a:prstGeom>
+          <a:noFill/>
+        </p:spPr>
+        <p:txBody>
+          <a:bodyPr wrap="square" anchor="ctr" lIns="0" rIns="0" tIns="0" bIns="0">
+            <a:spAutoFit/>
+          </a:bodyPr>
+          <a:lstStyle/>
+          <a:p>
+            <a:pPr algn="l"/>
+            <a:r>
+              <a:rPr sz="2800" lang="pt-BR" b="1">
                 <a:solidFill>
                   <a:srgbClr val="09846C"/>
                 </a:solidFill>
               </a:rPr>
               <a:t>1,5%</a:t>
             </a:r>
-          </a:p>
-          <a:p>
-            <a:pPr algn="ctr"/>
-            <a:r>
-              <a:rPr sz="1200" b="0">
+            <a:r>
+              <a:rPr sz="2000" lang="pt-BR" b="0">
                 <a:solidFill>
                   <a:srgbClr val="1F2A2E"/>
                 </a:solidFill>
               </a:rPr>
-              <a:t>ambos</a:t>
-            </a:r>
-          </a:p>
-        </p:txBody>
-      </p:sp>
-      <p:sp>
-        <p:nvSpPr>
-          <p:cNvPr id="13" name="TextBox 12"/>
+              <a:t>  ambos</a:t>
+            </a:r>
+          </a:p>
+        </p:txBody>
+      </p:sp>
+      <p:sp>
+        <p:nvSpPr>
+          <p:cNvPr id="13" name="Nota"/>
           <p:cNvSpPr txBox="1"/>
           <p:nvPr/>
         </p:nvSpPr>
         <p:spPr>
           <a:xfrm>
-            <a:off x="7589520" y="5760720"/>
-            <a:ext cx="3383280" cy="274320"/>
+            <a:off x="6949440" y="5760720"/>
+            <a:ext cx="4023360" cy="411480"/>
           </a:xfrm>
           <a:prstGeom prst="rect">
             <a:avLst/>
@@ -12550,12 +12709,12 @@
           <a:p>
             <a:pPr algn="l"/>
             <a:r>
-              <a:rPr sz="1200" b="0">
-                <a:solidFill>
-                  <a:srgbClr val="5F6B6D"/>
-                </a:solidFill>
-              </a:rPr>
-              <a:t>Média de 10 seeds; desvio padrão de até 0,8%</a:t>
+              <a:rPr sz="1800" lang="pt-BR" b="0">
+                <a:solidFill>
+                  <a:srgbClr val="1F2A2E"/>
+                </a:solidFill>
+              </a:rPr>
+              <a:t>Média de 10 seeds; desvio até 0,8%</a:t>
             </a:r>
           </a:p>
         </p:txBody>
@@ -12618,10 +12777,11 @@
           <a:lstStyle/>
           <a:p>
             <a:r>
-              <a:rPr sz="3600">
+              <a:rPr sz="4000" b="1" lang="pt-BR">
                 <a:solidFill>
                   <a:srgbClr val="0F4334"/>
                 </a:solidFill>
+                <a:latin typeface="Calibri"/>
               </a:rPr>
               <a:t>A Random Forest supera a árvore em 6,4%, mas só a árvore tem regras legíveis</a:t>
             </a:r>
@@ -12640,8 +12800,8 @@
         </p:nvSpPr>
         <p:spPr>
           <a:xfrm>
-            <a:off x="9966960" y="6217920"/>
-            <a:ext cx="1097280" cy="274320"/>
+            <a:off x="9966960" y="6172200"/>
+            <a:ext cx="1097280" cy="365760"/>
           </a:xfrm>
         </p:spPr>
         <p:txBody>
@@ -12650,14 +12810,14 @@
           <a:p>
             <a:pPr algn="r"/>
             <a:fld id="{B6F15528-21DE-4FAA-801E-634DDDAF4B2B}" type="slidenum">
-              <a:rPr lang="pt-BR" sz="1400">
-                <a:solidFill>
-                  <a:srgbClr val="5F6B6D"/>
+              <a:rPr lang="pt-BR" sz="1800" b="1">
+                <a:solidFill>
+                  <a:srgbClr val="3C4649"/>
                 </a:solidFill>
               </a:rPr>
               <a:t>‹#›</a:t>
             </a:fld>
-            <a:endParaRPr lang="pt-BR" sz="1400"/>
+            <a:endParaRPr lang="pt-BR" sz="1800"/>
           </a:p>
         </p:txBody>
       </p:sp>
@@ -12670,7 +12830,7 @@
         <p:spPr>
           <a:xfrm>
             <a:off x="841248" y="1828800"/>
-            <a:ext cx="5303520" cy="365760"/>
+            <a:ext cx="4846320" cy="411480"/>
           </a:xfrm>
           <a:prstGeom prst="rect">
             <a:avLst/>
@@ -12685,27 +12845,27 @@
           <a:p>
             <a:pPr algn="l"/>
             <a:r>
-              <a:rPr sz="1800" b="1">
+              <a:rPr sz="2400" lang="pt-BR" b="1">
                 <a:solidFill>
                   <a:srgbClr val="0F4334"/>
                 </a:solidFill>
               </a:rPr>
-              <a:t>Acurácia na divisão agrupada (média de 10 seeds)</a:t>
+              <a:t>Acurácia na divisão agrupada</a:t>
             </a:r>
           </a:p>
         </p:txBody>
       </p:sp>
       <p:graphicFrame>
         <p:nvGraphicFramePr>
-          <p:cNvPr id="6" name="Chart 5"/>
+          <p:cNvPr id="6" name="Chart 5" descr="Gráfico de barras: acurácia na divisão agrupada. Sempre EGFR 29,3%, árvore de decisão 89,4%, gradient boosting 94,8%, Random Forest 95,2%."/>
           <p:cNvGraphicFramePr>
             <a:graphicFrameLocks noGrp="1"/>
           </p:cNvGraphicFramePr>
           <p:nvPr/>
         </p:nvGraphicFramePr>
         <p:xfrm>
-          <a:off x="841248" y="2286000"/>
-          <a:ext cx="5303520" cy="3566160"/>
+          <a:off x="841248" y="2331720"/>
+          <a:ext cx="4846320" cy="3566160"/>
         </p:xfrm>
         <a:graphic>
           <a:graphicData uri="http://schemas.openxmlformats.org/drawingml/2006/chart">
@@ -12721,8 +12881,8 @@
         </p:nvSpPr>
         <p:spPr>
           <a:xfrm>
-            <a:off x="6400800" y="1828800"/>
-            <a:ext cx="4572000" cy="365760"/>
+            <a:off x="6035040" y="1828800"/>
+            <a:ext cx="4937760" cy="411480"/>
           </a:xfrm>
           <a:prstGeom prst="rect">
             <a:avLst/>
@@ -12737,7 +12897,7 @@
           <a:p>
             <a:pPr algn="l"/>
             <a:r>
-              <a:rPr sz="1800" b="1">
+              <a:rPr sz="2400" lang="pt-BR" b="1">
                 <a:solidFill>
                   <a:srgbClr val="0F4334"/>
                 </a:solidFill>
@@ -12755,8 +12915,8 @@
         </p:nvSpPr>
         <p:spPr>
           <a:xfrm>
-            <a:off x="7498079" y="2331720"/>
-            <a:ext cx="2377440" cy="685800"/>
+            <a:off x="7132320" y="2377440"/>
+            <a:ext cx="2743200" cy="731520"/>
           </a:xfrm>
           <a:prstGeom prst="roundRect">
             <a:avLst>
@@ -12791,7 +12951,7 @@
           <a:p>
             <a:pPr algn="ctr"/>
             <a:r>
-              <a:rPr sz="1800" b="1">
+              <a:rPr sz="2400" lang="pt-BR" b="1">
                 <a:solidFill>
                   <a:srgbClr val="FFFFFF"/>
                 </a:solidFill>
@@ -12809,15 +12969,15 @@
         </p:nvCxnSpPr>
         <p:spPr>
           <a:xfrm flipH="1">
-            <a:off x="7475220" y="3017520"/>
-            <a:ext cx="1211580" cy="640080"/>
+            <a:off x="7223760" y="3108960"/>
+            <a:ext cx="1280160" cy="640079"/>
           </a:xfrm>
           <a:prstGeom prst="line">
             <a:avLst/>
           </a:prstGeom>
-          <a:ln w="19050">
+          <a:ln w="25400">
             <a:solidFill>
-              <a:srgbClr val="5F6B6D"/>
+              <a:srgbClr val="3C4649"/>
             </a:solidFill>
           </a:ln>
         </p:spPr>
@@ -12844,15 +13004,15 @@
         </p:nvCxnSpPr>
         <p:spPr>
           <a:xfrm>
-            <a:off x="8686800" y="3017520"/>
-            <a:ext cx="1211580" cy="640080"/>
+            <a:off x="8503920" y="3108960"/>
+            <a:ext cx="1280160" cy="640079"/>
           </a:xfrm>
           <a:prstGeom prst="line">
             <a:avLst/>
           </a:prstGeom>
-          <a:ln w="19050">
+          <a:ln w="25400">
             <a:solidFill>
-              <a:srgbClr val="5F6B6D"/>
+              <a:srgbClr val="3C4649"/>
             </a:solidFill>
           </a:ln>
         </p:spPr>
@@ -12879,8 +13039,8 @@
         </p:nvSpPr>
         <p:spPr>
           <a:xfrm>
-            <a:off x="6400800" y="3657600"/>
-            <a:ext cx="2148840" cy="1371600"/>
+            <a:off x="6035040" y="3749039"/>
+            <a:ext cx="2377440" cy="1600200"/>
           </a:xfrm>
           <a:prstGeom prst="roundRect">
             <a:avLst>
@@ -12919,12 +13079,12 @@
               </a:spcAft>
             </a:pPr>
             <a:r>
-              <a:rPr sz="1400" b="1">
+              <a:rPr sz="2000" lang="pt-BR" b="1">
                 <a:solidFill>
                   <a:srgbClr val="1F2A2E"/>
                 </a:solidFill>
               </a:rPr>
-              <a:t>Sim · 25,5% das moléculas</a:t>
+              <a:t>Sim: 25,5%</a:t>
             </a:r>
           </a:p>
           <a:p>
@@ -12934,7 +13094,7 @@
               </a:spcAft>
             </a:pPr>
             <a:r>
-              <a:rPr sz="1400" b="0">
+              <a:rPr sz="2000" lang="pt-BR" b="0">
                 <a:solidFill>
                   <a:srgbClr val="1F2A2E"/>
                 </a:solidFill>
@@ -12945,12 +13105,12 @@
           <a:p>
             <a:pPr algn="l"/>
             <a:r>
-              <a:rPr sz="1200" b="0">
-                <a:solidFill>
-                  <a:srgbClr val="5F6B6D"/>
-                </a:solidFill>
-              </a:rPr>
-              <a:t>Depois: átomos aromáticos ≤ 14?</a:t>
+              <a:rPr sz="1800" lang="pt-BR" b="0">
+                <a:solidFill>
+                  <a:srgbClr val="1F2A2E"/>
+                </a:solidFill>
+              </a:rPr>
+              <a:t>depois: aromáticos ≤ 14?</a:t>
             </a:r>
           </a:p>
         </p:txBody>
@@ -12963,8 +13123,8 @@
         </p:nvSpPr>
         <p:spPr>
           <a:xfrm>
-            <a:off x="8823960" y="3657600"/>
-            <a:ext cx="2148840" cy="1371600"/>
+            <a:off x="8595360" y="3749039"/>
+            <a:ext cx="2377440" cy="1600200"/>
           </a:xfrm>
           <a:prstGeom prst="roundRect">
             <a:avLst>
@@ -12976,7 +13136,7 @@
           </a:solidFill>
           <a:ln>
             <a:solidFill>
-              <a:srgbClr val="B7C4C1"/>
+              <a:srgbClr val="8A9795"/>
             </a:solidFill>
           </a:ln>
           <a:effectLst/>
@@ -13005,12 +13165,12 @@
               </a:spcAft>
             </a:pPr>
             <a:r>
-              <a:rPr sz="1400" b="1">
+              <a:rPr sz="2000" lang="pt-BR" b="1">
                 <a:solidFill>
                   <a:srgbClr val="1F2A2E"/>
                 </a:solidFill>
               </a:rPr>
-              <a:t>Não · 74,5% das moléculas</a:t>
+              <a:t>Não: 74,5%</a:t>
             </a:r>
           </a:p>
           <a:p>
@@ -13020,23 +13180,23 @@
               </a:spcAft>
             </a:pPr>
             <a:r>
-              <a:rPr sz="1400" b="0">
+              <a:rPr sz="2000" lang="pt-BR" b="0">
                 <a:solidFill>
                   <a:srgbClr val="1F2A2E"/>
                 </a:solidFill>
               </a:rPr>
-              <a:t>Mais comum: EGFR (34%)</a:t>
+              <a:t>34% EGFR (mistura)</a:t>
             </a:r>
           </a:p>
           <a:p>
             <a:pPr algn="l"/>
             <a:r>
-              <a:rPr sz="1200" b="0">
-                <a:solidFill>
-                  <a:srgbClr val="5F6B6D"/>
-                </a:solidFill>
-              </a:rPr>
-              <a:t>Depois: átomos aromáticos ≤ 12?</a:t>
+              <a:rPr sz="1800" lang="pt-BR" b="0">
+                <a:solidFill>
+                  <a:srgbClr val="1F2A2E"/>
+                </a:solidFill>
+              </a:rPr>
+              <a:t>depois: aromáticos ≤ 12?</a:t>
             </a:r>
           </a:p>
         </p:txBody>
@@ -13049,8 +13209,8 @@
         </p:nvSpPr>
         <p:spPr>
           <a:xfrm>
-            <a:off x="6400800" y="5257800"/>
-            <a:ext cx="4572000" cy="822960"/>
+            <a:off x="6035040" y="5486400"/>
+            <a:ext cx="4937760" cy="685800"/>
           </a:xfrm>
           <a:prstGeom prst="rect">
             <a:avLst/>
@@ -13065,12 +13225,12 @@
           <a:p>
             <a:pPr algn="l"/>
             <a:r>
-              <a:rPr sz="1400" b="0">
+              <a:rPr sz="1800" lang="pt-BR" b="0">
                 <a:solidFill>
                   <a:srgbClr val="1F2A2E"/>
                 </a:solidFill>
               </a:rPr>
-              <a:t>A árvore completa tem 1.854 folhas. TPSA e átomos aromáticos lideram a importância dos atributos.</a:t>
+              <a:t>Árvore completa: 1.854 folhas. TPSA e aromáticos lideram a importância.</a:t>
             </a:r>
           </a:p>
         </p:txBody>
@@ -13133,10 +13293,11 @@
           <a:lstStyle/>
           <a:p>
             <a:r>
-              <a:rPr sz="3600">
+              <a:rPr sz="4000" b="1" lang="pt-BR">
                 <a:solidFill>
                   <a:srgbClr val="0F4334"/>
                 </a:solidFill>
+                <a:latin typeface="Calibri"/>
               </a:rPr>
               <a:t>A árvore erra entre HDAC1 e EGFR e não sabe que errou</a:t>
             </a:r>
@@ -13155,8 +13316,8 @@
         </p:nvSpPr>
         <p:spPr>
           <a:xfrm>
-            <a:off x="9966960" y="6217920"/>
-            <a:ext cx="1097280" cy="274320"/>
+            <a:off x="9966960" y="6172200"/>
+            <a:ext cx="1097280" cy="365760"/>
           </a:xfrm>
         </p:spPr>
         <p:txBody>
@@ -13165,14 +13326,14 @@
           <a:p>
             <a:pPr algn="r"/>
             <a:fld id="{B6F15528-21DE-4FAA-801E-634DDDAF4B2B}" type="slidenum">
-              <a:rPr lang="pt-BR" sz="1400">
-                <a:solidFill>
-                  <a:srgbClr val="5F6B6D"/>
+              <a:rPr lang="pt-BR" sz="1800" b="1">
+                <a:solidFill>
+                  <a:srgbClr val="3C4649"/>
                 </a:solidFill>
               </a:rPr>
               <a:t>‹#›</a:t>
             </a:fld>
-            <a:endParaRPr lang="pt-BR" sz="1400"/>
+            <a:endParaRPr lang="pt-BR" sz="1800"/>
           </a:p>
         </p:txBody>
       </p:sp>
@@ -13185,7 +13346,7 @@
         <p:spPr>
           <a:xfrm>
             <a:off x="841248" y="1828800"/>
-            <a:ext cx="5120640" cy="365760"/>
+            <a:ext cx="5303520" cy="411480"/>
           </a:xfrm>
           <a:prstGeom prst="rect">
             <a:avLst/>
@@ -13200,7 +13361,7 @@
           <a:p>
             <a:pPr algn="l"/>
             <a:r>
-              <a:rPr sz="1800" b="1">
+              <a:rPr sz="2400" lang="pt-BR" b="1">
                 <a:solidFill>
                   <a:srgbClr val="0F4334"/>
                 </a:solidFill>
@@ -13212,15 +13373,15 @@
       </p:sp>
       <p:graphicFrame>
         <p:nvGraphicFramePr>
-          <p:cNvPr id="6" name="Matriz de confusão"/>
+          <p:cNvPr id="6" name="Matriz de confusão" descr="Matriz de confusão no teste, em contagens. Linhas: classe real; colunas: classe prevista. EGFR: EGFR 1449, BACE1 49, DRD2 39, HDAC1 75. BACE1: EGFR 52, BACE1 1335, DRD2 31, HDAC1 45. DRD2: EGFR 63, BACE1 41, DRD2 1178, HDAC1 25. HDAC1: EGFR 88, BACE1 42, DRD2 18, HDAC1 966."/>
           <p:cNvGraphicFramePr>
             <a:graphicFrameLocks noGrp="1"/>
           </p:cNvGraphicFramePr>
           <p:nvPr/>
         </p:nvGraphicFramePr>
         <p:xfrm>
-          <a:off x="841248" y="2286000"/>
-          <a:ext cx="5120640" cy="3200400"/>
+          <a:off x="841248" y="2331720"/>
+          <a:ext cx="5303520" cy="3200400"/>
         </p:xfrm>
         <a:graphic>
           <a:graphicData uri="http://schemas.openxmlformats.org/drawingml/2006/table">
@@ -13229,7 +13390,7 @@
                 <a:tableStyleId>{5C22544A-7EE6-4342-B048-85BDC9FD1C3A}</a:tableStyleId>
               </a:tblPr>
               <a:tblGrid>
-                <a:gridCol w="1097280"/>
+                <a:gridCol w="1280160"/>
                 <a:gridCol w="1005840"/>
                 <a:gridCol w="1005840"/>
                 <a:gridCol w="1005840"/>
@@ -13243,7 +13404,7 @@
                     <a:p>
                       <a:pPr algn="ctr"/>
                       <a:r>
-                        <a:rPr sz="1600" b="0">
+                        <a:rPr sz="2000" lang="pt-BR" b="0">
                           <a:solidFill>
                             <a:srgbClr val="1F2A2E"/>
                           </a:solidFill>
@@ -13252,7 +13413,7 @@
                       </a:r>
                     </a:p>
                   </a:txBody>
-                  <a:tcPr anchor="ctr">
+                  <a:tcPr anchor="ctr" marL="36576" marR="36576">
                     <a:solidFill>
                       <a:srgbClr val="FFFFFF"/>
                     </a:solidFill>
@@ -13265,7 +13426,7 @@
                     <a:p>
                       <a:pPr algn="ctr"/>
                       <a:r>
-                        <a:rPr sz="1600" b="1">
+                        <a:rPr sz="2000" lang="pt-BR" b="1">
                           <a:solidFill>
                             <a:srgbClr val="1F2A2E"/>
                           </a:solidFill>
@@ -13274,7 +13435,7 @@
                       </a:r>
                     </a:p>
                   </a:txBody>
-                  <a:tcPr anchor="ctr">
+                  <a:tcPr anchor="ctr" marL="36576" marR="36576">
                     <a:solidFill>
                       <a:srgbClr val="FFFFFF"/>
                     </a:solidFill>
@@ -13287,7 +13448,7 @@
                     <a:p>
                       <a:pPr algn="ctr"/>
                       <a:r>
-                        <a:rPr sz="1600" b="1">
+                        <a:rPr sz="2000" lang="pt-BR" b="1">
                           <a:solidFill>
                             <a:srgbClr val="1F2A2E"/>
                           </a:solidFill>
@@ -13296,7 +13457,7 @@
                       </a:r>
                     </a:p>
                   </a:txBody>
-                  <a:tcPr anchor="ctr">
+                  <a:tcPr anchor="ctr" marL="36576" marR="36576">
                     <a:solidFill>
                       <a:srgbClr val="FFFFFF"/>
                     </a:solidFill>
@@ -13309,7 +13470,7 @@
                     <a:p>
                       <a:pPr algn="ctr"/>
                       <a:r>
-                        <a:rPr sz="1600" b="1">
+                        <a:rPr sz="2000" lang="pt-BR" b="1">
                           <a:solidFill>
                             <a:srgbClr val="1F2A2E"/>
                           </a:solidFill>
@@ -13318,7 +13479,7 @@
                       </a:r>
                     </a:p>
                   </a:txBody>
-                  <a:tcPr anchor="ctr">
+                  <a:tcPr anchor="ctr" marL="36576" marR="36576">
                     <a:solidFill>
                       <a:srgbClr val="FFFFFF"/>
                     </a:solidFill>
@@ -13331,7 +13492,7 @@
                     <a:p>
                       <a:pPr algn="ctr"/>
                       <a:r>
-                        <a:rPr sz="1600" b="1">
+                        <a:rPr sz="2000" lang="pt-BR" b="1">
                           <a:solidFill>
                             <a:srgbClr val="1F2A2E"/>
                           </a:solidFill>
@@ -13340,7 +13501,7 @@
                       </a:r>
                     </a:p>
                   </a:txBody>
-                  <a:tcPr anchor="ctr">
+                  <a:tcPr anchor="ctr" marL="36576" marR="36576">
                     <a:solidFill>
                       <a:srgbClr val="FFFFFF"/>
                     </a:solidFill>
@@ -13355,7 +13516,7 @@
                     <a:p>
                       <a:pPr algn="ctr"/>
                       <a:r>
-                        <a:rPr sz="1600" b="1">
+                        <a:rPr sz="2000" lang="pt-BR" b="1">
                           <a:solidFill>
                             <a:srgbClr val="1F2A2E"/>
                           </a:solidFill>
@@ -13364,7 +13525,7 @@
                       </a:r>
                     </a:p>
                   </a:txBody>
-                  <a:tcPr anchor="ctr">
+                  <a:tcPr anchor="ctr" marL="36576" marR="36576">
                     <a:solidFill>
                       <a:srgbClr val="FFFFFF"/>
                     </a:solidFill>
@@ -13377,7 +13538,7 @@
                     <a:p>
                       <a:pPr algn="ctr"/>
                       <a:r>
-                        <a:rPr sz="1600" b="1">
+                        <a:rPr sz="2000" lang="pt-BR" b="1">
                           <a:solidFill>
                             <a:srgbClr val="FFFFFF"/>
                           </a:solidFill>
@@ -13386,7 +13547,7 @@
                       </a:r>
                     </a:p>
                   </a:txBody>
-                  <a:tcPr anchor="ctr">
+                  <a:tcPr anchor="ctr" marL="36576" marR="36576">
                     <a:solidFill>
                       <a:srgbClr val="22907B"/>
                     </a:solidFill>
@@ -13399,7 +13560,7 @@
                     <a:p>
                       <a:pPr algn="ctr"/>
                       <a:r>
-                        <a:rPr sz="1600" b="0">
+                        <a:rPr sz="2000" lang="pt-BR" b="0">
                           <a:solidFill>
                             <a:srgbClr val="1F2A2E"/>
                           </a:solidFill>
@@ -13408,7 +13569,7 @@
                       </a:r>
                     </a:p>
                   </a:txBody>
-                  <a:tcPr anchor="ctr">
+                  <a:tcPr anchor="ctr" marL="36576" marR="36576">
                     <a:solidFill>
                       <a:srgbClr val="F8FBFB"/>
                     </a:solidFill>
@@ -13421,7 +13582,7 @@
                     <a:p>
                       <a:pPr algn="ctr"/>
                       <a:r>
-                        <a:rPr sz="1600" b="0">
+                        <a:rPr sz="2000" lang="pt-BR" b="0">
                           <a:solidFill>
                             <a:srgbClr val="1F2A2E"/>
                           </a:solidFill>
@@ -13430,7 +13591,7 @@
                       </a:r>
                     </a:p>
                   </a:txBody>
-                  <a:tcPr anchor="ctr">
+                  <a:tcPr anchor="ctr" marL="36576" marR="36576">
                     <a:solidFill>
                       <a:srgbClr val="F9FCFB"/>
                     </a:solidFill>
@@ -13443,7 +13604,7 @@
                     <a:p>
                       <a:pPr algn="ctr"/>
                       <a:r>
-                        <a:rPr sz="1600" b="0">
+                        <a:rPr sz="2000" lang="pt-BR" b="0">
                           <a:solidFill>
                             <a:srgbClr val="1F2A2E"/>
                           </a:solidFill>
@@ -13452,7 +13613,7 @@
                       </a:r>
                     </a:p>
                   </a:txBody>
-                  <a:tcPr anchor="ctr">
+                  <a:tcPr anchor="ctr" marL="36576" marR="36576">
                     <a:solidFill>
                       <a:srgbClr val="F4F9F8"/>
                     </a:solidFill>
@@ -13467,7 +13628,7 @@
                     <a:p>
                       <a:pPr algn="ctr"/>
                       <a:r>
-                        <a:rPr sz="1600" b="1">
+                        <a:rPr sz="2000" lang="pt-BR" b="1">
                           <a:solidFill>
                             <a:srgbClr val="1F2A2E"/>
                           </a:solidFill>
@@ -13476,7 +13637,7 @@
                       </a:r>
                     </a:p>
                   </a:txBody>
-                  <a:tcPr anchor="ctr">
+                  <a:tcPr anchor="ctr" marL="36576" marR="36576">
                     <a:solidFill>
                       <a:srgbClr val="FFFFFF"/>
                     </a:solidFill>
@@ -13489,7 +13650,7 @@
                     <a:p>
                       <a:pPr algn="ctr"/>
                       <a:r>
-                        <a:rPr sz="1600" b="0">
+                        <a:rPr sz="2000" lang="pt-BR" b="0">
                           <a:solidFill>
                             <a:srgbClr val="1F2A2E"/>
                           </a:solidFill>
@@ -13498,7 +13659,7 @@
                       </a:r>
                     </a:p>
                   </a:txBody>
-                  <a:tcPr anchor="ctr">
+                  <a:tcPr anchor="ctr" marL="36576" marR="36576">
                     <a:solidFill>
                       <a:srgbClr val="F6FBFA"/>
                     </a:solidFill>
@@ -13511,7 +13672,7 @@
                     <a:p>
                       <a:pPr algn="ctr"/>
                       <a:r>
-                        <a:rPr sz="1600" b="1">
+                        <a:rPr sz="2000" lang="pt-BR" b="1">
                           <a:solidFill>
                             <a:srgbClr val="FFFFFF"/>
                           </a:solidFill>
@@ -13520,7 +13681,7 @@
                       </a:r>
                     </a:p>
                   </a:txBody>
-                  <a:tcPr anchor="ctr">
+                  <a:tcPr anchor="ctr" marL="36576" marR="36576">
                     <a:solidFill>
                       <a:srgbClr val="1F8F79"/>
                     </a:solidFill>
@@ -13533,7 +13694,7 @@
                     <a:p>
                       <a:pPr algn="ctr"/>
                       <a:r>
-                        <a:rPr sz="1600" b="0">
+                        <a:rPr sz="2000" lang="pt-BR" b="0">
                           <a:solidFill>
                             <a:srgbClr val="1F2A2E"/>
                           </a:solidFill>
@@ -13542,7 +13703,7 @@
                       </a:r>
                     </a:p>
                   </a:txBody>
-                  <a:tcPr anchor="ctr">
+                  <a:tcPr anchor="ctr" marL="36576" marR="36576">
                     <a:solidFill>
                       <a:srgbClr val="FAFCFC"/>
                     </a:solidFill>
@@ -13555,7 +13716,7 @@
                     <a:p>
                       <a:pPr algn="ctr"/>
                       <a:r>
-                        <a:rPr sz="1600" b="0">
+                        <a:rPr sz="2000" lang="pt-BR" b="0">
                           <a:solidFill>
                             <a:srgbClr val="1F2A2E"/>
                           </a:solidFill>
@@ -13564,7 +13725,7 @@
                       </a:r>
                     </a:p>
                   </a:txBody>
-                  <a:tcPr anchor="ctr">
+                  <a:tcPr anchor="ctr" marL="36576" marR="36576">
                     <a:solidFill>
                       <a:srgbClr val="F7FBFA"/>
                     </a:solidFill>
@@ -13579,7 +13740,7 @@
                     <a:p>
                       <a:pPr algn="ctr"/>
                       <a:r>
-                        <a:rPr sz="1600" b="1">
+                        <a:rPr sz="2000" lang="pt-BR" b="1">
                           <a:solidFill>
                             <a:srgbClr val="1F2A2E"/>
                           </a:solidFill>
@@ -13588,7 +13749,7 @@
                       </a:r>
                     </a:p>
                   </a:txBody>
-                  <a:tcPr anchor="ctr">
+                  <a:tcPr anchor="ctr" marL="36576" marR="36576">
                     <a:solidFill>
                       <a:srgbClr val="FFFFFF"/>
                     </a:solidFill>
@@ -13601,7 +13762,7 @@
                     <a:p>
                       <a:pPr algn="ctr"/>
                       <a:r>
-                        <a:rPr sz="1600" b="0">
+                        <a:rPr sz="2000" lang="pt-BR" b="0">
                           <a:solidFill>
                             <a:srgbClr val="1F2A2E"/>
                           </a:solidFill>
@@ -13610,7 +13771,7 @@
                       </a:r>
                     </a:p>
                   </a:txBody>
-                  <a:tcPr anchor="ctr">
+                  <a:tcPr anchor="ctr" marL="36576" marR="36576">
                     <a:solidFill>
                       <a:srgbClr val="F3F9F8"/>
                     </a:solidFill>
@@ -13623,7 +13784,7 @@
                     <a:p>
                       <a:pPr algn="ctr"/>
                       <a:r>
-                        <a:rPr sz="1600" b="0">
+                        <a:rPr sz="2000" lang="pt-BR" b="0">
                           <a:solidFill>
                             <a:srgbClr val="1F2A2E"/>
                           </a:solidFill>
@@ -13632,7 +13793,7 @@
                       </a:r>
                     </a:p>
                   </a:txBody>
-                  <a:tcPr anchor="ctr">
+                  <a:tcPr anchor="ctr" marL="36576" marR="36576">
                     <a:solidFill>
                       <a:srgbClr val="F7FBFA"/>
                     </a:solidFill>
@@ -13645,7 +13806,7 @@
                     <a:p>
                       <a:pPr algn="ctr"/>
                       <a:r>
-                        <a:rPr sz="1600" b="1">
+                        <a:rPr sz="2000" lang="pt-BR" b="1">
                           <a:solidFill>
                             <a:srgbClr val="FFFFFF"/>
                           </a:solidFill>
@@ -13654,7 +13815,7 @@
                       </a:r>
                     </a:p>
                   </a:txBody>
-                  <a:tcPr anchor="ctr">
+                  <a:tcPr anchor="ctr" marL="36576" marR="36576">
                     <a:solidFill>
                       <a:srgbClr val="21907B"/>
                     </a:solidFill>
@@ -13667,7 +13828,7 @@
                     <a:p>
                       <a:pPr algn="ctr"/>
                       <a:r>
-                        <a:rPr sz="1600" b="0">
+                        <a:rPr sz="2000" lang="pt-BR" b="0">
                           <a:solidFill>
                             <a:srgbClr val="1F2A2E"/>
                           </a:solidFill>
@@ -13676,7 +13837,7 @@
                       </a:r>
                     </a:p>
                   </a:txBody>
-                  <a:tcPr anchor="ctr">
+                  <a:tcPr anchor="ctr" marL="36576" marR="36576">
                     <a:solidFill>
                       <a:srgbClr val="FAFDFC"/>
                     </a:solidFill>
@@ -13691,7 +13852,7 @@
                     <a:p>
                       <a:pPr algn="ctr"/>
                       <a:r>
-                        <a:rPr sz="1600" b="1">
+                        <a:rPr sz="2000" lang="pt-BR" b="1">
                           <a:solidFill>
                             <a:srgbClr val="1F2A2E"/>
                           </a:solidFill>
@@ -13700,7 +13861,7 @@
                       </a:r>
                     </a:p>
                   </a:txBody>
-                  <a:tcPr anchor="ctr">
+                  <a:tcPr anchor="ctr" marL="36576" marR="36576">
                     <a:solidFill>
                       <a:srgbClr val="FFFFFF"/>
                     </a:solidFill>
@@ -13713,7 +13874,7 @@
                     <a:p>
                       <a:pPr algn="ctr"/>
                       <a:r>
-                        <a:rPr sz="1600" b="0">
+                        <a:rPr sz="2000" lang="pt-BR" b="0">
                           <a:solidFill>
                             <a:srgbClr val="1F2A2E"/>
                           </a:solidFill>
@@ -13722,7 +13883,7 @@
                       </a:r>
                     </a:p>
                   </a:txBody>
-                  <a:tcPr anchor="ctr">
+                  <a:tcPr anchor="ctr" marL="36576" marR="36576">
                     <a:solidFill>
                       <a:srgbClr val="ECF5F3"/>
                     </a:solidFill>
@@ -13735,7 +13896,7 @@
                     <a:p>
                       <a:pPr algn="ctr"/>
                       <a:r>
-                        <a:rPr sz="1600" b="0">
+                        <a:rPr sz="2000" lang="pt-BR" b="0">
                           <a:solidFill>
                             <a:srgbClr val="1F2A2E"/>
                           </a:solidFill>
@@ -13744,7 +13905,7 @@
                       </a:r>
                     </a:p>
                   </a:txBody>
-                  <a:tcPr anchor="ctr">
+                  <a:tcPr anchor="ctr" marL="36576" marR="36576">
                     <a:solidFill>
                       <a:srgbClr val="F6FAF9"/>
                     </a:solidFill>
@@ -13757,7 +13918,7 @@
                     <a:p>
                       <a:pPr algn="ctr"/>
                       <a:r>
-                        <a:rPr sz="1600" b="0">
+                        <a:rPr sz="2000" lang="pt-BR" b="0">
                           <a:solidFill>
                             <a:srgbClr val="1F2A2E"/>
                           </a:solidFill>
@@ -13766,7 +13927,7 @@
                       </a:r>
                     </a:p>
                   </a:txBody>
-                  <a:tcPr anchor="ctr">
+                  <a:tcPr anchor="ctr" marL="36576" marR="36576">
                     <a:solidFill>
                       <a:srgbClr val="FBFDFD"/>
                     </a:solidFill>
@@ -13779,7 +13940,7 @@
                     <a:p>
                       <a:pPr algn="ctr"/>
                       <a:r>
-                        <a:rPr sz="1600" b="1">
+                        <a:rPr sz="2000" lang="pt-BR" b="1">
                           <a:solidFill>
                             <a:srgbClr val="FFFFFF"/>
                           </a:solidFill>
@@ -13788,7 +13949,7 @@
                       </a:r>
                     </a:p>
                   </a:txBody>
-                  <a:tcPr anchor="ctr">
+                  <a:tcPr anchor="ctr" marL="36576" marR="36576">
                     <a:solidFill>
                       <a:srgbClr val="2A9480"/>
                     </a:solidFill>
@@ -13801,14 +13962,14 @@
       </p:graphicFrame>
       <p:sp>
         <p:nvSpPr>
-          <p:cNvPr id="7" name="TextBox 6"/>
+          <p:cNvPr id="7" name="Legenda da matriz"/>
           <p:cNvSpPr txBox="1"/>
           <p:nvPr/>
         </p:nvSpPr>
         <p:spPr>
           <a:xfrm>
             <a:off x="841248" y="5623560"/>
-            <a:ext cx="5120640" cy="274320"/>
+            <a:ext cx="5303520" cy="365760"/>
           </a:xfrm>
           <a:prstGeom prst="rect">
             <a:avLst/>
@@ -13823,12 +13984,12 @@
           <a:p>
             <a:pPr algn="l"/>
             <a:r>
-              <a:rPr sz="1200" b="0">
-                <a:solidFill>
-                  <a:srgbClr val="5F6B6D"/>
-                </a:solidFill>
-              </a:rPr>
-              <a:t>Linhas: classe real · colunas: classe prevista; cor pela proporção da linha</a:t>
+              <a:rPr sz="1800" lang="pt-BR" b="0">
+                <a:solidFill>
+                  <a:srgbClr val="1F2A2E"/>
+                </a:solidFill>
+              </a:rPr>
+              <a:t>Linha: classe real · coluna: prevista</a:t>
             </a:r>
           </a:p>
         </p:txBody>
@@ -13841,8 +14002,8 @@
         </p:nvSpPr>
         <p:spPr>
           <a:xfrm>
-            <a:off x="6400800" y="1828800"/>
-            <a:ext cx="4572000" cy="1188720"/>
+            <a:off x="6492240" y="1828800"/>
+            <a:ext cx="4480560" cy="1188720"/>
           </a:xfrm>
           <a:prstGeom prst="rect">
             <a:avLst/>
@@ -13861,7 +14022,7 @@
               </a:spcAft>
             </a:pPr>
             <a:r>
-              <a:rPr sz="4000" b="1">
+              <a:rPr sz="4800" lang="pt-BR" b="1">
                 <a:solidFill>
                   <a:srgbClr val="09846C"/>
                 </a:solidFill>
@@ -13872,7 +14033,7 @@
           <a:p>
             <a:pPr algn="l"/>
             <a:r>
-              <a:rPr sz="1600" b="0">
+              <a:rPr sz="2200" lang="pt-BR" b="0">
                 <a:solidFill>
                   <a:srgbClr val="1F2A2E"/>
                 </a:solidFill>
@@ -13884,14 +14045,14 @@
       </p:sp>
       <p:sp>
         <p:nvSpPr>
-          <p:cNvPr id="9" name="Exemplo de erro"/>
+          <p:cNvPr id="9" name="Limite dos atributos"/>
           <p:cNvSpPr txBox="1"/>
           <p:nvPr/>
         </p:nvSpPr>
         <p:spPr>
           <a:xfrm>
-            <a:off x="6400800" y="3108960"/>
-            <a:ext cx="4572000" cy="1463040"/>
+            <a:off x="6492240" y="3108960"/>
+            <a:ext cx="4480560" cy="1554480"/>
           </a:xfrm>
           <a:prstGeom prst="rect">
             <a:avLst/>
@@ -13910,57 +14071,23 @@
               </a:spcAft>
             </a:pPr>
             <a:r>
-              <a:rPr sz="1400" b="1">
+              <a:rPr sz="2200" lang="pt-BR" b="1">
                 <a:solidFill>
                   <a:srgbClr val="1F2A2E"/>
                 </a:solidFill>
               </a:rPr>
-              <a:t>Exemplo: HDAC1 lido como EGFR</a:t>
-            </a:r>
-          </a:p>
-          <a:p>
-            <a:pPr algn="l">
-              <a:spcAft>
-                <a:spcPts val="400"/>
-              </a:spcAft>
-            </a:pPr>
-            <a:r>
-              <a:rPr sz="1100" b="0">
+              <a:t>Por que erra?</a:t>
+            </a:r>
+          </a:p>
+          <a:p>
+            <a:pPr algn="l"/>
+            <a:r>
+              <a:rPr sz="2000" lang="pt-BR" b="0">
                 <a:solidFill>
                   <a:srgbClr val="1F2A2E"/>
                 </a:solidFill>
-                <a:latin typeface="Courier New"/>
-              </a:rPr>
-              <a:t>CCN(CC)CCn1cnc2cc(C(=O)NC(=O)NCCCCC</a:t>
-            </a:r>
-            <a:r>
-              <a:rPr sz="1100" b="1">
-                <a:solidFill>
-                  <a:srgbClr val="B23A2E"/>
-                </a:solidFill>
-                <a:latin typeface="Courier New"/>
-              </a:rPr>
-              <a:t>C(=O)NO</a:t>
-            </a:r>
-            <a:r>
-              <a:rPr sz="1100" b="0">
-                <a:solidFill>
-                  <a:srgbClr val="1F2A2E"/>
-                </a:solidFill>
-                <a:latin typeface="Courier New"/>
-              </a:rPr>
-              <a:t>)ccc21</a:t>
-            </a:r>
-          </a:p>
-          <a:p>
-            <a:pPr algn="l"/>
-            <a:r>
-              <a:rPr sz="1400" b="0">
-                <a:solidFill>
-                  <a:srgbClr val="1F2A2E"/>
-                </a:solidFill>
-              </a:rPr>
-              <a:t>Contar caracteres não distingue o grupo de átomos C(=O)NO</a:t>
+              </a:rPr>
+              <a:t>Os atributos tirados do SMILES são só contagens e podem não bastar para representar a molécula</a:t>
             </a:r>
           </a:p>
         </p:txBody>
@@ -13973,8 +14100,8 @@
         </p:nvSpPr>
         <p:spPr>
           <a:xfrm>
-            <a:off x="6400800" y="4754880"/>
-            <a:ext cx="4572000" cy="1371600"/>
+            <a:off x="6492240" y="4754880"/>
+            <a:ext cx="4480560" cy="1371600"/>
           </a:xfrm>
           <a:prstGeom prst="rect">
             <a:avLst/>
@@ -13993,7 +14120,7 @@
               </a:spcAft>
             </a:pPr>
             <a:r>
-              <a:rPr sz="4000" b="1">
+              <a:rPr sz="4800" lang="pt-BR" b="1">
                 <a:solidFill>
                   <a:srgbClr val="09846C"/>
                 </a:solidFill>
@@ -14004,12 +14131,12 @@
           <a:p>
             <a:pPr algn="l"/>
             <a:r>
-              <a:rPr sz="1400" b="0">
+              <a:rPr sz="2000" lang="pt-BR" b="0">
                 <a:solidFill>
                   <a:srgbClr val="1F2A2E"/>
                 </a:solidFill>
               </a:rPr>
-              <a:t>de confiança nas 5.496 previsões, com 10,3% erradas</a:t>
+              <a:t>de confiança nas 5.496 previsões; 10,3% erradas</a:t>
             </a:r>
           </a:p>
         </p:txBody>
